--- a/reference_material/slides/021_r_squared.pptx
+++ b/reference_material/slides/021_r_squared.pptx
@@ -11,30 +11,36 @@
     <p:sldId id="257" r:id="rId5"/>
     <p:sldId id="285" r:id="rId6"/>
     <p:sldId id="284" r:id="rId7"/>
-    <p:sldId id="259" r:id="rId8"/>
-    <p:sldId id="260" r:id="rId9"/>
-    <p:sldId id="261" r:id="rId10"/>
-    <p:sldId id="263" r:id="rId11"/>
-    <p:sldId id="262" r:id="rId12"/>
-    <p:sldId id="264" r:id="rId13"/>
-    <p:sldId id="265" r:id="rId14"/>
-    <p:sldId id="266" r:id="rId15"/>
-    <p:sldId id="277" r:id="rId16"/>
-    <p:sldId id="267" r:id="rId17"/>
-    <p:sldId id="268" r:id="rId18"/>
-    <p:sldId id="269" r:id="rId19"/>
-    <p:sldId id="270" r:id="rId20"/>
-    <p:sldId id="271" r:id="rId21"/>
-    <p:sldId id="272" r:id="rId22"/>
-    <p:sldId id="273" r:id="rId23"/>
-    <p:sldId id="274" r:id="rId24"/>
-    <p:sldId id="275" r:id="rId25"/>
-    <p:sldId id="278" r:id="rId26"/>
-    <p:sldId id="281" r:id="rId27"/>
-    <p:sldId id="279" r:id="rId28"/>
-    <p:sldId id="280" r:id="rId29"/>
-    <p:sldId id="282" r:id="rId30"/>
-    <p:sldId id="283" r:id="rId31"/>
+    <p:sldId id="286" r:id="rId8"/>
+    <p:sldId id="287" r:id="rId9"/>
+    <p:sldId id="259" r:id="rId10"/>
+    <p:sldId id="260" r:id="rId11"/>
+    <p:sldId id="289" r:id="rId12"/>
+    <p:sldId id="261" r:id="rId13"/>
+    <p:sldId id="263" r:id="rId14"/>
+    <p:sldId id="262" r:id="rId15"/>
+    <p:sldId id="288" r:id="rId16"/>
+    <p:sldId id="264" r:id="rId17"/>
+    <p:sldId id="265" r:id="rId18"/>
+    <p:sldId id="266" r:id="rId19"/>
+    <p:sldId id="277" r:id="rId20"/>
+    <p:sldId id="267" r:id="rId21"/>
+    <p:sldId id="268" r:id="rId22"/>
+    <p:sldId id="269" r:id="rId23"/>
+    <p:sldId id="290" r:id="rId24"/>
+    <p:sldId id="270" r:id="rId25"/>
+    <p:sldId id="291" r:id="rId26"/>
+    <p:sldId id="271" r:id="rId27"/>
+    <p:sldId id="272" r:id="rId28"/>
+    <p:sldId id="273" r:id="rId29"/>
+    <p:sldId id="274" r:id="rId30"/>
+    <p:sldId id="275" r:id="rId31"/>
+    <p:sldId id="278" r:id="rId32"/>
+    <p:sldId id="281" r:id="rId33"/>
+    <p:sldId id="279" r:id="rId34"/>
+    <p:sldId id="280" r:id="rId35"/>
+    <p:sldId id="282" r:id="rId36"/>
+    <p:sldId id="283" r:id="rId37"/>
   </p:sldIdLst>
   <p:sldSz cx="12192000" cy="6858000"/>
   <p:notesSz cx="6858000" cy="9144000"/>
@@ -280,7 +286,7 @@
           <a:p>
             <a:fld id="{CAF3DAB3-4FA8-CF41-99A4-732AB256F842}" type="datetimeFigureOut">
               <a:rPr lang="en-US" smtClean="0"/>
-              <a:t>11/17/25</a:t>
+              <a:t>10/27/26</a:t>
             </a:fld>
             <a:endParaRPr lang="en-US"/>
           </a:p>
@@ -491,7 +497,7 @@
           <a:p>
             <a:fld id="{CAF3DAB3-4FA8-CF41-99A4-732AB256F842}" type="datetimeFigureOut">
               <a:rPr lang="en-US" smtClean="0"/>
-              <a:t>11/17/25</a:t>
+              <a:t>10/27/26</a:t>
             </a:fld>
             <a:endParaRPr lang="en-US"/>
           </a:p>
@@ -706,7 +712,7 @@
           <a:p>
             <a:fld id="{CAF3DAB3-4FA8-CF41-99A4-732AB256F842}" type="datetimeFigureOut">
               <a:rPr lang="en-US" smtClean="0"/>
-              <a:t>11/17/25</a:t>
+              <a:t>10/27/26</a:t>
             </a:fld>
             <a:endParaRPr lang="en-US"/>
           </a:p>
@@ -907,7 +913,7 @@
           <a:p>
             <a:fld id="{CAF3DAB3-4FA8-CF41-99A4-732AB256F842}" type="datetimeFigureOut">
               <a:rPr lang="en-US" smtClean="0"/>
-              <a:t>11/17/25</a:t>
+              <a:t>10/27/26</a:t>
             </a:fld>
             <a:endParaRPr lang="en-US"/>
           </a:p>
@@ -1186,7 +1192,7 @@
           <a:p>
             <a:fld id="{CAF3DAB3-4FA8-CF41-99A4-732AB256F842}" type="datetimeFigureOut">
               <a:rPr lang="en-US" smtClean="0"/>
-              <a:t>11/17/25</a:t>
+              <a:t>10/27/26</a:t>
             </a:fld>
             <a:endParaRPr lang="en-US"/>
           </a:p>
@@ -1454,7 +1460,7 @@
           <a:p>
             <a:fld id="{CAF3DAB3-4FA8-CF41-99A4-732AB256F842}" type="datetimeFigureOut">
               <a:rPr lang="en-US" smtClean="0"/>
-              <a:t>11/17/25</a:t>
+              <a:t>10/27/26</a:t>
             </a:fld>
             <a:endParaRPr lang="en-US"/>
           </a:p>
@@ -1870,7 +1876,7 @@
           <a:p>
             <a:fld id="{CAF3DAB3-4FA8-CF41-99A4-732AB256F842}" type="datetimeFigureOut">
               <a:rPr lang="en-US" smtClean="0"/>
-              <a:t>11/17/25</a:t>
+              <a:t>10/27/26</a:t>
             </a:fld>
             <a:endParaRPr lang="en-US"/>
           </a:p>
@@ -2019,7 +2025,7 @@
           <a:p>
             <a:fld id="{CAF3DAB3-4FA8-CF41-99A4-732AB256F842}" type="datetimeFigureOut">
               <a:rPr lang="en-US" smtClean="0"/>
-              <a:t>11/17/25</a:t>
+              <a:t>10/27/26</a:t>
             </a:fld>
             <a:endParaRPr lang="en-US"/>
           </a:p>
@@ -2145,7 +2151,7 @@
           <a:p>
             <a:fld id="{CAF3DAB3-4FA8-CF41-99A4-732AB256F842}" type="datetimeFigureOut">
               <a:rPr lang="en-US" smtClean="0"/>
-              <a:t>11/17/25</a:t>
+              <a:t>10/27/26</a:t>
             </a:fld>
             <a:endParaRPr lang="en-US"/>
           </a:p>
@@ -2396,7 +2402,7 @@
           <a:p>
             <a:fld id="{CAF3DAB3-4FA8-CF41-99A4-732AB256F842}" type="datetimeFigureOut">
               <a:rPr lang="en-US" smtClean="0"/>
-              <a:t>11/17/25</a:t>
+              <a:t>10/27/26</a:t>
             </a:fld>
             <a:endParaRPr lang="en-US"/>
           </a:p>
@@ -2841,7 +2847,7 @@
           <a:p>
             <a:fld id="{CAF3DAB3-4FA8-CF41-99A4-732AB256F842}" type="datetimeFigureOut">
               <a:rPr lang="en-US" smtClean="0"/>
-              <a:t>11/17/25</a:t>
+              <a:t>10/27/26</a:t>
             </a:fld>
             <a:endParaRPr lang="en-US"/>
           </a:p>
@@ -3175,7 +3181,7 @@
           <a:p>
             <a:fld id="{CAF3DAB3-4FA8-CF41-99A4-732AB256F842}" type="datetimeFigureOut">
               <a:rPr lang="en-US" smtClean="0"/>
-              <a:t>11/17/25</a:t>
+              <a:t>10/27/26</a:t>
             </a:fld>
             <a:endParaRPr lang="en-US"/>
           </a:p>
@@ -3645,7 +3651,7 @@
 </file>
 
 <file path=ppt/slides/slide1.xml><?xml version="1.0" encoding="utf-8"?>
-<p:sld xmlns:a="http://schemas.openxmlformats.org/drawingml/2006/main" xmlns:r="http://schemas.openxmlformats.org/officeDocument/2006/relationships" xmlns:p="http://schemas.openxmlformats.org/presentationml/2006/main">
+<p:sld xmlns:a="http://schemas.openxmlformats.org/drawingml/2006/main" xmlns:r="http://schemas.openxmlformats.org/officeDocument/2006/relationships" xmlns:p="http://schemas.openxmlformats.org/presentationml/2006/main" show="0">
   <p:cSld>
     <p:spTree>
       <p:nvGrpSpPr>
@@ -3856,7 +3862,7 @@
           <p:cNvPr id="2" name="Title 1">
             <a:extLst>
               <a:ext uri="{FF2B5EF4-FFF2-40B4-BE49-F238E27FC236}">
-                <a16:creationId xmlns:a16="http://schemas.microsoft.com/office/drawing/2014/main" id="{0B18DCD2-1B99-D357-7072-1F6CD5A1CBC8}"/>
+                <a16:creationId xmlns:a16="http://schemas.microsoft.com/office/drawing/2014/main" id="{0507D6C5-A8AB-509C-41B6-10B5AF5271F7}"/>
               </a:ext>
             </a:extLst>
           </p:cNvPr>
@@ -3867,14 +3873,19 @@
             <p:ph type="title"/>
           </p:nvPr>
         </p:nvSpPr>
-        <p:spPr/>
-        <p:txBody>
-          <a:bodyPr/>
-          <a:lstStyle/>
-          <a:p>
-            <a:r>
-              <a:rPr lang="en-US" dirty="0"/>
-              <a:t>You can Frame it in Terms of Error as well</a:t>
+        <p:spPr>
+          <a:xfrm>
+            <a:off x="778477" y="804519"/>
+            <a:ext cx="10276378" cy="1049235"/>
+          </a:xfrm>
+        </p:spPr>
+        <p:txBody>
+          <a:bodyPr/>
+          <a:lstStyle/>
+          <a:p>
+            <a:r>
+              <a:rPr lang="en-US" dirty="0"/>
+              <a:t>Variance – Our data varies</a:t>
             </a:r>
           </a:p>
         </p:txBody>
@@ -3884,7 +3895,7 @@
           <p:cNvPr id="3" name="Content Placeholder 2">
             <a:extLst>
               <a:ext uri="{FF2B5EF4-FFF2-40B4-BE49-F238E27FC236}">
-                <a16:creationId xmlns:a16="http://schemas.microsoft.com/office/drawing/2014/main" id="{67F840EE-F9E4-5677-1216-938AEF04A85A}"/>
+                <a16:creationId xmlns:a16="http://schemas.microsoft.com/office/drawing/2014/main" id="{C18B5CDD-C7C6-04CD-AA50-BDA0EAE527F8}"/>
               </a:ext>
             </a:extLst>
           </p:cNvPr>
@@ -3897,45 +3908,68 @@
         </p:nvSpPr>
         <p:spPr>
           <a:xfrm>
-            <a:off x="8629822" y="2015732"/>
-            <a:ext cx="3319162" cy="3450613"/>
-          </a:xfrm>
-        </p:spPr>
-        <p:txBody>
-          <a:bodyPr/>
-          <a:lstStyle/>
-          <a:p>
-            <a:r>
-              <a:rPr lang="en-US" dirty="0"/>
-              <a:t>Deviation from mean is ‘wrong’. </a:t>
-            </a:r>
-          </a:p>
-          <a:p>
-            <a:r>
-              <a:rPr lang="en-US" dirty="0"/>
-              <a:t>Some error is captured by model. </a:t>
-            </a:r>
-          </a:p>
-          <a:p>
-            <a:r>
-              <a:rPr lang="en-US" dirty="0"/>
-              <a:t>The rest is residual. </a:t>
-            </a:r>
-          </a:p>
-          <a:p>
-            <a:r>
-              <a:rPr lang="en-US" dirty="0"/>
-              <a:t>I don’t like this thought model, personally. </a:t>
+            <a:off x="627322" y="1853754"/>
+            <a:ext cx="8197702" cy="4199727"/>
+          </a:xfrm>
+        </p:spPr>
+        <p:txBody>
+          <a:bodyPr/>
+          <a:lstStyle/>
+          <a:p>
+            <a:r>
+              <a:rPr lang="en-US" dirty="0"/>
+              <a:t>We can think of our target, y, in terms of its variance. </a:t>
+            </a:r>
+          </a:p>
+          <a:p>
+            <a:pPr lvl="1"/>
+            <a:r>
+              <a:rPr lang="en-US" dirty="0"/>
+              <a:t>Y varies – it literally has different values for different x inputs. </a:t>
+            </a:r>
+          </a:p>
+          <a:p>
+            <a:pPr lvl="1"/>
+            <a:r>
+              <a:rPr lang="en-US" dirty="0"/>
+              <a:t>We can measure that amount of variance by measuring how far values are from the mean. </a:t>
+            </a:r>
+          </a:p>
+          <a:p>
+            <a:r>
+              <a:rPr lang="en-US" dirty="0"/>
+              <a:t>This is known as SST or sum of squares total. </a:t>
+            </a:r>
+          </a:p>
+          <a:p>
+            <a:pPr lvl="1"/>
+            <a:r>
+              <a:rPr lang="en-US" dirty="0"/>
+              <a:t>It’s also the top of the variance calculation. </a:t>
+            </a:r>
+          </a:p>
+          <a:p>
+            <a:pPr lvl="1"/>
+            <a:r>
+              <a:rPr lang="en-US" dirty="0"/>
+              <a:t>This measures how much the real values vary from the mean – a baseline. </a:t>
+            </a:r>
+          </a:p>
+          <a:p>
+            <a:pPr lvl="1"/>
+            <a:r>
+              <a:rPr lang="en-US" dirty="0"/>
+              <a:t>I.e. (thought model, not def.) the model is attempting to tell us Y, think of the default value for Y that it tells us to be the mean, this tells us how much the model must ‘move’ from that default. </a:t>
             </a:r>
           </a:p>
         </p:txBody>
       </p:sp>
       <p:pic>
         <p:nvPicPr>
-          <p:cNvPr id="6146" name="Picture 2" descr="Image by Author">
+          <p:cNvPr id="3074" name="Picture 2" descr="SST = SSR + SSE in regression ...">
             <a:extLst>
               <a:ext uri="{FF2B5EF4-FFF2-40B4-BE49-F238E27FC236}">
-                <a16:creationId xmlns:a16="http://schemas.microsoft.com/office/drawing/2014/main" id="{EE687224-B51E-635B-7D1B-8CAEC894C1CB}"/>
+                <a16:creationId xmlns:a16="http://schemas.microsoft.com/office/drawing/2014/main" id="{81384808-AB71-34AB-1FA1-CF4B9F5A7008}"/>
               </a:ext>
             </a:extLst>
           </p:cNvPr>
@@ -3959,8 +3993,8 @@
         </p:blipFill>
         <p:spPr bwMode="auto">
           <a:xfrm>
-            <a:off x="349422" y="1853754"/>
-            <a:ext cx="8280400" cy="4330700"/>
+            <a:off x="7264400" y="202754"/>
+            <a:ext cx="4927600" cy="1651000"/>
           </a:xfrm>
           <a:prstGeom prst="rect">
             <a:avLst/>
@@ -3977,10 +4011,41 @@
           </a:extLst>
         </p:spPr>
       </p:pic>
+      <p:pic>
+        <p:nvPicPr>
+          <p:cNvPr id="4" name="Picture 3" descr="Learn R-squared | Choosing The Best Model">
+            <a:extLst>
+              <a:ext uri="{FF2B5EF4-FFF2-40B4-BE49-F238E27FC236}">
+                <a16:creationId xmlns:a16="http://schemas.microsoft.com/office/drawing/2014/main" id="{AE87BC22-7487-F52C-1B2F-C5B882BA0FF7}"/>
+              </a:ext>
+            </a:extLst>
+          </p:cNvPr>
+          <p:cNvPicPr>
+            <a:picLocks noChangeAspect="1"/>
+          </p:cNvPicPr>
+          <p:nvPr/>
+        </p:nvPicPr>
+        <p:blipFill>
+          <a:blip r:embed="rId3"/>
+          <a:srcRect l="51915" t="8063" r="7045" b="26273"/>
+          <a:stretch>
+            <a:fillRect/>
+          </a:stretch>
+        </p:blipFill>
+        <p:spPr>
+          <a:xfrm>
+            <a:off x="8825023" y="1853754"/>
+            <a:ext cx="3189767" cy="2870790"/>
+          </a:xfrm>
+          <a:prstGeom prst="rect">
+            <a:avLst/>
+          </a:prstGeom>
+        </p:spPr>
+      </p:pic>
     </p:spTree>
     <p:extLst>
       <p:ext uri="{BB962C8B-B14F-4D97-AF65-F5344CB8AC3E}">
-        <p14:creationId xmlns:p14="http://schemas.microsoft.com/office/powerpoint/2010/main" val="2533776187"/>
+        <p14:creationId xmlns:p14="http://schemas.microsoft.com/office/powerpoint/2010/main" val="3189705387"/>
       </p:ext>
     </p:extLst>
   </p:cSld>
@@ -4012,7 +4077,7 @@
           <p:cNvPr id="2" name="Title 1">
             <a:extLst>
               <a:ext uri="{FF2B5EF4-FFF2-40B4-BE49-F238E27FC236}">
-                <a16:creationId xmlns:a16="http://schemas.microsoft.com/office/drawing/2014/main" id="{546F845D-D761-C583-138B-B059BBB3A3EF}"/>
+                <a16:creationId xmlns:a16="http://schemas.microsoft.com/office/drawing/2014/main" id="{A7BE65C3-90CA-A993-24E1-07B7F39C429C}"/>
               </a:ext>
             </a:extLst>
           </p:cNvPr>
@@ -4030,7 +4095,7 @@
           <a:p>
             <a:r>
               <a:rPr lang="en-US" dirty="0"/>
-              <a:t>So, R2…</a:t>
+              <a:t>The Model explains part of that Variance</a:t>
             </a:r>
           </a:p>
         </p:txBody>
@@ -4040,7 +4105,7 @@
           <p:cNvPr id="3" name="Content Placeholder 2">
             <a:extLst>
               <a:ext uri="{FF2B5EF4-FFF2-40B4-BE49-F238E27FC236}">
-                <a16:creationId xmlns:a16="http://schemas.microsoft.com/office/drawing/2014/main" id="{CB202270-26C3-412D-69BD-07D5441FFFF5}"/>
+                <a16:creationId xmlns:a16="http://schemas.microsoft.com/office/drawing/2014/main" id="{6EEEE06C-CA8E-EF44-0BEE-645BA68CC60D}"/>
               </a:ext>
             </a:extLst>
           </p:cNvPr>
@@ -4053,147 +4118,114 @@
         </p:nvSpPr>
         <p:spPr>
           <a:xfrm>
-            <a:off x="6935234" y="2015732"/>
-            <a:ext cx="5039832" cy="4037749"/>
+            <a:off x="159489" y="1853754"/>
+            <a:ext cx="5326960" cy="4199727"/>
           </a:xfrm>
         </p:spPr>
         <p:txBody>
           <a:bodyPr>
-            <a:normAutofit/>
+            <a:normAutofit lnSpcReduction="10000"/>
           </a:bodyPr>
           <a:lstStyle/>
           <a:p>
             <a:r>
               <a:rPr lang="en-US" dirty="0"/>
-              <a:t>R2 is the percentage of the total variance in Y (SST) that the model explains (SSR). </a:t>
-            </a:r>
-          </a:p>
-          <a:p>
-            <a:pPr lvl="1"/>
-            <a:r>
-              <a:rPr lang="en-US" dirty="0"/>
-              <a:t>I.e. the value of Y varies this much, our model explains this portion, the rest of the variance is stuff that we can’t explain. </a:t>
-            </a:r>
-          </a:p>
-          <a:p>
-            <a:pPr lvl="1"/>
-            <a:r>
-              <a:rPr lang="en-US" dirty="0"/>
-              <a:t>Our model tells us “this percentage” of the departure from the mean. </a:t>
-            </a:r>
-          </a:p>
-          <a:p>
-            <a:r>
-              <a:rPr lang="en-US" dirty="0"/>
-              <a:t>Between 0 and 1. </a:t>
-            </a:r>
-          </a:p>
-          <a:p>
-            <a:r>
-              <a:rPr lang="en-US" dirty="0"/>
-              <a:t>Comparable between scenarios/models. </a:t>
+              <a:t>The model (line) explains some of that. </a:t>
+            </a:r>
+          </a:p>
+          <a:p>
+            <a:pPr lvl="1"/>
+            <a:r>
+              <a:rPr lang="en-US" dirty="0"/>
+              <a:t>I.e. the model tells us what Y should be given X, but isn’t perfect. </a:t>
+            </a:r>
+          </a:p>
+          <a:p>
+            <a:r>
+              <a:rPr lang="en-US" dirty="0"/>
+              <a:t>The model explains some variance. </a:t>
+            </a:r>
+          </a:p>
+          <a:p>
+            <a:r>
+              <a:rPr lang="en-US" dirty="0"/>
+              <a:t>Some variance is not explained </a:t>
+            </a:r>
+          </a:p>
+          <a:p>
+            <a:pPr lvl="1"/>
+            <a:r>
+              <a:rPr lang="en-US" dirty="0"/>
+              <a:t>Residuals. </a:t>
+            </a:r>
+          </a:p>
+          <a:p>
+            <a:r>
+              <a:rPr lang="en-US" dirty="0"/>
+              <a:t>So we have:</a:t>
+            </a:r>
+          </a:p>
+          <a:p>
+            <a:pPr lvl="1"/>
+            <a:r>
+              <a:rPr lang="en-US" dirty="0"/>
+              <a:t>Actual variance – the raw data variance. </a:t>
+            </a:r>
+          </a:p>
+          <a:p>
+            <a:pPr lvl="1"/>
+            <a:r>
+              <a:rPr lang="en-US" dirty="0"/>
+              <a:t>Explained variance – amount model explains.</a:t>
+            </a:r>
+          </a:p>
+          <a:p>
+            <a:pPr lvl="1"/>
+            <a:r>
+              <a:rPr lang="en-US" dirty="0" err="1"/>
+              <a:t>Unex</a:t>
+            </a:r>
+            <a:r>
+              <a:rPr lang="en-US" dirty="0"/>
+              <a:t>. Variance – the amount of leftover error.</a:t>
             </a:r>
           </a:p>
         </p:txBody>
       </p:sp>
       <p:pic>
         <p:nvPicPr>
-          <p:cNvPr id="5122" name="Picture 2" descr="Looking at R-Squared. In data science we create regression… | by Erika D | Medium">
+          <p:cNvPr id="4" name="Picture 3" descr="Learn R-squared | Choosing The Best Model">
             <a:extLst>
               <a:ext uri="{FF2B5EF4-FFF2-40B4-BE49-F238E27FC236}">
-                <a16:creationId xmlns:a16="http://schemas.microsoft.com/office/drawing/2014/main" id="{33E561D9-3B7E-D3D7-0E36-949D923B88A1}"/>
+                <a16:creationId xmlns:a16="http://schemas.microsoft.com/office/drawing/2014/main" id="{995BD875-732D-91DB-3379-AF6EF4D55AB3}"/>
               </a:ext>
             </a:extLst>
           </p:cNvPr>
           <p:cNvPicPr>
-            <a:picLocks noChangeAspect="1" noChangeArrowheads="1"/>
+            <a:picLocks noChangeAspect="1"/>
           </p:cNvPicPr>
           <p:nvPr/>
         </p:nvPicPr>
         <p:blipFill>
-          <a:blip r:embed="rId2">
-            <a:extLst>
-              <a:ext uri="{28A0092B-C50C-407E-A947-70E740481C1C}">
-                <a14:useLocalDpi xmlns:a14="http://schemas.microsoft.com/office/drawing/2010/main" val="0"/>
-              </a:ext>
-            </a:extLst>
-          </a:blip>
-          <a:srcRect/>
+          <a:blip r:embed="rId2"/>
           <a:stretch>
             <a:fillRect/>
           </a:stretch>
         </p:blipFill>
-        <p:spPr bwMode="auto">
-          <a:xfrm>
-            <a:off x="3793524" y="105164"/>
-            <a:ext cx="8299622" cy="1652359"/>
+        <p:spPr>
+          <a:xfrm>
+            <a:off x="5486448" y="2015732"/>
+            <a:ext cx="6205821" cy="3490774"/>
           </a:xfrm>
           <a:prstGeom prst="rect">
             <a:avLst/>
           </a:prstGeom>
-          <a:noFill/>
-          <a:extLst>
-            <a:ext uri="{909E8E84-426E-40DD-AFC4-6F175D3DCCD1}">
-              <a14:hiddenFill xmlns:a14="http://schemas.microsoft.com/office/drawing/2010/main">
-                <a:solidFill>
-                  <a:srgbClr val="FFFFFF"/>
-                </a:solidFill>
-              </a14:hiddenFill>
-            </a:ext>
-          </a:extLst>
-        </p:spPr>
-      </p:pic>
-      <p:pic>
-        <p:nvPicPr>
-          <p:cNvPr id="5124" name="Picture 4" descr="least squares - Why is $SST=SSE + SSR$? (One variable linear regression) -  Cross Validated">
-            <a:extLst>
-              <a:ext uri="{FF2B5EF4-FFF2-40B4-BE49-F238E27FC236}">
-                <a16:creationId xmlns:a16="http://schemas.microsoft.com/office/drawing/2014/main" id="{066960B9-F325-797F-3765-A430A18CEEF3}"/>
-              </a:ext>
-            </a:extLst>
-          </p:cNvPr>
-          <p:cNvPicPr>
-            <a:picLocks noChangeAspect="1" noChangeArrowheads="1"/>
-          </p:cNvPicPr>
-          <p:nvPr/>
-        </p:nvPicPr>
-        <p:blipFill>
-          <a:blip r:embed="rId3">
-            <a:extLst>
-              <a:ext uri="{28A0092B-C50C-407E-A947-70E740481C1C}">
-                <a14:useLocalDpi xmlns:a14="http://schemas.microsoft.com/office/drawing/2010/main" val="0"/>
-              </a:ext>
-            </a:extLst>
-          </a:blip>
-          <a:srcRect/>
-          <a:stretch>
-            <a:fillRect/>
-          </a:stretch>
-        </p:blipFill>
-        <p:spPr bwMode="auto">
-          <a:xfrm>
-            <a:off x="216934" y="2015732"/>
-            <a:ext cx="6718300" cy="3797300"/>
-          </a:xfrm>
-          <a:prstGeom prst="rect">
-            <a:avLst/>
-          </a:prstGeom>
-          <a:noFill/>
-          <a:extLst>
-            <a:ext uri="{909E8E84-426E-40DD-AFC4-6F175D3DCCD1}">
-              <a14:hiddenFill xmlns:a14="http://schemas.microsoft.com/office/drawing/2010/main">
-                <a:solidFill>
-                  <a:srgbClr val="FFFFFF"/>
-                </a:solidFill>
-              </a14:hiddenFill>
-            </a:ext>
-          </a:extLst>
         </p:spPr>
       </p:pic>
     </p:spTree>
     <p:extLst>
       <p:ext uri="{BB962C8B-B14F-4D97-AF65-F5344CB8AC3E}">
-        <p14:creationId xmlns:p14="http://schemas.microsoft.com/office/powerpoint/2010/main" val="696313299"/>
+        <p14:creationId xmlns:p14="http://schemas.microsoft.com/office/powerpoint/2010/main" val="4171188605"/>
       </p:ext>
     </p:extLst>
   </p:cSld>
@@ -4225,7 +4257,7 @@
           <p:cNvPr id="2" name="Title 1">
             <a:extLst>
               <a:ext uri="{FF2B5EF4-FFF2-40B4-BE49-F238E27FC236}">
-                <a16:creationId xmlns:a16="http://schemas.microsoft.com/office/drawing/2014/main" id="{FACEAAE9-B128-E7B4-808A-E3CB8F5777EB}"/>
+                <a16:creationId xmlns:a16="http://schemas.microsoft.com/office/drawing/2014/main" id="{7B5929C5-3292-71F4-42DC-C1786154E484}"/>
               </a:ext>
             </a:extLst>
           </p:cNvPr>
@@ -4236,14 +4268,19 @@
             <p:ph type="title"/>
           </p:nvPr>
         </p:nvSpPr>
-        <p:spPr/>
-        <p:txBody>
-          <a:bodyPr/>
-          <a:lstStyle/>
-          <a:p>
-            <a:r>
-              <a:rPr lang="en-US" dirty="0"/>
-              <a:t>Using R Squared</a:t>
+        <p:spPr>
+          <a:xfrm>
+            <a:off x="7311974" y="804519"/>
+            <a:ext cx="3742880" cy="1049235"/>
+          </a:xfrm>
+        </p:spPr>
+        <p:txBody>
+          <a:bodyPr/>
+          <a:lstStyle/>
+          <a:p>
+            <a:r>
+              <a:rPr lang="en-US" dirty="0"/>
+              <a:t>Break that apart</a:t>
             </a:r>
           </a:p>
         </p:txBody>
@@ -4253,7 +4290,7 @@
           <p:cNvPr id="3" name="Content Placeholder 2">
             <a:extLst>
               <a:ext uri="{FF2B5EF4-FFF2-40B4-BE49-F238E27FC236}">
-                <a16:creationId xmlns:a16="http://schemas.microsoft.com/office/drawing/2014/main" id="{79BCDDF8-807F-28D3-D8C8-F29A4A39CF1A}"/>
+                <a16:creationId xmlns:a16="http://schemas.microsoft.com/office/drawing/2014/main" id="{B16B9A2D-7550-9738-8BDF-F45827EFBF3B}"/>
               </a:ext>
             </a:extLst>
           </p:cNvPr>
@@ -4266,80 +4303,118 @@
         </p:nvSpPr>
         <p:spPr>
           <a:xfrm>
-            <a:off x="1451579" y="1977656"/>
-            <a:ext cx="9603275" cy="4075825"/>
-          </a:xfrm>
-        </p:spPr>
-        <p:txBody>
-          <a:bodyPr/>
-          <a:lstStyle/>
-          <a:p>
-            <a:r>
-              <a:rPr lang="en-US" dirty="0"/>
-              <a:t>R2 is the most common default metric to score a model. </a:t>
-            </a:r>
-          </a:p>
-          <a:p>
-            <a:pPr lvl="1"/>
-            <a:r>
-              <a:rPr lang="en-US" dirty="0"/>
-              <a:t>Result of score function in sklearn, default value in </a:t>
-            </a:r>
-            <a:r>
-              <a:rPr lang="en-US" dirty="0" err="1"/>
-              <a:t>statsmodels</a:t>
-            </a:r>
-            <a:r>
-              <a:rPr lang="en-US" dirty="0"/>
-              <a:t>. </a:t>
-            </a:r>
-          </a:p>
-          <a:p>
-            <a:pPr lvl="1"/>
-            <a:r>
-              <a:rPr lang="en-US" dirty="0"/>
-              <a:t>We can compare anything, since it is a percentage. Error measures depend on scale. </a:t>
-            </a:r>
-          </a:p>
-          <a:p>
-            <a:r>
-              <a:rPr lang="en-US" dirty="0"/>
-              <a:t>The (1-R2, SSE) variance is what our model doesn’t capture. </a:t>
-            </a:r>
-          </a:p>
-          <a:p>
-            <a:pPr lvl="1"/>
-            <a:r>
-              <a:rPr lang="en-US" dirty="0"/>
-              <a:t>Variables that we don’t have in the model (e.g. h vs w probably has more factors). </a:t>
-            </a:r>
-          </a:p>
-          <a:p>
-            <a:pPr lvl="1"/>
-            <a:r>
-              <a:rPr lang="en-US" dirty="0"/>
-              <a:t>Some things can’t really be embedded into a model easily as a variable. </a:t>
-            </a:r>
-          </a:p>
-          <a:p>
-            <a:pPr lvl="1"/>
-            <a:r>
-              <a:rPr lang="en-US" dirty="0"/>
-              <a:t>Noise or randomness that we fundamentally can’t predict. </a:t>
-            </a:r>
-          </a:p>
-          <a:p>
-            <a:r>
-              <a:rPr lang="en-US" dirty="0"/>
-              <a:t>Adding more inputs can help us capture more things that determine outcome…</a:t>
-            </a:r>
-          </a:p>
-        </p:txBody>
-      </p:sp>
+            <a:off x="7311974" y="1853754"/>
+            <a:ext cx="4711150" cy="3929208"/>
+          </a:xfrm>
+        </p:spPr>
+        <p:txBody>
+          <a:bodyPr/>
+          <a:lstStyle/>
+          <a:p>
+            <a:r>
+              <a:rPr lang="en-US" dirty="0"/>
+              <a:t>The data varies from the mean – SST. </a:t>
+            </a:r>
+          </a:p>
+          <a:p>
+            <a:pPr lvl="1"/>
+            <a:r>
+              <a:rPr lang="en-US" dirty="0"/>
+              <a:t>Mean is baseline, departures vary away.</a:t>
+            </a:r>
+          </a:p>
+          <a:p>
+            <a:r>
+              <a:rPr lang="en-US" dirty="0"/>
+              <a:t>Some variance ’explained’ by the model. </a:t>
+            </a:r>
+          </a:p>
+          <a:p>
+            <a:pPr lvl="1"/>
+            <a:r>
+              <a:rPr lang="en-US" dirty="0"/>
+              <a:t>Model gets us close to the value. </a:t>
+            </a:r>
+          </a:p>
+          <a:p>
+            <a:r>
+              <a:rPr lang="en-US" dirty="0"/>
+              <a:t>The rest is the residual – error. </a:t>
+            </a:r>
+          </a:p>
+          <a:p>
+            <a:pPr lvl="1"/>
+            <a:r>
+              <a:rPr lang="en-US" dirty="0"/>
+              <a:t>The model got us closer, but we are still this far away. </a:t>
+            </a:r>
+          </a:p>
+          <a:p>
+            <a:pPr lvl="1"/>
+            <a:r>
+              <a:rPr lang="en-US" dirty="0"/>
+              <a:t>R2 is the ratio of this. </a:t>
+            </a:r>
+          </a:p>
+          <a:p>
+            <a:r>
+              <a:rPr lang="en-US" dirty="0"/>
+              <a:t>The closer the model is, the more SSR. </a:t>
+            </a:r>
+          </a:p>
+        </p:txBody>
+      </p:sp>
+      <p:pic>
+        <p:nvPicPr>
+          <p:cNvPr id="4098" name="Picture 2" descr="Statistical Regression SSR / SSE / SST | Dr. Walid Soula | Artificial  Intelligence in Plain English">
+            <a:extLst>
+              <a:ext uri="{FF2B5EF4-FFF2-40B4-BE49-F238E27FC236}">
+                <a16:creationId xmlns:a16="http://schemas.microsoft.com/office/drawing/2014/main" id="{4E772850-0C7A-856C-3064-7B5F93AA8581}"/>
+              </a:ext>
+            </a:extLst>
+          </p:cNvPr>
+          <p:cNvPicPr>
+            <a:picLocks noChangeAspect="1" noChangeArrowheads="1"/>
+          </p:cNvPicPr>
+          <p:nvPr/>
+        </p:nvPicPr>
+        <p:blipFill>
+          <a:blip r:embed="rId2">
+            <a:extLst>
+              <a:ext uri="{28A0092B-C50C-407E-A947-70E740481C1C}">
+                <a14:useLocalDpi xmlns:a14="http://schemas.microsoft.com/office/drawing/2010/main" val="0"/>
+              </a:ext>
+            </a:extLst>
+          </a:blip>
+          <a:srcRect/>
+          <a:stretch>
+            <a:fillRect/>
+          </a:stretch>
+        </p:blipFill>
+        <p:spPr bwMode="auto">
+          <a:xfrm>
+            <a:off x="0" y="580767"/>
+            <a:ext cx="7311974" cy="5202195"/>
+          </a:xfrm>
+          <a:prstGeom prst="rect">
+            <a:avLst/>
+          </a:prstGeom>
+          <a:noFill/>
+          <a:extLst>
+            <a:ext uri="{909E8E84-426E-40DD-AFC4-6F175D3DCCD1}">
+              <a14:hiddenFill xmlns:a14="http://schemas.microsoft.com/office/drawing/2010/main">
+                <a:solidFill>
+                  <a:srgbClr val="FFFFFF"/>
+                </a:solidFill>
+              </a14:hiddenFill>
+            </a:ext>
+          </a:extLst>
+        </p:spPr>
+      </p:pic>
     </p:spTree>
     <p:extLst>
       <p:ext uri="{BB962C8B-B14F-4D97-AF65-F5344CB8AC3E}">
-        <p14:creationId xmlns:p14="http://schemas.microsoft.com/office/powerpoint/2010/main" val="1975493897"/>
+        <p14:creationId xmlns:p14="http://schemas.microsoft.com/office/powerpoint/2010/main" val="3181117461"/>
       </p:ext>
     </p:extLst>
   </p:cSld>
@@ -4371,7 +4446,7 @@
           <p:cNvPr id="2" name="Title 1">
             <a:extLst>
               <a:ext uri="{FF2B5EF4-FFF2-40B4-BE49-F238E27FC236}">
-                <a16:creationId xmlns:a16="http://schemas.microsoft.com/office/drawing/2014/main" id="{6BF65C20-A3DB-CC86-7479-60674AF383A8}"/>
+                <a16:creationId xmlns:a16="http://schemas.microsoft.com/office/drawing/2014/main" id="{0B18DCD2-1B99-D357-7072-1F6CD5A1CBC8}"/>
               </a:ext>
             </a:extLst>
           </p:cNvPr>
@@ -4389,7 +4464,7 @@
           <a:p>
             <a:r>
               <a:rPr lang="en-US" dirty="0"/>
-              <a:t>Multiple Inputs for X</a:t>
+              <a:t>You can Frame it in Terms of Error as well</a:t>
             </a:r>
           </a:p>
         </p:txBody>
@@ -4399,7 +4474,7 @@
           <p:cNvPr id="3" name="Content Placeholder 2">
             <a:extLst>
               <a:ext uri="{FF2B5EF4-FFF2-40B4-BE49-F238E27FC236}">
-                <a16:creationId xmlns:a16="http://schemas.microsoft.com/office/drawing/2014/main" id="{529EEFEB-DF04-7EAE-3754-CD99255770D5}"/>
+                <a16:creationId xmlns:a16="http://schemas.microsoft.com/office/drawing/2014/main" id="{67F840EE-F9E4-5677-1216-938AEF04A85A}"/>
               </a:ext>
             </a:extLst>
           </p:cNvPr>
@@ -4412,78 +4487,90 @@
         </p:nvSpPr>
         <p:spPr>
           <a:xfrm>
-            <a:off x="1451579" y="1853754"/>
-            <a:ext cx="9603275" cy="4199727"/>
-          </a:xfrm>
-        </p:spPr>
-        <p:txBody>
-          <a:bodyPr/>
-          <a:lstStyle/>
-          <a:p>
-            <a:r>
-              <a:rPr lang="en-US" dirty="0"/>
-              <a:t>In most cases, we have several inputs to predict one output. </a:t>
-            </a:r>
-          </a:p>
-          <a:p>
-            <a:pPr lvl="1"/>
-            <a:r>
-              <a:rPr lang="en-US" dirty="0"/>
-              <a:t>E.g. a loan may take in income, age, profession, credit… to predict interest rate. </a:t>
-            </a:r>
-          </a:p>
-          <a:p>
-            <a:pPr lvl="1"/>
-            <a:r>
-              <a:rPr lang="en-US" dirty="0"/>
-              <a:t>Real scenarios can have thousands or millions (image, language, genetics…)</a:t>
-            </a:r>
-          </a:p>
-          <a:p>
-            <a:r>
-              <a:rPr lang="en-US" dirty="0"/>
-              <a:t>The more X inputs we have (assuming relevance), the higher our ceiling is.</a:t>
-            </a:r>
-          </a:p>
-          <a:p>
-            <a:pPr lvl="1"/>
-            <a:r>
-              <a:rPr lang="en-US" dirty="0"/>
-              <a:t>We can capture more of the SST into the model. </a:t>
-            </a:r>
-          </a:p>
-          <a:p>
-            <a:r>
-              <a:rPr lang="en-US" dirty="0"/>
-              <a:t>For us, not all that much changes:</a:t>
-            </a:r>
-          </a:p>
-          <a:p>
-            <a:pPr lvl="1"/>
-            <a:r>
-              <a:rPr lang="en-US" dirty="0"/>
-              <a:t>Data is prepared and shaped the same, X is just wider. </a:t>
-            </a:r>
-          </a:p>
-          <a:p>
-            <a:pPr lvl="1"/>
-            <a:r>
-              <a:rPr lang="en-US" dirty="0"/>
-              <a:t>Sklearn will handle the details for us. </a:t>
-            </a:r>
-          </a:p>
-          <a:p>
-            <a:r>
-              <a:rPr lang="en-US" dirty="0"/>
-              <a:t>We often call the x values features, and the y value the target. </a:t>
-            </a:r>
-          </a:p>
-        </p:txBody>
-      </p:sp>
+            <a:off x="8629822" y="2015732"/>
+            <a:ext cx="3319162" cy="3450613"/>
+          </a:xfrm>
+        </p:spPr>
+        <p:txBody>
+          <a:bodyPr/>
+          <a:lstStyle/>
+          <a:p>
+            <a:r>
+              <a:rPr lang="en-US" dirty="0"/>
+              <a:t>Deviation from mean is ‘wrong’. </a:t>
+            </a:r>
+          </a:p>
+          <a:p>
+            <a:r>
+              <a:rPr lang="en-US" dirty="0"/>
+              <a:t>Some error is captured by model. </a:t>
+            </a:r>
+          </a:p>
+          <a:p>
+            <a:r>
+              <a:rPr lang="en-US" dirty="0"/>
+              <a:t>The rest is residual. </a:t>
+            </a:r>
+          </a:p>
+          <a:p>
+            <a:r>
+              <a:rPr lang="en-US" dirty="0"/>
+              <a:t>I don’t like this thought model, personally. </a:t>
+            </a:r>
+          </a:p>
+        </p:txBody>
+      </p:sp>
+      <p:pic>
+        <p:nvPicPr>
+          <p:cNvPr id="6146" name="Picture 2" descr="Image by Author">
+            <a:extLst>
+              <a:ext uri="{FF2B5EF4-FFF2-40B4-BE49-F238E27FC236}">
+                <a16:creationId xmlns:a16="http://schemas.microsoft.com/office/drawing/2014/main" id="{EE687224-B51E-635B-7D1B-8CAEC894C1CB}"/>
+              </a:ext>
+            </a:extLst>
+          </p:cNvPr>
+          <p:cNvPicPr>
+            <a:picLocks noChangeAspect="1" noChangeArrowheads="1"/>
+          </p:cNvPicPr>
+          <p:nvPr/>
+        </p:nvPicPr>
+        <p:blipFill>
+          <a:blip r:embed="rId2">
+            <a:extLst>
+              <a:ext uri="{28A0092B-C50C-407E-A947-70E740481C1C}">
+                <a14:useLocalDpi xmlns:a14="http://schemas.microsoft.com/office/drawing/2010/main" val="0"/>
+              </a:ext>
+            </a:extLst>
+          </a:blip>
+          <a:srcRect/>
+          <a:stretch>
+            <a:fillRect/>
+          </a:stretch>
+        </p:blipFill>
+        <p:spPr bwMode="auto">
+          <a:xfrm>
+            <a:off x="349422" y="1853754"/>
+            <a:ext cx="8280400" cy="4330700"/>
+          </a:xfrm>
+          <a:prstGeom prst="rect">
+            <a:avLst/>
+          </a:prstGeom>
+          <a:noFill/>
+          <a:extLst>
+            <a:ext uri="{909E8E84-426E-40DD-AFC4-6F175D3DCCD1}">
+              <a14:hiddenFill xmlns:a14="http://schemas.microsoft.com/office/drawing/2010/main">
+                <a:solidFill>
+                  <a:srgbClr val="FFFFFF"/>
+                </a:solidFill>
+              </a14:hiddenFill>
+            </a:ext>
+          </a:extLst>
+        </p:spPr>
+      </p:pic>
     </p:spTree>
     <p:extLst>
       <p:ext uri="{BB962C8B-B14F-4D97-AF65-F5344CB8AC3E}">
-        <p14:creationId xmlns:p14="http://schemas.microsoft.com/office/powerpoint/2010/main" val="562453709"/>
+        <p14:creationId xmlns:p14="http://schemas.microsoft.com/office/powerpoint/2010/main" val="2533776187"/>
       </p:ext>
     </p:extLst>
   </p:cSld>
@@ -4515,7 +4602,7 @@
           <p:cNvPr id="2" name="Title 1">
             <a:extLst>
               <a:ext uri="{FF2B5EF4-FFF2-40B4-BE49-F238E27FC236}">
-                <a16:creationId xmlns:a16="http://schemas.microsoft.com/office/drawing/2014/main" id="{EAACAC41-7560-550A-22C7-25D1F869843F}"/>
+                <a16:creationId xmlns:a16="http://schemas.microsoft.com/office/drawing/2014/main" id="{546F845D-D761-C583-138B-B059BBB3A3EF}"/>
               </a:ext>
             </a:extLst>
           </p:cNvPr>
@@ -4533,7 +4620,7 @@
           <a:p>
             <a:r>
               <a:rPr lang="en-US" dirty="0"/>
-              <a:t>What’s going on in Multiple Regression?</a:t>
+              <a:t>So, R2…</a:t>
             </a:r>
           </a:p>
         </p:txBody>
@@ -4543,7 +4630,7 @@
           <p:cNvPr id="3" name="Content Placeholder 2">
             <a:extLst>
               <a:ext uri="{FF2B5EF4-FFF2-40B4-BE49-F238E27FC236}">
-                <a16:creationId xmlns:a16="http://schemas.microsoft.com/office/drawing/2014/main" id="{57AB1097-754F-68CB-361F-23574EA1DCB4}"/>
+                <a16:creationId xmlns:a16="http://schemas.microsoft.com/office/drawing/2014/main" id="{CB202270-26C3-412D-69BD-07D5441FFFF5}"/>
               </a:ext>
             </a:extLst>
           </p:cNvPr>
@@ -4556,66 +4643,55 @@
         </p:nvSpPr>
         <p:spPr>
           <a:xfrm>
-            <a:off x="7699975" y="2015732"/>
-            <a:ext cx="4341256" cy="3836773"/>
-          </a:xfrm>
-        </p:spPr>
-        <p:txBody>
-          <a:bodyPr/>
-          <a:lstStyle/>
-          <a:p>
-            <a:r>
-              <a:rPr lang="en-US" dirty="0"/>
-              <a:t>The concepts are identical to 1 X. </a:t>
-            </a:r>
-          </a:p>
-          <a:p>
-            <a:pPr lvl="1"/>
-            <a:r>
-              <a:rPr lang="en-US" dirty="0"/>
-              <a:t>We are still predicting Y. </a:t>
-            </a:r>
-          </a:p>
-          <a:p>
-            <a:pPr lvl="1"/>
-            <a:r>
-              <a:rPr lang="en-US" dirty="0"/>
-              <a:t>The line becomes a plane. </a:t>
-            </a:r>
-          </a:p>
-          <a:p>
-            <a:pPr lvl="1"/>
-            <a:r>
-              <a:rPr lang="en-US" dirty="0"/>
-              <a:t>The equation gains a term. </a:t>
-            </a:r>
-          </a:p>
-          <a:p>
-            <a:r>
-              <a:rPr lang="en-US" dirty="0"/>
-              <a:t>This extends to N dimensions. </a:t>
-            </a:r>
-          </a:p>
-          <a:p>
-            <a:r>
-              <a:rPr lang="en-US" dirty="0"/>
-              <a:t>The higher dimension, the more complex a thing we can predict. </a:t>
-            </a:r>
-          </a:p>
-          <a:p>
-            <a:r>
-              <a:rPr lang="en-US" dirty="0"/>
-              <a:t>We can see why outliers can hurt!</a:t>
+            <a:off x="6935234" y="2015732"/>
+            <a:ext cx="5039832" cy="4037749"/>
+          </a:xfrm>
+        </p:spPr>
+        <p:txBody>
+          <a:bodyPr>
+            <a:normAutofit/>
+          </a:bodyPr>
+          <a:lstStyle/>
+          <a:p>
+            <a:r>
+              <a:rPr lang="en-US" dirty="0"/>
+              <a:t>R2 is the percentage of the total variance in Y (SST) that the model explains (SSR). </a:t>
+            </a:r>
+          </a:p>
+          <a:p>
+            <a:pPr lvl="1"/>
+            <a:r>
+              <a:rPr lang="en-US" dirty="0"/>
+              <a:t>I.e. the value of Y varies this much, our model explains this portion, the rest of the variance is stuff that we can’t explain. </a:t>
+            </a:r>
+          </a:p>
+          <a:p>
+            <a:pPr lvl="1"/>
+            <a:r>
+              <a:rPr lang="en-US" dirty="0"/>
+              <a:t>Our model tells us “this percentage” of the departure from the mean. </a:t>
+            </a:r>
+          </a:p>
+          <a:p>
+            <a:r>
+              <a:rPr lang="en-US" dirty="0"/>
+              <a:t>Between 0 and 1. </a:t>
+            </a:r>
+          </a:p>
+          <a:p>
+            <a:r>
+              <a:rPr lang="en-US" dirty="0"/>
+              <a:t>Comparable between scenarios/models. </a:t>
             </a:r>
           </a:p>
         </p:txBody>
       </p:sp>
       <p:pic>
         <p:nvPicPr>
-          <p:cNvPr id="7170" name="Picture 2" descr="The regression model in a 3D space. A multi-variable regression model... |  Download Scientific Diagram">
+          <p:cNvPr id="5122" name="Picture 2" descr="Looking at R-Squared. In data science we create regression… | by Erika D | Medium">
             <a:extLst>
               <a:ext uri="{FF2B5EF4-FFF2-40B4-BE49-F238E27FC236}">
-                <a16:creationId xmlns:a16="http://schemas.microsoft.com/office/drawing/2014/main" id="{9402E54C-1A01-3FE9-0EC1-8CCB8291CAB1}"/>
+                <a16:creationId xmlns:a16="http://schemas.microsoft.com/office/drawing/2014/main" id="{33E561D9-3B7E-D3D7-0E36-949D923B88A1}"/>
               </a:ext>
             </a:extLst>
           </p:cNvPr>
@@ -4639,8 +4715,8 @@
         </p:blipFill>
         <p:spPr bwMode="auto">
           <a:xfrm>
-            <a:off x="150769" y="2015732"/>
-            <a:ext cx="7549206" cy="3836773"/>
+            <a:off x="3793524" y="105164"/>
+            <a:ext cx="8299622" cy="1652359"/>
           </a:xfrm>
           <a:prstGeom prst="rect">
             <a:avLst/>
@@ -4657,10 +4733,57 @@
           </a:extLst>
         </p:spPr>
       </p:pic>
+      <p:pic>
+        <p:nvPicPr>
+          <p:cNvPr id="5124" name="Picture 4" descr="least squares - Why is $SST=SSE + SSR$? (One variable linear regression) -  Cross Validated">
+            <a:extLst>
+              <a:ext uri="{FF2B5EF4-FFF2-40B4-BE49-F238E27FC236}">
+                <a16:creationId xmlns:a16="http://schemas.microsoft.com/office/drawing/2014/main" id="{066960B9-F325-797F-3765-A430A18CEEF3}"/>
+              </a:ext>
+            </a:extLst>
+          </p:cNvPr>
+          <p:cNvPicPr>
+            <a:picLocks noChangeAspect="1" noChangeArrowheads="1"/>
+          </p:cNvPicPr>
+          <p:nvPr/>
+        </p:nvPicPr>
+        <p:blipFill>
+          <a:blip r:embed="rId3">
+            <a:extLst>
+              <a:ext uri="{28A0092B-C50C-407E-A947-70E740481C1C}">
+                <a14:useLocalDpi xmlns:a14="http://schemas.microsoft.com/office/drawing/2010/main" val="0"/>
+              </a:ext>
+            </a:extLst>
+          </a:blip>
+          <a:srcRect/>
+          <a:stretch>
+            <a:fillRect/>
+          </a:stretch>
+        </p:blipFill>
+        <p:spPr bwMode="auto">
+          <a:xfrm>
+            <a:off x="216934" y="2015732"/>
+            <a:ext cx="6718300" cy="3797300"/>
+          </a:xfrm>
+          <a:prstGeom prst="rect">
+            <a:avLst/>
+          </a:prstGeom>
+          <a:noFill/>
+          <a:extLst>
+            <a:ext uri="{909E8E84-426E-40DD-AFC4-6F175D3DCCD1}">
+              <a14:hiddenFill xmlns:a14="http://schemas.microsoft.com/office/drawing/2010/main">
+                <a:solidFill>
+                  <a:srgbClr val="FFFFFF"/>
+                </a:solidFill>
+              </a14:hiddenFill>
+            </a:ext>
+          </a:extLst>
+        </p:spPr>
+      </p:pic>
     </p:spTree>
     <p:extLst>
       <p:ext uri="{BB962C8B-B14F-4D97-AF65-F5344CB8AC3E}">
-        <p14:creationId xmlns:p14="http://schemas.microsoft.com/office/powerpoint/2010/main" val="2542446162"/>
+        <p14:creationId xmlns:p14="http://schemas.microsoft.com/office/powerpoint/2010/main" val="696313299"/>
       </p:ext>
     </p:extLst>
   </p:cSld>
@@ -4692,7 +4815,7 @@
           <p:cNvPr id="2" name="Title 1">
             <a:extLst>
               <a:ext uri="{FF2B5EF4-FFF2-40B4-BE49-F238E27FC236}">
-                <a16:creationId xmlns:a16="http://schemas.microsoft.com/office/drawing/2014/main" id="{9C40C123-02E6-FE33-9E1E-DF50EB9A49CA}"/>
+                <a16:creationId xmlns:a16="http://schemas.microsoft.com/office/drawing/2014/main" id="{1E2D53DE-ACB0-D8F3-DED5-DA5301AE679D}"/>
               </a:ext>
             </a:extLst>
           </p:cNvPr>
@@ -4708,10 +4831,7 @@
           <a:bodyPr/>
           <a:lstStyle/>
           <a:p>
-            <a:r>
-              <a:rPr lang="en-US" dirty="0"/>
-              <a:t>In practice</a:t>
-            </a:r>
+            <a:endParaRPr lang="en-US"/>
           </a:p>
         </p:txBody>
       </p:sp>
@@ -4720,7 +4840,7 @@
           <p:cNvPr id="3" name="Content Placeholder 2">
             <a:extLst>
               <a:ext uri="{FF2B5EF4-FFF2-40B4-BE49-F238E27FC236}">
-                <a16:creationId xmlns:a16="http://schemas.microsoft.com/office/drawing/2014/main" id="{8EABEBED-8085-1448-7245-38595630A521}"/>
+                <a16:creationId xmlns:a16="http://schemas.microsoft.com/office/drawing/2014/main" id="{5C924873-D999-AF33-34A9-C0D11A76B416}"/>
               </a:ext>
             </a:extLst>
           </p:cNvPr>
@@ -4731,104 +4851,49 @@
             <p:ph idx="1"/>
           </p:nvPr>
         </p:nvSpPr>
-        <p:spPr>
-          <a:xfrm>
-            <a:off x="1451579" y="2015732"/>
-            <a:ext cx="5027193" cy="3450613"/>
-          </a:xfrm>
-        </p:spPr>
-        <p:txBody>
-          <a:bodyPr/>
-          <a:lstStyle/>
-          <a:p>
-            <a:r>
-              <a:rPr lang="en-US" dirty="0"/>
-              <a:t>In code very little needs to change. </a:t>
-            </a:r>
-          </a:p>
-          <a:p>
-            <a:pPr lvl="1"/>
-            <a:r>
-              <a:rPr lang="en-US" dirty="0"/>
-              <a:t>If we did it with 1 x, this is just wider. </a:t>
-            </a:r>
-          </a:p>
-          <a:p>
-            <a:r>
-              <a:rPr lang="en-US" dirty="0"/>
-              <a:t>The general process is identical. </a:t>
-            </a:r>
-          </a:p>
-          <a:p>
-            <a:pPr lvl="1"/>
-            <a:r>
-              <a:rPr lang="en-US" dirty="0"/>
-              <a:t>Exact steps that we need to do to process and prepare the data may change. </a:t>
-            </a:r>
-          </a:p>
-          <a:p>
-            <a:pPr lvl="1"/>
-            <a:r>
-              <a:rPr lang="en-US" dirty="0"/>
-              <a:t>Number of features could be ~unlimited. </a:t>
-            </a:r>
-          </a:p>
-          <a:p>
-            <a:endParaRPr lang="en-US" dirty="0"/>
+        <p:spPr/>
+        <p:txBody>
+          <a:bodyPr/>
+          <a:lstStyle/>
+          <a:p>
+            <a:endParaRPr lang="en-US"/>
           </a:p>
         </p:txBody>
       </p:sp>
       <p:pic>
         <p:nvPicPr>
-          <p:cNvPr id="12290" name="Picture 2" descr="Introducing Scikit-Learn | Python Data Science Handbook">
+          <p:cNvPr id="4" name="Picture 3" descr="R squared of a linear regression | Definition and interpretation">
             <a:extLst>
               <a:ext uri="{FF2B5EF4-FFF2-40B4-BE49-F238E27FC236}">
-                <a16:creationId xmlns:a16="http://schemas.microsoft.com/office/drawing/2014/main" id="{526F1CF6-BBBD-CF2A-CADD-6E071E2B9C82}"/>
+                <a16:creationId xmlns:a16="http://schemas.microsoft.com/office/drawing/2014/main" id="{22D7CF49-A608-E77B-90E8-DD5FD60BC3DD}"/>
               </a:ext>
             </a:extLst>
           </p:cNvPr>
           <p:cNvPicPr>
-            <a:picLocks noChangeAspect="1" noChangeArrowheads="1"/>
+            <a:picLocks noChangeAspect="1"/>
           </p:cNvPicPr>
           <p:nvPr/>
         </p:nvPicPr>
         <p:blipFill>
-          <a:blip r:embed="rId2">
-            <a:extLst>
-              <a:ext uri="{28A0092B-C50C-407E-A947-70E740481C1C}">
-                <a14:useLocalDpi xmlns:a14="http://schemas.microsoft.com/office/drawing/2010/main" val="0"/>
-              </a:ext>
-            </a:extLst>
-          </a:blip>
-          <a:srcRect/>
+          <a:blip r:embed="rId2"/>
           <a:stretch>
             <a:fillRect/>
           </a:stretch>
         </p:blipFill>
-        <p:spPr bwMode="auto">
-          <a:xfrm>
-            <a:off x="6478772" y="2015732"/>
-            <a:ext cx="5486400" cy="3657600"/>
+        <p:spPr>
+          <a:xfrm>
+            <a:off x="1325789" y="562920"/>
+            <a:ext cx="9854853" cy="5490561"/>
           </a:xfrm>
           <a:prstGeom prst="rect">
             <a:avLst/>
           </a:prstGeom>
-          <a:noFill/>
-          <a:extLst>
-            <a:ext uri="{909E8E84-426E-40DD-AFC4-6F175D3DCCD1}">
-              <a14:hiddenFill xmlns:a14="http://schemas.microsoft.com/office/drawing/2010/main">
-                <a:solidFill>
-                  <a:srgbClr val="FFFFFF"/>
-                </a:solidFill>
-              </a14:hiddenFill>
-            </a:ext>
-          </a:extLst>
         </p:spPr>
       </p:pic>
     </p:spTree>
     <p:extLst>
       <p:ext uri="{BB962C8B-B14F-4D97-AF65-F5344CB8AC3E}">
-        <p14:creationId xmlns:p14="http://schemas.microsoft.com/office/powerpoint/2010/main" val="3339658017"/>
+        <p14:creationId xmlns:p14="http://schemas.microsoft.com/office/powerpoint/2010/main" val="3382519262"/>
       </p:ext>
     </p:extLst>
   </p:cSld>
@@ -4860,7 +4925,7 @@
           <p:cNvPr id="2" name="Title 1">
             <a:extLst>
               <a:ext uri="{FF2B5EF4-FFF2-40B4-BE49-F238E27FC236}">
-                <a16:creationId xmlns:a16="http://schemas.microsoft.com/office/drawing/2014/main" id="{2C8A9012-918F-588C-D2B8-22CCF082990F}"/>
+                <a16:creationId xmlns:a16="http://schemas.microsoft.com/office/drawing/2014/main" id="{FACEAAE9-B128-E7B4-808A-E3CB8F5777EB}"/>
               </a:ext>
             </a:extLst>
           </p:cNvPr>
@@ -4878,7 +4943,7 @@
           <a:p>
             <a:r>
               <a:rPr lang="en-US" dirty="0"/>
-              <a:t>The Regression Magic</a:t>
+              <a:t>Using R Squared</a:t>
             </a:r>
           </a:p>
         </p:txBody>
@@ -4888,7 +4953,7 @@
           <p:cNvPr id="3" name="Content Placeholder 2">
             <a:extLst>
               <a:ext uri="{FF2B5EF4-FFF2-40B4-BE49-F238E27FC236}">
-                <a16:creationId xmlns:a16="http://schemas.microsoft.com/office/drawing/2014/main" id="{89F7C95A-B432-EB5A-BAB2-9680ACB61B56}"/>
+                <a16:creationId xmlns:a16="http://schemas.microsoft.com/office/drawing/2014/main" id="{79BCDDF8-807F-28D3-D8C8-F29A4A39CF1A}"/>
               </a:ext>
             </a:extLst>
           </p:cNvPr>
@@ -4901,109 +4966,80 @@
         </p:nvSpPr>
         <p:spPr>
           <a:xfrm>
-            <a:off x="319363" y="1853755"/>
-            <a:ext cx="5933854" cy="4199726"/>
-          </a:xfrm>
-        </p:spPr>
-        <p:txBody>
-          <a:bodyPr/>
-          <a:lstStyle/>
-          <a:p>
-            <a:r>
-              <a:rPr lang="en-US" dirty="0"/>
-              <a:t>These simple linear regression models let us see some of the logic. </a:t>
-            </a:r>
-          </a:p>
-          <a:p>
-            <a:pPr lvl="1"/>
-            <a:r>
-              <a:rPr lang="en-US" dirty="0"/>
-              <a:t>This often isn’t possible with the models we use later. </a:t>
-            </a:r>
-          </a:p>
-          <a:p>
-            <a:r>
-              <a:rPr lang="en-US" dirty="0"/>
-              <a:t>Prediction for Y is just a weighted combination of X. </a:t>
-            </a:r>
-          </a:p>
-          <a:p>
-            <a:pPr lvl="1"/>
-            <a:r>
-              <a:rPr lang="en-US" dirty="0"/>
-              <a:t>The machine learns what those should be. (LLS)</a:t>
-            </a:r>
-          </a:p>
-          <a:p>
-            <a:pPr lvl="1"/>
-            <a:r>
-              <a:rPr lang="en-US" dirty="0"/>
-              <a:t>The combo yields the least SSE possible (best fit). </a:t>
-            </a:r>
-          </a:p>
-          <a:p>
-            <a:r>
-              <a:rPr lang="en-US" dirty="0"/>
-              <a:t>Based on these inputs, what’s the most accurate combination to predict y? </a:t>
-            </a:r>
-          </a:p>
-          <a:p>
-            <a:pPr lvl="1"/>
-            <a:endParaRPr lang="en-US" dirty="0"/>
-          </a:p>
-        </p:txBody>
-      </p:sp>
-      <p:pic>
-        <p:nvPicPr>
-          <p:cNvPr id="8194" name="Picture 2" descr="Tutorial: Understanding Linear Regression and Regression Error Metrics">
-            <a:extLst>
-              <a:ext uri="{FF2B5EF4-FFF2-40B4-BE49-F238E27FC236}">
-                <a16:creationId xmlns:a16="http://schemas.microsoft.com/office/drawing/2014/main" id="{A12E9564-4B9A-C1C1-3B86-0983F4E16BF9}"/>
-              </a:ext>
-            </a:extLst>
-          </p:cNvPr>
-          <p:cNvPicPr>
-            <a:picLocks noChangeAspect="1" noChangeArrowheads="1"/>
-          </p:cNvPicPr>
-          <p:nvPr/>
-        </p:nvPicPr>
-        <p:blipFill>
-          <a:blip r:embed="rId2">
-            <a:extLst>
-              <a:ext uri="{28A0092B-C50C-407E-A947-70E740481C1C}">
-                <a14:useLocalDpi xmlns:a14="http://schemas.microsoft.com/office/drawing/2010/main" val="0"/>
-              </a:ext>
-            </a:extLst>
-          </a:blip>
-          <a:srcRect/>
-          <a:stretch>
-            <a:fillRect/>
-          </a:stretch>
-        </p:blipFill>
-        <p:spPr bwMode="auto">
-          <a:xfrm>
-            <a:off x="6253216" y="2015732"/>
-            <a:ext cx="5933854" cy="3540642"/>
-          </a:xfrm>
-          <a:prstGeom prst="rect">
-            <a:avLst/>
-          </a:prstGeom>
-          <a:noFill/>
-          <a:extLst>
-            <a:ext uri="{909E8E84-426E-40DD-AFC4-6F175D3DCCD1}">
-              <a14:hiddenFill xmlns:a14="http://schemas.microsoft.com/office/drawing/2010/main">
-                <a:solidFill>
-                  <a:srgbClr val="FFFFFF"/>
-                </a:solidFill>
-              </a14:hiddenFill>
-            </a:ext>
-          </a:extLst>
-        </p:spPr>
-      </p:pic>
+            <a:off x="1451579" y="1988288"/>
+            <a:ext cx="9603275" cy="4065193"/>
+          </a:xfrm>
+        </p:spPr>
+        <p:txBody>
+          <a:bodyPr/>
+          <a:lstStyle/>
+          <a:p>
+            <a:r>
+              <a:rPr lang="en-US" dirty="0"/>
+              <a:t>R2 is the most common default metric to score a model. </a:t>
+            </a:r>
+          </a:p>
+          <a:p>
+            <a:pPr lvl="1"/>
+            <a:r>
+              <a:rPr lang="en-US" dirty="0"/>
+              <a:t>Result of score function in sklearn, default value in </a:t>
+            </a:r>
+            <a:r>
+              <a:rPr lang="en-US" dirty="0" err="1"/>
+              <a:t>statsmodels</a:t>
+            </a:r>
+            <a:r>
+              <a:rPr lang="en-US" dirty="0"/>
+              <a:t>. </a:t>
+            </a:r>
+          </a:p>
+          <a:p>
+            <a:pPr lvl="1"/>
+            <a:r>
+              <a:rPr lang="en-US" dirty="0"/>
+              <a:t>We can compare anything, since it is a percentage. Error measures depend on scale. </a:t>
+            </a:r>
+          </a:p>
+          <a:p>
+            <a:r>
+              <a:rPr lang="en-US" dirty="0"/>
+              <a:t>The (1-R2, SSE) variance is what our model doesn’t capture. </a:t>
+            </a:r>
+          </a:p>
+          <a:p>
+            <a:pPr lvl="1"/>
+            <a:r>
+              <a:rPr lang="en-US" dirty="0"/>
+              <a:t>Variables that we don’t have in the model (e.g. h vs w probably has more factors). </a:t>
+            </a:r>
+          </a:p>
+          <a:p>
+            <a:pPr lvl="1"/>
+            <a:r>
+              <a:rPr lang="en-US" dirty="0"/>
+              <a:t>Some things can’t really be embedded into a model easily as a variable. </a:t>
+            </a:r>
+          </a:p>
+          <a:p>
+            <a:pPr lvl="1"/>
+            <a:r>
+              <a:rPr lang="en-US" dirty="0"/>
+              <a:t>Noise or randomness that we fundamentally can’t predict. </a:t>
+            </a:r>
+          </a:p>
+          <a:p>
+            <a:r>
+              <a:rPr lang="en-US" dirty="0"/>
+              <a:t>Adding more inputs can help us capture more things that determine outcome…</a:t>
+            </a:r>
+          </a:p>
+        </p:txBody>
+      </p:sp>
     </p:spTree>
     <p:extLst>
       <p:ext uri="{BB962C8B-B14F-4D97-AF65-F5344CB8AC3E}">
-        <p14:creationId xmlns:p14="http://schemas.microsoft.com/office/powerpoint/2010/main" val="1571698123"/>
+        <p14:creationId xmlns:p14="http://schemas.microsoft.com/office/powerpoint/2010/main" val="1975493897"/>
       </p:ext>
     </p:extLst>
   </p:cSld>
@@ -5035,7 +5071,7 @@
           <p:cNvPr id="2" name="Title 1">
             <a:extLst>
               <a:ext uri="{FF2B5EF4-FFF2-40B4-BE49-F238E27FC236}">
-                <a16:creationId xmlns:a16="http://schemas.microsoft.com/office/drawing/2014/main" id="{356F2141-30A2-DEEE-B454-ACA79776DB0E}"/>
+                <a16:creationId xmlns:a16="http://schemas.microsoft.com/office/drawing/2014/main" id="{6BF65C20-A3DB-CC86-7479-60674AF383A8}"/>
               </a:ext>
             </a:extLst>
           </p:cNvPr>
@@ -5053,7 +5089,7 @@
           <a:p>
             <a:r>
               <a:rPr lang="en-US" dirty="0"/>
-              <a:t>Multicollinearity</a:t>
+              <a:t>Multiple Inputs for X</a:t>
             </a:r>
           </a:p>
         </p:txBody>
@@ -5063,7 +5099,7 @@
           <p:cNvPr id="3" name="Content Placeholder 2">
             <a:extLst>
               <a:ext uri="{FF2B5EF4-FFF2-40B4-BE49-F238E27FC236}">
-                <a16:creationId xmlns:a16="http://schemas.microsoft.com/office/drawing/2014/main" id="{39D3A950-E4DA-B5FF-F7D1-356F30674396}"/>
+                <a16:creationId xmlns:a16="http://schemas.microsoft.com/office/drawing/2014/main" id="{529EEFEB-DF04-7EAE-3754-CD99255770D5}"/>
               </a:ext>
             </a:extLst>
           </p:cNvPr>
@@ -5076,44 +5112,70 @@
         </p:nvSpPr>
         <p:spPr>
           <a:xfrm>
-            <a:off x="1451579" y="2015732"/>
-            <a:ext cx="9603275" cy="3959766"/>
-          </a:xfrm>
-        </p:spPr>
-        <p:txBody>
-          <a:bodyPr/>
-          <a:lstStyle/>
-          <a:p>
-            <a:r>
-              <a:rPr lang="en-US" dirty="0"/>
-              <a:t>If we have many relevant X inputs, our prediction for Y can be quite accurate. </a:t>
-            </a:r>
-          </a:p>
-          <a:p>
-            <a:pPr lvl="1"/>
-            <a:r>
-              <a:rPr lang="en-US" dirty="0"/>
-              <a:t>Model can take in many relevant factors and weight each appropriately. </a:t>
-            </a:r>
-          </a:p>
-          <a:p>
-            <a:r>
-              <a:rPr lang="en-US" dirty="0"/>
-              <a:t>What if we want to tune our model - make it more accurate or efficient?</a:t>
-            </a:r>
-          </a:p>
-          <a:p>
-            <a:pPr lvl="1"/>
-            <a:r>
-              <a:rPr lang="en-US" dirty="0"/>
-              <a:t>(We’ll do this commonly later for accuracy.) </a:t>
-            </a:r>
-          </a:p>
-          <a:p>
-            <a:pPr lvl="1"/>
-            <a:r>
-              <a:rPr lang="en-US" dirty="0"/>
-              <a:t>We may have many X inputs, but perhaps not all are needed…</a:t>
+            <a:off x="1451579" y="1853754"/>
+            <a:ext cx="9603275" cy="4199727"/>
+          </a:xfrm>
+        </p:spPr>
+        <p:txBody>
+          <a:bodyPr/>
+          <a:lstStyle/>
+          <a:p>
+            <a:r>
+              <a:rPr lang="en-US" dirty="0"/>
+              <a:t>In most cases, we have several inputs to predict one output. </a:t>
+            </a:r>
+          </a:p>
+          <a:p>
+            <a:pPr lvl="1"/>
+            <a:r>
+              <a:rPr lang="en-US" dirty="0"/>
+              <a:t>E.g. a loan may take in income, age, profession, credit… to predict interest rate. </a:t>
+            </a:r>
+          </a:p>
+          <a:p>
+            <a:pPr lvl="1"/>
+            <a:r>
+              <a:rPr lang="en-US" dirty="0"/>
+              <a:t>Real scenarios can have thousands or millions (image, language, genetics…)</a:t>
+            </a:r>
+          </a:p>
+          <a:p>
+            <a:r>
+              <a:rPr lang="en-US" dirty="0"/>
+              <a:t>The more X inputs we have (assuming relevance), the higher our ceiling is.</a:t>
+            </a:r>
+          </a:p>
+          <a:p>
+            <a:pPr lvl="1"/>
+            <a:r>
+              <a:rPr lang="en-US" dirty="0"/>
+              <a:t>We can capture more of the SST into the model. </a:t>
+            </a:r>
+          </a:p>
+          <a:p>
+            <a:r>
+              <a:rPr lang="en-US" dirty="0"/>
+              <a:t>For us, not all that much changes:</a:t>
+            </a:r>
+          </a:p>
+          <a:p>
+            <a:pPr lvl="1"/>
+            <a:r>
+              <a:rPr lang="en-US" dirty="0"/>
+              <a:t>Data is prepared and shaped the same, X is just wider. </a:t>
+            </a:r>
+          </a:p>
+          <a:p>
+            <a:pPr lvl="1"/>
+            <a:r>
+              <a:rPr lang="en-US" dirty="0"/>
+              <a:t>Sklearn will handle the details for us. </a:t>
+            </a:r>
+          </a:p>
+          <a:p>
+            <a:r>
+              <a:rPr lang="en-US" dirty="0"/>
+              <a:t>We often call the x values features, and the y value the target. </a:t>
             </a:r>
           </a:p>
         </p:txBody>
@@ -5121,7 +5183,7 @@
     </p:spTree>
     <p:extLst>
       <p:ext uri="{BB962C8B-B14F-4D97-AF65-F5344CB8AC3E}">
-        <p14:creationId xmlns:p14="http://schemas.microsoft.com/office/powerpoint/2010/main" val="549387644"/>
+        <p14:creationId xmlns:p14="http://schemas.microsoft.com/office/powerpoint/2010/main" val="562453709"/>
       </p:ext>
     </p:extLst>
   </p:cSld>
@@ -5153,7 +5215,7 @@
           <p:cNvPr id="2" name="Title 1">
             <a:extLst>
               <a:ext uri="{FF2B5EF4-FFF2-40B4-BE49-F238E27FC236}">
-                <a16:creationId xmlns:a16="http://schemas.microsoft.com/office/drawing/2014/main" id="{A00BDED4-C114-4F97-9896-A75AAFF437FD}"/>
+                <a16:creationId xmlns:a16="http://schemas.microsoft.com/office/drawing/2014/main" id="{EAACAC41-7560-550A-22C7-25D1F869843F}"/>
               </a:ext>
             </a:extLst>
           </p:cNvPr>
@@ -5171,7 +5233,7 @@
           <a:p>
             <a:r>
               <a:rPr lang="en-US" dirty="0"/>
-              <a:t>Example – Medical Screening</a:t>
+              <a:t>What’s going on in Multiple Regression?</a:t>
             </a:r>
           </a:p>
         </p:txBody>
@@ -5181,7 +5243,7 @@
           <p:cNvPr id="3" name="Content Placeholder 2">
             <a:extLst>
               <a:ext uri="{FF2B5EF4-FFF2-40B4-BE49-F238E27FC236}">
-                <a16:creationId xmlns:a16="http://schemas.microsoft.com/office/drawing/2014/main" id="{D2717539-74A2-9EE4-4F88-43AAE97788B3}"/>
+                <a16:creationId xmlns:a16="http://schemas.microsoft.com/office/drawing/2014/main" id="{57AB1097-754F-68CB-361F-23574EA1DCB4}"/>
               </a:ext>
             </a:extLst>
           </p:cNvPr>
@@ -5194,79 +5256,111 @@
         </p:nvSpPr>
         <p:spPr>
           <a:xfrm>
-            <a:off x="1451579" y="1853753"/>
-            <a:ext cx="9603275" cy="4199727"/>
-          </a:xfrm>
-        </p:spPr>
-        <p:txBody>
-          <a:bodyPr/>
-          <a:lstStyle/>
-          <a:p>
-            <a:r>
-              <a:rPr lang="en-US" dirty="0"/>
-              <a:t>Suppose we have a model predicting bodyfat percentage for patients. </a:t>
-            </a:r>
-          </a:p>
-          <a:p>
-            <a:pPr lvl="1"/>
-            <a:r>
-              <a:rPr lang="en-US" dirty="0"/>
-              <a:t>Measuring bodyfat is slow and expensive for large numbers of people. </a:t>
-            </a:r>
-          </a:p>
-          <a:p>
-            <a:pPr lvl="1"/>
-            <a:r>
-              <a:rPr lang="en-US" dirty="0"/>
-              <a:t>It can be important for forecasting health outcomes. </a:t>
-            </a:r>
-          </a:p>
-          <a:p>
-            <a:r>
-              <a:rPr lang="en-US" dirty="0"/>
-              <a:t>Several other metrics can tell us about bodyfat percentage, partially. </a:t>
-            </a:r>
-          </a:p>
-          <a:p>
-            <a:pPr lvl="1"/>
-            <a:r>
-              <a:rPr lang="en-US" dirty="0"/>
-              <a:t>Weight, height, waist size, thigh size, calf size, hip size, chest size…</a:t>
-            </a:r>
-          </a:p>
-          <a:p>
-            <a:pPr lvl="1"/>
-            <a:r>
-              <a:rPr lang="en-US" dirty="0"/>
-              <a:t>These are all easier and faster to take and log. </a:t>
-            </a:r>
-          </a:p>
-          <a:p>
-            <a:r>
-              <a:rPr lang="en-US" dirty="0"/>
-              <a:t>Each of these metrics give us some information about bf%. </a:t>
-            </a:r>
-          </a:p>
-          <a:p>
-            <a:pPr lvl="1"/>
-            <a:r>
-              <a:rPr lang="en-US" dirty="0"/>
-              <a:t>There’s a lot of overlap in the information given. </a:t>
-            </a:r>
-          </a:p>
-          <a:p>
-            <a:pPr lvl="1"/>
-            <a:r>
-              <a:rPr lang="en-US" dirty="0"/>
-              <a:t>Waist size, hip size, thigh size aren’t the same, but they tend to tell us almost the same info.</a:t>
-            </a:r>
-          </a:p>
-        </p:txBody>
-      </p:sp>
+            <a:off x="7699975" y="2015732"/>
+            <a:ext cx="4341256" cy="3836773"/>
+          </a:xfrm>
+        </p:spPr>
+        <p:txBody>
+          <a:bodyPr/>
+          <a:lstStyle/>
+          <a:p>
+            <a:r>
+              <a:rPr lang="en-US" dirty="0"/>
+              <a:t>The concepts are identical to 1 X. </a:t>
+            </a:r>
+          </a:p>
+          <a:p>
+            <a:pPr lvl="1"/>
+            <a:r>
+              <a:rPr lang="en-US" dirty="0"/>
+              <a:t>We are still predicting Y. </a:t>
+            </a:r>
+          </a:p>
+          <a:p>
+            <a:pPr lvl="1"/>
+            <a:r>
+              <a:rPr lang="en-US" dirty="0"/>
+              <a:t>The line becomes a plane. </a:t>
+            </a:r>
+          </a:p>
+          <a:p>
+            <a:pPr lvl="1"/>
+            <a:r>
+              <a:rPr lang="en-US" dirty="0"/>
+              <a:t>The equation gains a term. </a:t>
+            </a:r>
+          </a:p>
+          <a:p>
+            <a:r>
+              <a:rPr lang="en-US" dirty="0"/>
+              <a:t>This extends to N dimensions. </a:t>
+            </a:r>
+          </a:p>
+          <a:p>
+            <a:r>
+              <a:rPr lang="en-US" dirty="0"/>
+              <a:t>The higher dimension, the more complex a thing we can predict. </a:t>
+            </a:r>
+          </a:p>
+          <a:p>
+            <a:r>
+              <a:rPr lang="en-US" dirty="0"/>
+              <a:t>We can see why outliers can hurt!</a:t>
+            </a:r>
+          </a:p>
+        </p:txBody>
+      </p:sp>
+      <p:pic>
+        <p:nvPicPr>
+          <p:cNvPr id="7170" name="Picture 2" descr="The regression model in a 3D space. A multi-variable regression model... |  Download Scientific Diagram">
+            <a:extLst>
+              <a:ext uri="{FF2B5EF4-FFF2-40B4-BE49-F238E27FC236}">
+                <a16:creationId xmlns:a16="http://schemas.microsoft.com/office/drawing/2014/main" id="{9402E54C-1A01-3FE9-0EC1-8CCB8291CAB1}"/>
+              </a:ext>
+            </a:extLst>
+          </p:cNvPr>
+          <p:cNvPicPr>
+            <a:picLocks noChangeAspect="1" noChangeArrowheads="1"/>
+          </p:cNvPicPr>
+          <p:nvPr/>
+        </p:nvPicPr>
+        <p:blipFill>
+          <a:blip r:embed="rId2">
+            <a:extLst>
+              <a:ext uri="{28A0092B-C50C-407E-A947-70E740481C1C}">
+                <a14:useLocalDpi xmlns:a14="http://schemas.microsoft.com/office/drawing/2010/main" val="0"/>
+              </a:ext>
+            </a:extLst>
+          </a:blip>
+          <a:srcRect/>
+          <a:stretch>
+            <a:fillRect/>
+          </a:stretch>
+        </p:blipFill>
+        <p:spPr bwMode="auto">
+          <a:xfrm>
+            <a:off x="150769" y="2015732"/>
+            <a:ext cx="7549206" cy="3836773"/>
+          </a:xfrm>
+          <a:prstGeom prst="rect">
+            <a:avLst/>
+          </a:prstGeom>
+          <a:noFill/>
+          <a:extLst>
+            <a:ext uri="{909E8E84-426E-40DD-AFC4-6F175D3DCCD1}">
+              <a14:hiddenFill xmlns:a14="http://schemas.microsoft.com/office/drawing/2010/main">
+                <a:solidFill>
+                  <a:srgbClr val="FFFFFF"/>
+                </a:solidFill>
+              </a14:hiddenFill>
+            </a:ext>
+          </a:extLst>
+        </p:spPr>
+      </p:pic>
     </p:spTree>
     <p:extLst>
       <p:ext uri="{BB962C8B-B14F-4D97-AF65-F5344CB8AC3E}">
-        <p14:creationId xmlns:p14="http://schemas.microsoft.com/office/powerpoint/2010/main" val="1427320560"/>
+        <p14:creationId xmlns:p14="http://schemas.microsoft.com/office/powerpoint/2010/main" val="2542446162"/>
       </p:ext>
     </p:extLst>
   </p:cSld>
@@ -5298,7 +5392,7 @@
           <p:cNvPr id="2" name="Title 1">
             <a:extLst>
               <a:ext uri="{FF2B5EF4-FFF2-40B4-BE49-F238E27FC236}">
-                <a16:creationId xmlns:a16="http://schemas.microsoft.com/office/drawing/2014/main" id="{719CCE9F-899C-DC97-92C7-EBA7069C9889}"/>
+                <a16:creationId xmlns:a16="http://schemas.microsoft.com/office/drawing/2014/main" id="{9C40C123-02E6-FE33-9E1E-DF50EB9A49CA}"/>
               </a:ext>
             </a:extLst>
           </p:cNvPr>
@@ -5316,7 +5410,7 @@
           <a:p>
             <a:r>
               <a:rPr lang="en-US" dirty="0"/>
-              <a:t>So, What’s the Problem? </a:t>
+              <a:t>In practice</a:t>
             </a:r>
           </a:p>
         </p:txBody>
@@ -5326,7 +5420,7 @@
           <p:cNvPr id="3" name="Content Placeholder 2">
             <a:extLst>
               <a:ext uri="{FF2B5EF4-FFF2-40B4-BE49-F238E27FC236}">
-                <a16:creationId xmlns:a16="http://schemas.microsoft.com/office/drawing/2014/main" id="{04BEC346-AE6F-4717-1ED0-F90F8661361B}"/>
+                <a16:creationId xmlns:a16="http://schemas.microsoft.com/office/drawing/2014/main" id="{8EABEBED-8085-1448-7245-38595630A521}"/>
               </a:ext>
             </a:extLst>
           </p:cNvPr>
@@ -5340,73 +5434,56 @@
         <p:spPr>
           <a:xfrm>
             <a:off x="1451579" y="2015732"/>
-            <a:ext cx="9603275" cy="4037749"/>
-          </a:xfrm>
-        </p:spPr>
-        <p:txBody>
-          <a:bodyPr/>
-          <a:lstStyle/>
-          <a:p>
-            <a:r>
-              <a:rPr lang="en-US" dirty="0"/>
-              <a:t>If we have X values that are largely the same we call that multicollinearity. </a:t>
-            </a:r>
-          </a:p>
-          <a:p>
-            <a:pPr lvl="1"/>
-            <a:r>
-              <a:rPr lang="en-US" dirty="0"/>
-              <a:t>I.e. several things are highly correlated with each other. </a:t>
-            </a:r>
-          </a:p>
-          <a:p>
-            <a:r>
-              <a:rPr lang="en-US" dirty="0"/>
-              <a:t>This isn’t fatal, but can give us some issues. </a:t>
-            </a:r>
-          </a:p>
-          <a:p>
-            <a:pPr lvl="1"/>
-            <a:r>
-              <a:rPr lang="en-US" dirty="0"/>
-              <a:t>If multiple inputs have the same info, the model can’t figure out how to weight each. </a:t>
-            </a:r>
-          </a:p>
-          <a:p>
-            <a:pPr lvl="1"/>
-            <a:r>
-              <a:rPr lang="en-US" dirty="0"/>
-              <a:t>The assumption is inputs are orthogonal, they have nothing to do with each other. </a:t>
-            </a:r>
-          </a:p>
-          <a:p>
-            <a:pPr lvl="1"/>
-            <a:r>
-              <a:rPr lang="en-US" dirty="0"/>
-              <a:t>A model can’t be sure how to change coefficients as several are almost the same. </a:t>
-            </a:r>
-          </a:p>
-          <a:p>
-            <a:pPr lvl="1"/>
-            <a:r>
-              <a:rPr lang="en-US" dirty="0"/>
-              <a:t>The learning can be hard (not with LLS) and can swing with small changes. </a:t>
-            </a:r>
-          </a:p>
-          <a:p>
-            <a:r>
-              <a:rPr lang="en-US" dirty="0"/>
-              <a:t>Ideally, we want each thing measured exactly once. </a:t>
-            </a:r>
+            <a:ext cx="5027193" cy="4037749"/>
+          </a:xfrm>
+        </p:spPr>
+        <p:txBody>
+          <a:bodyPr/>
+          <a:lstStyle/>
+          <a:p>
+            <a:r>
+              <a:rPr lang="en-US" dirty="0"/>
+              <a:t>In code very little needs to change. </a:t>
+            </a:r>
+          </a:p>
+          <a:p>
+            <a:pPr lvl="1"/>
+            <a:r>
+              <a:rPr lang="en-US" dirty="0"/>
+              <a:t>If we did it with 1 x, this is just wider. </a:t>
+            </a:r>
+          </a:p>
+          <a:p>
+            <a:r>
+              <a:rPr lang="en-US" dirty="0"/>
+              <a:t>The general process is identical. </a:t>
+            </a:r>
+          </a:p>
+          <a:p>
+            <a:pPr lvl="1"/>
+            <a:r>
+              <a:rPr lang="en-US" dirty="0"/>
+              <a:t>Exact steps that we need to do to process and prepare the data may change. </a:t>
+            </a:r>
+          </a:p>
+          <a:p>
+            <a:pPr lvl="1"/>
+            <a:r>
+              <a:rPr lang="en-US" dirty="0"/>
+              <a:t>Number of features could be ~unlimited. </a:t>
+            </a:r>
+          </a:p>
+          <a:p>
+            <a:endParaRPr lang="en-US" dirty="0"/>
           </a:p>
         </p:txBody>
       </p:sp>
       <p:pic>
         <p:nvPicPr>
-          <p:cNvPr id="4" name="Picture 2" descr="The regression model in a 3D space. A multi-variable regression model... |  Download Scientific Diagram">
+          <p:cNvPr id="12290" name="Picture 2" descr="Introducing Scikit-Learn | Python Data Science Handbook">
             <a:extLst>
               <a:ext uri="{FF2B5EF4-FFF2-40B4-BE49-F238E27FC236}">
-                <a16:creationId xmlns:a16="http://schemas.microsoft.com/office/drawing/2014/main" id="{F81911F5-536D-B1B7-23C0-DAE0A5792CBF}"/>
+                <a16:creationId xmlns:a16="http://schemas.microsoft.com/office/drawing/2014/main" id="{526F1CF6-BBBD-CF2A-CADD-6E071E2B9C82}"/>
               </a:ext>
             </a:extLst>
           </p:cNvPr>
@@ -5430,8 +5507,8 @@
         </p:blipFill>
         <p:spPr bwMode="auto">
           <a:xfrm>
-            <a:off x="8155459" y="1"/>
-            <a:ext cx="4003590" cy="2034766"/>
+            <a:off x="6478772" y="2015732"/>
+            <a:ext cx="5486400" cy="3657600"/>
           </a:xfrm>
           <a:prstGeom prst="rect">
             <a:avLst/>
@@ -5451,7 +5528,7 @@
     </p:spTree>
     <p:extLst>
       <p:ext uri="{BB962C8B-B14F-4D97-AF65-F5344CB8AC3E}">
-        <p14:creationId xmlns:p14="http://schemas.microsoft.com/office/powerpoint/2010/main" val="808301570"/>
+        <p14:creationId xmlns:p14="http://schemas.microsoft.com/office/powerpoint/2010/main" val="3339658017"/>
       </p:ext>
     </p:extLst>
   </p:cSld>
@@ -5573,7 +5650,7 @@
           <p:cNvPr id="2" name="Title 1">
             <a:extLst>
               <a:ext uri="{FF2B5EF4-FFF2-40B4-BE49-F238E27FC236}">
-                <a16:creationId xmlns:a16="http://schemas.microsoft.com/office/drawing/2014/main" id="{52E71A9E-7C47-6840-50F2-A56D39E218E9}"/>
+                <a16:creationId xmlns:a16="http://schemas.microsoft.com/office/drawing/2014/main" id="{2C8A9012-918F-588C-D2B8-22CCF082990F}"/>
               </a:ext>
             </a:extLst>
           </p:cNvPr>
@@ -5591,7 +5668,7 @@
           <a:p>
             <a:r>
               <a:rPr lang="en-US" dirty="0"/>
-              <a:t>Managing M.C.</a:t>
+              <a:t>The Regression Magic</a:t>
             </a:r>
           </a:p>
         </p:txBody>
@@ -5601,7 +5678,7 @@
           <p:cNvPr id="3" name="Content Placeholder 2">
             <a:extLst>
               <a:ext uri="{FF2B5EF4-FFF2-40B4-BE49-F238E27FC236}">
-                <a16:creationId xmlns:a16="http://schemas.microsoft.com/office/drawing/2014/main" id="{C3B4270B-997D-BDDB-0CA6-DA8827327E59}"/>
+                <a16:creationId xmlns:a16="http://schemas.microsoft.com/office/drawing/2014/main" id="{89F7C95A-B432-EB5A-BAB2-9680ACB61B56}"/>
               </a:ext>
             </a:extLst>
           </p:cNvPr>
@@ -5614,96 +5691,123 @@
         </p:nvSpPr>
         <p:spPr>
           <a:xfrm>
-            <a:off x="1451579" y="1945758"/>
-            <a:ext cx="10254868" cy="4107723"/>
-          </a:xfrm>
-        </p:spPr>
-        <p:txBody>
-          <a:bodyPr>
-            <a:normAutofit/>
-          </a:bodyPr>
-          <a:lstStyle/>
-          <a:p>
-            <a:r>
-              <a:rPr lang="en-US" dirty="0"/>
-              <a:t>Having some </a:t>
-            </a:r>
-            <a:r>
-              <a:rPr lang="en-US" dirty="0" err="1"/>
-              <a:t>m.c.</a:t>
-            </a:r>
-            <a:r>
-              <a:rPr lang="en-US" dirty="0"/>
-              <a:t> won’t break things on its own. </a:t>
-            </a:r>
-          </a:p>
-          <a:p>
-            <a:r>
-              <a:rPr lang="en-US" dirty="0"/>
-              <a:t>In high-dimensional models, training may be slow or not converge. </a:t>
-            </a:r>
-          </a:p>
-          <a:p>
-            <a:r>
-              <a:rPr lang="en-US" dirty="0"/>
-              <a:t>In cases like our linear regression, we can’t know which inputs matter. </a:t>
-            </a:r>
-          </a:p>
-          <a:p>
-            <a:pPr lvl="1"/>
-            <a:r>
-              <a:rPr lang="en-US" dirty="0"/>
-              <a:t>Our first tuning step can be to remove, so model can fit accurately. </a:t>
-            </a:r>
-          </a:p>
-          <a:p>
-            <a:pPr lvl="1"/>
-            <a:r>
-              <a:rPr lang="en-US" dirty="0"/>
-              <a:t>The model is trying to weight importance, if the same thing comes from many sources, that’s hard. </a:t>
-            </a:r>
-          </a:p>
-          <a:p>
-            <a:r>
-              <a:rPr lang="en-US" dirty="0"/>
-              <a:t>Generally, the simpler the model, the better. </a:t>
-            </a:r>
-          </a:p>
-          <a:p>
-            <a:pPr lvl="1"/>
-            <a:r>
-              <a:rPr lang="en-US" dirty="0"/>
-              <a:t>Similar performance with fewer inputs is cheaper. </a:t>
-            </a:r>
-          </a:p>
-          <a:p>
-            <a:pPr lvl="1"/>
-            <a:r>
-              <a:rPr lang="en-US" dirty="0"/>
-              <a:t>In the bf% example, we literally need less work and tools. </a:t>
-            </a:r>
-          </a:p>
-          <a:p>
-            <a:pPr lvl="1"/>
-            <a:r>
-              <a:rPr lang="en-US" dirty="0"/>
-              <a:t>Other whys and </a:t>
-            </a:r>
-            <a:r>
-              <a:rPr lang="en-US" dirty="0" err="1"/>
-              <a:t>hows</a:t>
-            </a:r>
-            <a:r>
-              <a:rPr lang="en-US" dirty="0"/>
-              <a:t> to come later. </a:t>
-            </a:r>
-          </a:p>
-        </p:txBody>
-      </p:sp>
+            <a:off x="319363" y="1853755"/>
+            <a:ext cx="5933854" cy="4199726"/>
+          </a:xfrm>
+        </p:spPr>
+        <p:txBody>
+          <a:bodyPr/>
+          <a:lstStyle/>
+          <a:p>
+            <a:r>
+              <a:rPr lang="en-US" dirty="0"/>
+              <a:t>Simple regression models let us see the logic. </a:t>
+            </a:r>
+          </a:p>
+          <a:p>
+            <a:pPr lvl="1"/>
+            <a:r>
+              <a:rPr lang="en-US" dirty="0"/>
+              <a:t>This often isn’t possible with the models we use later. </a:t>
+            </a:r>
+          </a:p>
+          <a:p>
+            <a:r>
+              <a:rPr lang="en-US" dirty="0"/>
+              <a:t>Prediction for Y is just a weighted combination of X. </a:t>
+            </a:r>
+          </a:p>
+          <a:p>
+            <a:pPr lvl="1"/>
+            <a:r>
+              <a:rPr lang="en-US" dirty="0"/>
+              <a:t>The machine learns what those should be. (LLS)</a:t>
+            </a:r>
+          </a:p>
+          <a:p>
+            <a:pPr lvl="1"/>
+            <a:r>
+              <a:rPr lang="en-US" dirty="0"/>
+              <a:t>The combo yields the least SSE possible (best fit). </a:t>
+            </a:r>
+          </a:p>
+          <a:p>
+            <a:pPr lvl="1"/>
+            <a:r>
+              <a:rPr lang="en-US" dirty="0"/>
+              <a:t>Each parameter controls weight of input. </a:t>
+            </a:r>
+          </a:p>
+          <a:p>
+            <a:pPr lvl="1"/>
+            <a:r>
+              <a:rPr lang="en-US" dirty="0"/>
+              <a:t>Intercept shifts entire thing up/down. </a:t>
+            </a:r>
+          </a:p>
+          <a:p>
+            <a:r>
+              <a:rPr lang="en-US" dirty="0"/>
+              <a:t>Based on these inputs, what’s the most accurate combination to predict y? </a:t>
+            </a:r>
+          </a:p>
+          <a:p>
+            <a:pPr lvl="1"/>
+            <a:endParaRPr lang="en-US" dirty="0"/>
+          </a:p>
+        </p:txBody>
+      </p:sp>
+      <p:pic>
+        <p:nvPicPr>
+          <p:cNvPr id="8194" name="Picture 2" descr="Tutorial: Understanding Linear Regression and Regression Error Metrics">
+            <a:extLst>
+              <a:ext uri="{FF2B5EF4-FFF2-40B4-BE49-F238E27FC236}">
+                <a16:creationId xmlns:a16="http://schemas.microsoft.com/office/drawing/2014/main" id="{A12E9564-4B9A-C1C1-3B86-0983F4E16BF9}"/>
+              </a:ext>
+            </a:extLst>
+          </p:cNvPr>
+          <p:cNvPicPr>
+            <a:picLocks noChangeAspect="1" noChangeArrowheads="1"/>
+          </p:cNvPicPr>
+          <p:nvPr/>
+        </p:nvPicPr>
+        <p:blipFill>
+          <a:blip r:embed="rId2">
+            <a:extLst>
+              <a:ext uri="{28A0092B-C50C-407E-A947-70E740481C1C}">
+                <a14:useLocalDpi xmlns:a14="http://schemas.microsoft.com/office/drawing/2010/main" val="0"/>
+              </a:ext>
+            </a:extLst>
+          </a:blip>
+          <a:srcRect/>
+          <a:stretch>
+            <a:fillRect/>
+          </a:stretch>
+        </p:blipFill>
+        <p:spPr bwMode="auto">
+          <a:xfrm>
+            <a:off x="6253216" y="2015732"/>
+            <a:ext cx="5933854" cy="3540642"/>
+          </a:xfrm>
+          <a:prstGeom prst="rect">
+            <a:avLst/>
+          </a:prstGeom>
+          <a:noFill/>
+          <a:extLst>
+            <a:ext uri="{909E8E84-426E-40DD-AFC4-6F175D3DCCD1}">
+              <a14:hiddenFill xmlns:a14="http://schemas.microsoft.com/office/drawing/2010/main">
+                <a:solidFill>
+                  <a:srgbClr val="FFFFFF"/>
+                </a:solidFill>
+              </a14:hiddenFill>
+            </a:ext>
+          </a:extLst>
+        </p:spPr>
+      </p:pic>
     </p:spTree>
     <p:extLst>
       <p:ext uri="{BB962C8B-B14F-4D97-AF65-F5344CB8AC3E}">
-        <p14:creationId xmlns:p14="http://schemas.microsoft.com/office/powerpoint/2010/main" val="2220712716"/>
+        <p14:creationId xmlns:p14="http://schemas.microsoft.com/office/powerpoint/2010/main" val="1571698123"/>
       </p:ext>
     </p:extLst>
   </p:cSld>
@@ -5735,7 +5839,7 @@
           <p:cNvPr id="2" name="Title 1">
             <a:extLst>
               <a:ext uri="{FF2B5EF4-FFF2-40B4-BE49-F238E27FC236}">
-                <a16:creationId xmlns:a16="http://schemas.microsoft.com/office/drawing/2014/main" id="{D54CD3E1-85EC-DFC3-D236-AE8FBAA7F9F6}"/>
+                <a16:creationId xmlns:a16="http://schemas.microsoft.com/office/drawing/2014/main" id="{356F2141-30A2-DEEE-B454-ACA79776DB0E}"/>
               </a:ext>
             </a:extLst>
           </p:cNvPr>
@@ -5753,13 +5857,8 @@
           <a:p>
             <a:r>
               <a:rPr lang="en-US" dirty="0"/>
-              <a:t>Detecting </a:t>
-            </a:r>
-            <a:r>
-              <a:rPr lang="en-US" dirty="0" err="1"/>
-              <a:t>M.c.</a:t>
-            </a:r>
-            <a:endParaRPr lang="en-US" dirty="0"/>
+              <a:t>Multicollinearity</a:t>
+            </a:r>
           </a:p>
         </p:txBody>
       </p:sp>
@@ -5768,7 +5867,7 @@
           <p:cNvPr id="3" name="Content Placeholder 2">
             <a:extLst>
               <a:ext uri="{FF2B5EF4-FFF2-40B4-BE49-F238E27FC236}">
-                <a16:creationId xmlns:a16="http://schemas.microsoft.com/office/drawing/2014/main" id="{2B8D077B-E87A-1B58-2E36-FE87921AC61D}"/>
+                <a16:creationId xmlns:a16="http://schemas.microsoft.com/office/drawing/2014/main" id="{39D3A950-E4DA-B5FF-F7D1-356F30674396}"/>
               </a:ext>
             </a:extLst>
           </p:cNvPr>
@@ -5781,86 +5880,82 @@
         </p:nvSpPr>
         <p:spPr>
           <a:xfrm>
-            <a:off x="574158" y="2015732"/>
-            <a:ext cx="4742380" cy="3450613"/>
-          </a:xfrm>
-        </p:spPr>
-        <p:txBody>
-          <a:bodyPr/>
-          <a:lstStyle/>
-          <a:p>
-            <a:r>
-              <a:rPr lang="en-US" dirty="0"/>
-              <a:t>We can usually spot it in a </a:t>
-            </a:r>
-            <a:r>
-              <a:rPr lang="en-US" dirty="0" err="1"/>
-              <a:t>pairplot</a:t>
-            </a:r>
-            <a:r>
-              <a:rPr lang="en-US" dirty="0"/>
-              <a:t>. </a:t>
-            </a:r>
-          </a:p>
-          <a:p>
-            <a:r>
-              <a:rPr lang="en-US" dirty="0"/>
-              <a:t>Pairs of variables that appear highly correlated. </a:t>
+            <a:off x="4769708" y="2015732"/>
+            <a:ext cx="6285146" cy="3959766"/>
+          </a:xfrm>
+        </p:spPr>
+        <p:txBody>
+          <a:bodyPr/>
+          <a:lstStyle/>
+          <a:p>
+            <a:r>
+              <a:rPr lang="en-US" dirty="0"/>
+              <a:t>If we have many relevant X inputs, our prediction for Y can be quite accurate. </a:t>
+            </a:r>
+          </a:p>
+          <a:p>
+            <a:pPr lvl="1"/>
+            <a:r>
+              <a:rPr lang="en-US" dirty="0"/>
+              <a:t>Model can take in many relevant factors and weight each appropriately. </a:t>
+            </a:r>
+          </a:p>
+          <a:p>
+            <a:r>
+              <a:rPr lang="en-US" dirty="0"/>
+              <a:t>What if we want to tune our model - make it more accurate or efficient?</a:t>
+            </a:r>
+          </a:p>
+          <a:p>
+            <a:pPr lvl="1"/>
+            <a:r>
+              <a:rPr lang="en-US" dirty="0"/>
+              <a:t>(We’ll do this commonly later for accuracy.) </a:t>
+            </a:r>
+          </a:p>
+          <a:p>
+            <a:pPr lvl="1"/>
+            <a:r>
+              <a:rPr lang="en-US" dirty="0"/>
+              <a:t>We may have many X inputs, but perhaps not all are needed…</a:t>
             </a:r>
           </a:p>
         </p:txBody>
       </p:sp>
       <p:pic>
         <p:nvPicPr>
-          <p:cNvPr id="10242" name="Picture 2" descr="3 Ways To Detect Multicollinearity &amp; Reasons Why To Expect It | by M.  Hammad Hassan | Medium">
+          <p:cNvPr id="4" name="Picture 3" descr="The Ballentine view of multicollinearity Muhammad Ali, PhD Scholar... |  Download Scientific Diagram">
             <a:extLst>
               <a:ext uri="{FF2B5EF4-FFF2-40B4-BE49-F238E27FC236}">
-                <a16:creationId xmlns:a16="http://schemas.microsoft.com/office/drawing/2014/main" id="{5C097F58-9604-5F4C-187F-B53F3D156ED5}"/>
+                <a16:creationId xmlns:a16="http://schemas.microsoft.com/office/drawing/2014/main" id="{2F6C1E6A-6F33-F415-7271-09FE93A48140}"/>
               </a:ext>
             </a:extLst>
           </p:cNvPr>
           <p:cNvPicPr>
-            <a:picLocks noChangeAspect="1" noChangeArrowheads="1"/>
+            <a:picLocks noChangeAspect="1"/>
           </p:cNvPicPr>
           <p:nvPr/>
         </p:nvPicPr>
         <p:blipFill>
-          <a:blip r:embed="rId2">
-            <a:extLst>
-              <a:ext uri="{28A0092B-C50C-407E-A947-70E740481C1C}">
-                <a14:useLocalDpi xmlns:a14="http://schemas.microsoft.com/office/drawing/2010/main" val="0"/>
-              </a:ext>
-            </a:extLst>
-          </a:blip>
-          <a:srcRect/>
+          <a:blip r:embed="rId2"/>
           <a:stretch>
             <a:fillRect/>
           </a:stretch>
         </p:blipFill>
-        <p:spPr bwMode="auto">
-          <a:xfrm>
-            <a:off x="5316537" y="0"/>
-            <a:ext cx="6875463" cy="6858000"/>
+        <p:spPr>
+          <a:xfrm>
+            <a:off x="242896" y="1853754"/>
+            <a:ext cx="4526812" cy="4120560"/>
           </a:xfrm>
           <a:prstGeom prst="rect">
             <a:avLst/>
           </a:prstGeom>
-          <a:noFill/>
-          <a:extLst>
-            <a:ext uri="{909E8E84-426E-40DD-AFC4-6F175D3DCCD1}">
-              <a14:hiddenFill xmlns:a14="http://schemas.microsoft.com/office/drawing/2010/main">
-                <a:solidFill>
-                  <a:srgbClr val="FFFFFF"/>
-                </a:solidFill>
-              </a14:hiddenFill>
-            </a:ext>
-          </a:extLst>
         </p:spPr>
       </p:pic>
     </p:spTree>
     <p:extLst>
       <p:ext uri="{BB962C8B-B14F-4D97-AF65-F5344CB8AC3E}">
-        <p14:creationId xmlns:p14="http://schemas.microsoft.com/office/powerpoint/2010/main" val="2772730483"/>
+        <p14:creationId xmlns:p14="http://schemas.microsoft.com/office/powerpoint/2010/main" val="549387644"/>
       </p:ext>
     </p:extLst>
   </p:cSld>
@@ -5892,7 +5987,7 @@
           <p:cNvPr id="2" name="Title 1">
             <a:extLst>
               <a:ext uri="{FF2B5EF4-FFF2-40B4-BE49-F238E27FC236}">
-                <a16:creationId xmlns:a16="http://schemas.microsoft.com/office/drawing/2014/main" id="{81F9C6C2-A154-8825-FDBB-D88C4FC13FE2}"/>
+                <a16:creationId xmlns:a16="http://schemas.microsoft.com/office/drawing/2014/main" id="{A00BDED4-C114-4F97-9896-A75AAFF437FD}"/>
               </a:ext>
             </a:extLst>
           </p:cNvPr>
@@ -5910,7 +6005,7 @@
           <a:p>
             <a:r>
               <a:rPr lang="en-US" dirty="0"/>
-              <a:t>Measuring M.C. </a:t>
+              <a:t>Example – Medical Screening</a:t>
             </a:r>
           </a:p>
         </p:txBody>
@@ -5920,7 +6015,7 @@
           <p:cNvPr id="3" name="Content Placeholder 2">
             <a:extLst>
               <a:ext uri="{FF2B5EF4-FFF2-40B4-BE49-F238E27FC236}">
-                <a16:creationId xmlns:a16="http://schemas.microsoft.com/office/drawing/2014/main" id="{1A27369B-0495-86E7-C547-0997A874E96A}"/>
+                <a16:creationId xmlns:a16="http://schemas.microsoft.com/office/drawing/2014/main" id="{D2717539-74A2-9EE4-4F88-43AAE97788B3}"/>
               </a:ext>
             </a:extLst>
           </p:cNvPr>
@@ -5933,168 +6028,79 @@
         </p:nvSpPr>
         <p:spPr>
           <a:xfrm>
-            <a:off x="1451579" y="2015732"/>
-            <a:ext cx="9603275" cy="4037749"/>
-          </a:xfrm>
-        </p:spPr>
-        <p:txBody>
-          <a:bodyPr/>
-          <a:lstStyle/>
-          <a:p>
-            <a:r>
-              <a:rPr lang="en-US" dirty="0"/>
-              <a:t>We can also calculate a metric called the VIF – variable inflation factor. </a:t>
-            </a:r>
-          </a:p>
-          <a:p>
-            <a:r>
-              <a:rPr lang="en-US" dirty="0"/>
-              <a:t>VIF measures how much of this variable’s info is explained by others. </a:t>
-            </a:r>
-          </a:p>
-          <a:p>
-            <a:pPr lvl="1"/>
-            <a:r>
-              <a:rPr lang="en-US" dirty="0"/>
-              <a:t>We get a value for each input variable. </a:t>
-            </a:r>
-          </a:p>
-          <a:p>
-            <a:pPr lvl="1"/>
-            <a:r>
-              <a:rPr lang="en-US" dirty="0"/>
-              <a:t>1 means there is no multicollinearity. </a:t>
-            </a:r>
-          </a:p>
-          <a:p>
-            <a:pPr lvl="1"/>
-            <a:r>
-              <a:rPr lang="en-US" dirty="0"/>
-              <a:t>Over about 10 are ones that require real investigation. </a:t>
-            </a:r>
-          </a:p>
-          <a:p>
-            <a:r>
-              <a:rPr lang="en-US" dirty="0"/>
-              <a:t>We can remove redundant ones with the help of the p values. </a:t>
-            </a:r>
-          </a:p>
-          <a:p>
-            <a:pPr lvl="1"/>
-            <a:r>
-              <a:rPr lang="en-US" dirty="0" err="1"/>
-              <a:t>Statsmodels</a:t>
-            </a:r>
-            <a:r>
-              <a:rPr lang="en-US" dirty="0"/>
-              <a:t> will give us per variable p-values. </a:t>
-            </a:r>
-          </a:p>
-          <a:p>
-            <a:pPr lvl="1"/>
-            <a:r>
-              <a:rPr lang="en-US" dirty="0"/>
-              <a:t>Roughly a hypothesis test of “is this variable significant”. </a:t>
-            </a:r>
-          </a:p>
-          <a:p>
-            <a:pPr lvl="1"/>
-            <a:r>
-              <a:rPr lang="en-US" dirty="0"/>
-              <a:t>Be aware, there can be odd swings when </a:t>
-            </a:r>
-            <a:r>
-              <a:rPr lang="en-US" dirty="0" err="1"/>
-              <a:t>m.c.</a:t>
-            </a:r>
-            <a:r>
-              <a:rPr lang="en-US" dirty="0"/>
-              <a:t> is there – model can’t weight properly. </a:t>
-            </a:r>
-          </a:p>
-        </p:txBody>
-      </p:sp>
-      <p:pic>
-        <p:nvPicPr>
-          <p:cNvPr id="11266" name="Picture 2" descr="Variance Inflation Factor (VIF). We have always heard about… | by Saurabh  Gupta | Analytics Vidhya | Medium">
-            <a:extLst>
-              <a:ext uri="{FF2B5EF4-FFF2-40B4-BE49-F238E27FC236}">
-                <a16:creationId xmlns:a16="http://schemas.microsoft.com/office/drawing/2014/main" id="{5A08ABD7-9778-8F5C-69F3-0F2BE4220957}"/>
-              </a:ext>
-            </a:extLst>
-          </p:cNvPr>
-          <p:cNvPicPr>
-            <a:picLocks noChangeAspect="1" noChangeArrowheads="1"/>
-          </p:cNvPicPr>
-          <p:nvPr/>
-        </p:nvPicPr>
-        <p:blipFill>
-          <a:blip r:embed="rId2">
-            <a:extLst>
-              <a:ext uri="{28A0092B-C50C-407E-A947-70E740481C1C}">
-                <a14:useLocalDpi xmlns:a14="http://schemas.microsoft.com/office/drawing/2010/main" val="0"/>
-              </a:ext>
-            </a:extLst>
-          </a:blip>
-          <a:srcRect/>
-          <a:stretch>
-            <a:fillRect/>
-          </a:stretch>
-        </p:blipFill>
-        <p:spPr bwMode="auto">
-          <a:xfrm>
-            <a:off x="8591106" y="2961900"/>
-            <a:ext cx="3600893" cy="1870594"/>
-          </a:xfrm>
-          <a:prstGeom prst="rect">
-            <a:avLst/>
-          </a:prstGeom>
-          <a:noFill/>
-          <a:extLst>
-            <a:ext uri="{909E8E84-426E-40DD-AFC4-6F175D3DCCD1}">
-              <a14:hiddenFill xmlns:a14="http://schemas.microsoft.com/office/drawing/2010/main">
-                <a:solidFill>
-                  <a:srgbClr val="FFFFFF"/>
-                </a:solidFill>
-              </a14:hiddenFill>
-            </a:ext>
-          </a:extLst>
-        </p:spPr>
-      </p:pic>
-      <p:pic>
-        <p:nvPicPr>
-          <p:cNvPr id="4" name="Picture 3">
-            <a:extLst>
-              <a:ext uri="{FF2B5EF4-FFF2-40B4-BE49-F238E27FC236}">
-                <a16:creationId xmlns:a16="http://schemas.microsoft.com/office/drawing/2014/main" id="{C5897E0E-5BAD-7D17-1E79-0C36FB87B252}"/>
-              </a:ext>
-            </a:extLst>
-          </p:cNvPr>
-          <p:cNvPicPr>
-            <a:picLocks noChangeAspect="1"/>
-          </p:cNvPicPr>
-          <p:nvPr/>
-        </p:nvPicPr>
-        <p:blipFill>
-          <a:blip r:embed="rId3"/>
-          <a:stretch>
-            <a:fillRect/>
-          </a:stretch>
-        </p:blipFill>
-        <p:spPr>
-          <a:xfrm>
-            <a:off x="6379534" y="-8357"/>
-            <a:ext cx="5812465" cy="2033864"/>
-          </a:xfrm>
-          <a:prstGeom prst="rect">
-            <a:avLst/>
-          </a:prstGeom>
-        </p:spPr>
-      </p:pic>
+            <a:off x="1451579" y="1853753"/>
+            <a:ext cx="9603275" cy="4199727"/>
+          </a:xfrm>
+        </p:spPr>
+        <p:txBody>
+          <a:bodyPr/>
+          <a:lstStyle/>
+          <a:p>
+            <a:r>
+              <a:rPr lang="en-US" dirty="0"/>
+              <a:t>Suppose we have a model predicting bodyfat percentage for patients. </a:t>
+            </a:r>
+          </a:p>
+          <a:p>
+            <a:pPr lvl="1"/>
+            <a:r>
+              <a:rPr lang="en-US" dirty="0"/>
+              <a:t>Measuring bodyfat is slow and expensive for large numbers of people. </a:t>
+            </a:r>
+          </a:p>
+          <a:p>
+            <a:pPr lvl="1"/>
+            <a:r>
+              <a:rPr lang="en-US" dirty="0"/>
+              <a:t>It can be important for forecasting health outcomes. </a:t>
+            </a:r>
+          </a:p>
+          <a:p>
+            <a:r>
+              <a:rPr lang="en-US" dirty="0"/>
+              <a:t>Several other metrics can tell us about bodyfat percentage, partially. </a:t>
+            </a:r>
+          </a:p>
+          <a:p>
+            <a:pPr lvl="1"/>
+            <a:r>
+              <a:rPr lang="en-US" dirty="0"/>
+              <a:t>Weight, height, waist size, thigh size, calf size, hip size, chest size…</a:t>
+            </a:r>
+          </a:p>
+          <a:p>
+            <a:pPr lvl="1"/>
+            <a:r>
+              <a:rPr lang="en-US" dirty="0"/>
+              <a:t>These are all easier and faster to take and log. </a:t>
+            </a:r>
+          </a:p>
+          <a:p>
+            <a:r>
+              <a:rPr lang="en-US" dirty="0"/>
+              <a:t>Each of these metrics give us some information about bf%. </a:t>
+            </a:r>
+          </a:p>
+          <a:p>
+            <a:pPr lvl="1"/>
+            <a:r>
+              <a:rPr lang="en-US" dirty="0"/>
+              <a:t>There’s a lot of overlap in the information given. </a:t>
+            </a:r>
+          </a:p>
+          <a:p>
+            <a:pPr lvl="1"/>
+            <a:r>
+              <a:rPr lang="en-US" dirty="0"/>
+              <a:t>Waist size, hip size, thigh size aren’t the same, but they tend to tell us almost the same info.</a:t>
+            </a:r>
+          </a:p>
+        </p:txBody>
+      </p:sp>
     </p:spTree>
     <p:extLst>
       <p:ext uri="{BB962C8B-B14F-4D97-AF65-F5344CB8AC3E}">
-        <p14:creationId xmlns:p14="http://schemas.microsoft.com/office/powerpoint/2010/main" val="1177527087"/>
+        <p14:creationId xmlns:p14="http://schemas.microsoft.com/office/powerpoint/2010/main" val="1427320560"/>
       </p:ext>
     </p:extLst>
   </p:cSld>
@@ -6126,7 +6132,7 @@
           <p:cNvPr id="2" name="Title 1">
             <a:extLst>
               <a:ext uri="{FF2B5EF4-FFF2-40B4-BE49-F238E27FC236}">
-                <a16:creationId xmlns:a16="http://schemas.microsoft.com/office/drawing/2014/main" id="{DBAB7B93-741F-751B-B5F9-E27762CAD4C7}"/>
+                <a16:creationId xmlns:a16="http://schemas.microsoft.com/office/drawing/2014/main" id="{0D7AAB49-4FDA-9A61-7F67-D0C57818888B}"/>
               </a:ext>
             </a:extLst>
           </p:cNvPr>
@@ -6144,7 +6150,7 @@
           <a:p>
             <a:r>
               <a:rPr lang="en-US" dirty="0"/>
-              <a:t>Multicollinearity Process</a:t>
+              <a:t>Separate Information from Variable</a:t>
             </a:r>
           </a:p>
         </p:txBody>
@@ -6154,7 +6160,7 @@
           <p:cNvPr id="3" name="Content Placeholder 2">
             <a:extLst>
               <a:ext uri="{FF2B5EF4-FFF2-40B4-BE49-F238E27FC236}">
-                <a16:creationId xmlns:a16="http://schemas.microsoft.com/office/drawing/2014/main" id="{D5F24B8C-3C93-10B9-E249-DA76197B69D8}"/>
+                <a16:creationId xmlns:a16="http://schemas.microsoft.com/office/drawing/2014/main" id="{4EC843E9-B92B-CD06-5580-1A8B9EB76296}"/>
               </a:ext>
             </a:extLst>
           </p:cNvPr>
@@ -6167,82 +6173,88 @@
         </p:nvSpPr>
         <p:spPr>
           <a:xfrm>
-            <a:off x="1451579" y="2015732"/>
-            <a:ext cx="9603275" cy="4037749"/>
-          </a:xfrm>
-        </p:spPr>
-        <p:txBody>
-          <a:bodyPr/>
-          <a:lstStyle/>
-          <a:p>
-            <a:r>
-              <a:rPr lang="en-US" dirty="0"/>
-              <a:t>We can do an iterative process to deal with </a:t>
+            <a:off x="1451579" y="1853753"/>
+            <a:ext cx="9603275" cy="4291865"/>
+          </a:xfrm>
+        </p:spPr>
+        <p:txBody>
+          <a:bodyPr/>
+          <a:lstStyle/>
+          <a:p>
+            <a:r>
+              <a:rPr lang="en-US" dirty="0"/>
+              <a:t>This is easier if we can think of “information” that a variable holds as separate from itself.</a:t>
+            </a:r>
+          </a:p>
+          <a:p>
+            <a:pPr lvl="1"/>
+            <a:r>
+              <a:rPr lang="en-US" dirty="0"/>
+              <a:t>E.g. knee size, ankle size, thigh size, calf size, </a:t>
             </a:r>
             <a:r>
               <a:rPr lang="en-US" dirty="0" err="1"/>
-              <a:t>m.c.</a:t>
-            </a:r>
-            <a:r>
-              <a:rPr lang="en-US" dirty="0"/>
-              <a:t>:</a:t>
-            </a:r>
-          </a:p>
-          <a:p>
-            <a:pPr lvl="1"/>
-            <a:r>
-              <a:rPr lang="en-US" dirty="0"/>
-              <a:t>Run the VIF values. </a:t>
-            </a:r>
-          </a:p>
-          <a:p>
-            <a:pPr lvl="1"/>
-            <a:r>
-              <a:rPr lang="en-US" dirty="0"/>
-              <a:t>Run a model via </a:t>
-            </a:r>
-            <a:r>
-              <a:rPr lang="en-US" dirty="0" err="1"/>
-              <a:t>statsmodels</a:t>
-            </a:r>
-            <a:r>
-              <a:rPr lang="en-US" dirty="0"/>
-              <a:t>. </a:t>
-            </a:r>
-          </a:p>
-          <a:p>
-            <a:pPr lvl="1"/>
-            <a:r>
-              <a:rPr lang="en-US" dirty="0"/>
-              <a:t>Remove some variables based on VIF, p-value, and domain knowledge (i.e. which measures actually overlap in real life.)</a:t>
-            </a:r>
-          </a:p>
-          <a:p>
-            <a:pPr lvl="1"/>
-            <a:r>
-              <a:rPr lang="en-US" dirty="0"/>
-              <a:t>Repeat as needed. </a:t>
-            </a:r>
-          </a:p>
-          <a:p>
-            <a:r>
-              <a:rPr lang="en-US" dirty="0"/>
-              <a:t>Tuning a model is largely a judgment call, don’t obsess over where to draw line now. </a:t>
-            </a:r>
-          </a:p>
-          <a:p>
-            <a:pPr lvl="1"/>
-            <a:r>
-              <a:rPr lang="en-US" dirty="0"/>
-              <a:t>No high p-values is a good rule of thumb for now. </a:t>
-            </a:r>
+              <a:t>etc</a:t>
+            </a:r>
+            <a:r>
+              <a:rPr lang="en-US" dirty="0"/>
+              <a:t>… all give info on “size of leg”. </a:t>
+            </a:r>
+          </a:p>
+          <a:p>
+            <a:r>
+              <a:rPr lang="en-US" dirty="0"/>
+              <a:t>The “piece of info” isn’t necessarily a directly observable thing. </a:t>
+            </a:r>
+          </a:p>
+          <a:p>
+            <a:pPr lvl="1"/>
+            <a:r>
+              <a:rPr lang="en-US" dirty="0"/>
+              <a:t>The info is what the model actually needs to make accurate predictions. </a:t>
+            </a:r>
+          </a:p>
+          <a:p>
+            <a:r>
+              <a:rPr lang="en-US" dirty="0"/>
+              <a:t>Ideally, we’d have one variable for each “piece of info”. </a:t>
+            </a:r>
+          </a:p>
+          <a:p>
+            <a:r>
+              <a:rPr lang="en-US" dirty="0"/>
+              <a:t>If we want to tune a model, we’d adjust the parameters (weight of inputs). </a:t>
+            </a:r>
+          </a:p>
+          <a:p>
+            <a:pPr lvl="1"/>
+            <a:r>
+              <a:rPr lang="en-US" dirty="0"/>
+              <a:t>Suppose ”leg size” is something that determines weight, and we have the above features. </a:t>
+            </a:r>
+          </a:p>
+          <a:p>
+            <a:pPr lvl="1"/>
+            <a:r>
+              <a:rPr lang="en-US" dirty="0"/>
+              <a:t>How would a model know where the “leg size” info is coming from? </a:t>
+            </a:r>
+          </a:p>
+          <a:p>
+            <a:r>
+              <a:rPr lang="en-US" dirty="0"/>
+              <a:t>*Note: The tuning process will be more clear in a couple of weeks. </a:t>
+            </a:r>
+          </a:p>
+          <a:p>
+            <a:endParaRPr lang="en-US" dirty="0"/>
           </a:p>
         </p:txBody>
       </p:sp>
     </p:spTree>
     <p:extLst>
       <p:ext uri="{BB962C8B-B14F-4D97-AF65-F5344CB8AC3E}">
-        <p14:creationId xmlns:p14="http://schemas.microsoft.com/office/powerpoint/2010/main" val="3320482818"/>
+        <p14:creationId xmlns:p14="http://schemas.microsoft.com/office/powerpoint/2010/main" val="4063668131"/>
       </p:ext>
     </p:extLst>
   </p:cSld>
@@ -6274,7 +6286,7 @@
           <p:cNvPr id="2" name="Title 1">
             <a:extLst>
               <a:ext uri="{FF2B5EF4-FFF2-40B4-BE49-F238E27FC236}">
-                <a16:creationId xmlns:a16="http://schemas.microsoft.com/office/drawing/2014/main" id="{F00579DB-FA27-0B61-6BD7-E48DD2765F59}"/>
+                <a16:creationId xmlns:a16="http://schemas.microsoft.com/office/drawing/2014/main" id="{719CCE9F-899C-DC97-92C7-EBA7069C9889}"/>
               </a:ext>
             </a:extLst>
           </p:cNvPr>
@@ -6292,7 +6304,7 @@
           <a:p>
             <a:r>
               <a:rPr lang="en-US" dirty="0"/>
-              <a:t>R2 and Multiple Regression</a:t>
+              <a:t>So, What’s the Problem? </a:t>
             </a:r>
           </a:p>
         </p:txBody>
@@ -6302,7 +6314,7 @@
           <p:cNvPr id="3" name="Content Placeholder 2">
             <a:extLst>
               <a:ext uri="{FF2B5EF4-FFF2-40B4-BE49-F238E27FC236}">
-                <a16:creationId xmlns:a16="http://schemas.microsoft.com/office/drawing/2014/main" id="{7D80E5D9-4ECB-3A34-3356-7F1C8EA976A8}"/>
+                <a16:creationId xmlns:a16="http://schemas.microsoft.com/office/drawing/2014/main" id="{04BEC346-AE6F-4717-1ED0-F90F8661361B}"/>
               </a:ext>
             </a:extLst>
           </p:cNvPr>
@@ -6325,49 +6337,109 @@
           <a:p>
             <a:r>
               <a:rPr lang="en-US" dirty="0"/>
-              <a:t>We can measure the ‘completeness’ of our model with R2. </a:t>
-            </a:r>
-          </a:p>
-          <a:p>
-            <a:pPr lvl="1"/>
-            <a:r>
-              <a:rPr lang="en-US" dirty="0"/>
-              <a:t>How much of the variance of Y do we capture, and how much do we miss? </a:t>
-            </a:r>
-          </a:p>
-          <a:p>
-            <a:pPr lvl="1"/>
-            <a:r>
-              <a:rPr lang="en-US" dirty="0"/>
-              <a:t>Default score is easy to use and compare to others. </a:t>
-            </a:r>
-          </a:p>
-          <a:p>
-            <a:r>
-              <a:rPr lang="en-US" dirty="0"/>
-              <a:t>We can build a more complete model by adding inputs to X. </a:t>
-            </a:r>
-          </a:p>
-          <a:p>
-            <a:pPr lvl="1"/>
-            <a:r>
-              <a:rPr lang="en-US" dirty="0"/>
-              <a:t>Most things are determined by many factors. </a:t>
-            </a:r>
-          </a:p>
-          <a:p>
-            <a:pPr lvl="1"/>
-            <a:r>
-              <a:rPr lang="en-US" dirty="0"/>
-              <a:t>Little changes, other than it becomes harder to visualize and do by hand. </a:t>
-            </a:r>
-          </a:p>
-        </p:txBody>
-      </p:sp>
+              <a:t>If we have X values that are largely the same we call that multicollinearity. </a:t>
+            </a:r>
+          </a:p>
+          <a:p>
+            <a:pPr lvl="1"/>
+            <a:r>
+              <a:rPr lang="en-US" dirty="0"/>
+              <a:t>I.e. several things are highly correlated with each other. </a:t>
+            </a:r>
+          </a:p>
+          <a:p>
+            <a:r>
+              <a:rPr lang="en-US" dirty="0"/>
+              <a:t>This isn’t fatal, but can give us some issues. </a:t>
+            </a:r>
+          </a:p>
+          <a:p>
+            <a:pPr lvl="1"/>
+            <a:r>
+              <a:rPr lang="en-US" dirty="0"/>
+              <a:t>If multiple inputs have the same info, the model can’t figure out how to weight each. </a:t>
+            </a:r>
+          </a:p>
+          <a:p>
+            <a:pPr lvl="1"/>
+            <a:r>
+              <a:rPr lang="en-US" dirty="0"/>
+              <a:t>The assumption is inputs are orthogonal, they have nothing to do with each other. </a:t>
+            </a:r>
+          </a:p>
+          <a:p>
+            <a:pPr lvl="1"/>
+            <a:r>
+              <a:rPr lang="en-US" dirty="0"/>
+              <a:t>A model can’t be sure how to change coefficients as several are almost the same. </a:t>
+            </a:r>
+          </a:p>
+          <a:p>
+            <a:pPr lvl="1"/>
+            <a:r>
+              <a:rPr lang="en-US" dirty="0"/>
+              <a:t>The learning can be hard (not with LLS) and can swing with small changes. </a:t>
+            </a:r>
+          </a:p>
+          <a:p>
+            <a:r>
+              <a:rPr lang="en-US" dirty="0"/>
+              <a:t>Ideally, we want each thing measured exactly once. </a:t>
+            </a:r>
+          </a:p>
+        </p:txBody>
+      </p:sp>
+      <p:pic>
+        <p:nvPicPr>
+          <p:cNvPr id="4" name="Picture 2" descr="The regression model in a 3D space. A multi-variable regression model... |  Download Scientific Diagram">
+            <a:extLst>
+              <a:ext uri="{FF2B5EF4-FFF2-40B4-BE49-F238E27FC236}">
+                <a16:creationId xmlns:a16="http://schemas.microsoft.com/office/drawing/2014/main" id="{F81911F5-536D-B1B7-23C0-DAE0A5792CBF}"/>
+              </a:ext>
+            </a:extLst>
+          </p:cNvPr>
+          <p:cNvPicPr>
+            <a:picLocks noChangeAspect="1" noChangeArrowheads="1"/>
+          </p:cNvPicPr>
+          <p:nvPr/>
+        </p:nvPicPr>
+        <p:blipFill>
+          <a:blip r:embed="rId2">
+            <a:extLst>
+              <a:ext uri="{28A0092B-C50C-407E-A947-70E740481C1C}">
+                <a14:useLocalDpi xmlns:a14="http://schemas.microsoft.com/office/drawing/2010/main" val="0"/>
+              </a:ext>
+            </a:extLst>
+          </a:blip>
+          <a:srcRect/>
+          <a:stretch>
+            <a:fillRect/>
+          </a:stretch>
+        </p:blipFill>
+        <p:spPr bwMode="auto">
+          <a:xfrm>
+            <a:off x="8155459" y="1"/>
+            <a:ext cx="4003590" cy="2034766"/>
+          </a:xfrm>
+          <a:prstGeom prst="rect">
+            <a:avLst/>
+          </a:prstGeom>
+          <a:noFill/>
+          <a:extLst>
+            <a:ext uri="{909E8E84-426E-40DD-AFC4-6F175D3DCCD1}">
+              <a14:hiddenFill xmlns:a14="http://schemas.microsoft.com/office/drawing/2010/main">
+                <a:solidFill>
+                  <a:srgbClr val="FFFFFF"/>
+                </a:solidFill>
+              </a14:hiddenFill>
+            </a:ext>
+          </a:extLst>
+        </p:spPr>
+      </p:pic>
     </p:spTree>
     <p:extLst>
       <p:ext uri="{BB962C8B-B14F-4D97-AF65-F5344CB8AC3E}">
-        <p14:creationId xmlns:p14="http://schemas.microsoft.com/office/powerpoint/2010/main" val="2254303245"/>
+        <p14:creationId xmlns:p14="http://schemas.microsoft.com/office/powerpoint/2010/main" val="808301570"/>
       </p:ext>
     </p:extLst>
   </p:cSld>
@@ -6399,7 +6471,7 @@
           <p:cNvPr id="2" name="Title 1">
             <a:extLst>
               <a:ext uri="{FF2B5EF4-FFF2-40B4-BE49-F238E27FC236}">
-                <a16:creationId xmlns:a16="http://schemas.microsoft.com/office/drawing/2014/main" id="{87976A0E-3B86-BD5A-B164-A9353F4D9A40}"/>
+                <a16:creationId xmlns:a16="http://schemas.microsoft.com/office/drawing/2014/main" id="{1C3EE54B-EBCF-BAFF-A500-7895B3D30FE2}"/>
               </a:ext>
             </a:extLst>
           </p:cNvPr>
@@ -6417,7 +6489,7 @@
           <a:p>
             <a:r>
               <a:rPr lang="en-US" dirty="0"/>
-              <a:t>Applying the Stats Stuff</a:t>
+              <a:t>More Business-y Example</a:t>
             </a:r>
           </a:p>
         </p:txBody>
@@ -6427,7 +6499,7 @@
           <p:cNvPr id="3" name="Content Placeholder 2">
             <a:extLst>
               <a:ext uri="{FF2B5EF4-FFF2-40B4-BE49-F238E27FC236}">
-                <a16:creationId xmlns:a16="http://schemas.microsoft.com/office/drawing/2014/main" id="{C88534AB-87B6-8BCB-5980-B03E4DBA1ED0}"/>
+                <a16:creationId xmlns:a16="http://schemas.microsoft.com/office/drawing/2014/main" id="{D06565AD-BC48-AC50-D088-40E45C1A3C01}"/>
               </a:ext>
             </a:extLst>
           </p:cNvPr>
@@ -6440,57 +6512,30 @@
         </p:nvSpPr>
         <p:spPr>
           <a:xfrm>
-            <a:off x="1137147" y="1853754"/>
-            <a:ext cx="10229058" cy="4199727"/>
-          </a:xfrm>
-        </p:spPr>
-        <p:txBody>
-          <a:bodyPr/>
-          <a:lstStyle/>
-          <a:p>
-            <a:r>
-              <a:rPr lang="en-US" dirty="0"/>
-              <a:t>The first way that we’ll directly use the stats in ML is EDA – exploratory data analysis. </a:t>
-            </a:r>
-          </a:p>
-          <a:p>
-            <a:r>
-              <a:rPr lang="en-US" dirty="0"/>
-              <a:t>This is both art and science, there isn’t a specific set of steps. </a:t>
-            </a:r>
-          </a:p>
-          <a:p>
-            <a:r>
-              <a:rPr lang="en-US" dirty="0"/>
-              <a:t>We do EDA up front to basically look for stuff in our data that may matter. </a:t>
-            </a:r>
-          </a:p>
-          <a:p>
-            <a:pPr lvl="1"/>
-            <a:r>
-              <a:rPr lang="en-US" dirty="0"/>
-              <a:t>Missing values. </a:t>
-            </a:r>
-          </a:p>
-          <a:p>
-            <a:pPr lvl="1"/>
-            <a:r>
-              <a:rPr lang="en-US" dirty="0"/>
-              <a:t>Outliers. </a:t>
-            </a:r>
-          </a:p>
-          <a:p>
-            <a:pPr lvl="1"/>
-            <a:r>
-              <a:rPr lang="en-US" dirty="0"/>
-              <a:t>Errors. </a:t>
-            </a:r>
-          </a:p>
-          <a:p>
-            <a:pPr lvl="1"/>
-            <a:r>
-              <a:rPr lang="en-US" dirty="0"/>
-              <a:t>Patterns in data – numeric that is categorical, odd distributions, correlation, </a:t>
+            <a:off x="1451579" y="1853755"/>
+            <a:ext cx="9603275" cy="4291864"/>
+          </a:xfrm>
+        </p:spPr>
+        <p:txBody>
+          <a:bodyPr/>
+          <a:lstStyle/>
+          <a:p>
+            <a:r>
+              <a:rPr lang="en-US" dirty="0"/>
+              <a:t>We have a model that predicts the success of our convenience stores. </a:t>
+            </a:r>
+          </a:p>
+          <a:p>
+            <a:r>
+              <a:rPr lang="en-US" dirty="0"/>
+              <a:t>Several things matter for a store’s success:</a:t>
+            </a:r>
+          </a:p>
+          <a:p>
+            <a:pPr lvl="1"/>
+            <a:r>
+              <a:rPr lang="en-US" dirty="0"/>
+              <a:t>Location, pricing, customer satisfaction, product mix, </a:t>
             </a:r>
             <a:r>
               <a:rPr lang="en-US" dirty="0" err="1"/>
@@ -6502,16 +6547,58 @@
             </a:r>
           </a:p>
           <a:p>
-            <a:pPr lvl="1"/>
-            <a:r>
-              <a:rPr lang="en-US" dirty="0"/>
-              <a:t>Things that don’t vary. </a:t>
-            </a:r>
-          </a:p>
-          <a:p>
-            <a:r>
-              <a:rPr lang="en-US" dirty="0"/>
-              <a:t>Exactly what we are looking for varies, generally anything that may impact model accuracy. </a:t>
+            <a:r>
+              <a:rPr lang="en-US" dirty="0"/>
+              <a:t>Each of these can be measured, but not directly, e.g. location:</a:t>
+            </a:r>
+          </a:p>
+          <a:p>
+            <a:pPr lvl="1"/>
+            <a:r>
+              <a:rPr lang="en-US" dirty="0"/>
+              <a:t>There’s no direct measurement for “location goodness”, but it clearly matters. </a:t>
+            </a:r>
+          </a:p>
+          <a:p>
+            <a:pPr lvl="1"/>
+            <a:r>
+              <a:rPr lang="en-US" dirty="0"/>
+              <a:t>What features measure this? Distance to transit/highway/apartment/intersection. </a:t>
+            </a:r>
+          </a:p>
+          <a:p>
+            <a:pPr lvl="1"/>
+            <a:r>
+              <a:rPr lang="en-US" dirty="0"/>
+              <a:t>Foot traffic, car traffic, “ease of access”, population, visibility of store, sign placement, </a:t>
+            </a:r>
+            <a:r>
+              <a:rPr lang="en-US" dirty="0" err="1"/>
+              <a:t>etc</a:t>
+            </a:r>
+            <a:r>
+              <a:rPr lang="en-US" dirty="0"/>
+              <a:t>…</a:t>
+            </a:r>
+          </a:p>
+          <a:p>
+            <a:r>
+              <a:rPr lang="en-US" dirty="0"/>
+              <a:t>Each feature overlaps in what it contributes – e.g. foot traffic, transit, population density.</a:t>
+            </a:r>
+          </a:p>
+          <a:p>
+            <a:pPr lvl="1"/>
+            <a:r>
+              <a:rPr lang="en-US" dirty="0"/>
+              <a:t>If all three tell us something about “people walking around”, how do we know what matters?</a:t>
+            </a:r>
+          </a:p>
+          <a:p>
+            <a:pPr lvl="1"/>
+            <a:r>
+              <a:rPr lang="en-US" dirty="0"/>
+              <a:t>If people walking around is important, what do we weight more? </a:t>
             </a:r>
           </a:p>
         </p:txBody>
@@ -6519,7 +6606,7 @@
     </p:spTree>
     <p:extLst>
       <p:ext uri="{BB962C8B-B14F-4D97-AF65-F5344CB8AC3E}">
-        <p14:creationId xmlns:p14="http://schemas.microsoft.com/office/powerpoint/2010/main" val="681943827"/>
+        <p14:creationId xmlns:p14="http://schemas.microsoft.com/office/powerpoint/2010/main" val="990605241"/>
       </p:ext>
     </p:extLst>
   </p:cSld>
@@ -6551,7 +6638,7 @@
           <p:cNvPr id="2" name="Title 1">
             <a:extLst>
               <a:ext uri="{FF2B5EF4-FFF2-40B4-BE49-F238E27FC236}">
-                <a16:creationId xmlns:a16="http://schemas.microsoft.com/office/drawing/2014/main" id="{4A4C0882-D407-8B64-8F0A-A2FCB1DD5132}"/>
+                <a16:creationId xmlns:a16="http://schemas.microsoft.com/office/drawing/2014/main" id="{52E71A9E-7C47-6840-50F2-A56D39E218E9}"/>
               </a:ext>
             </a:extLst>
           </p:cNvPr>
@@ -6569,7 +6656,7 @@
           <a:p>
             <a:r>
               <a:rPr lang="en-US" dirty="0"/>
-              <a:t>EDA Process</a:t>
+              <a:t>Managing M.C.</a:t>
             </a:r>
           </a:p>
         </p:txBody>
@@ -6579,7 +6666,7 @@
           <p:cNvPr id="3" name="Content Placeholder 2">
             <a:extLst>
               <a:ext uri="{FF2B5EF4-FFF2-40B4-BE49-F238E27FC236}">
-                <a16:creationId xmlns:a16="http://schemas.microsoft.com/office/drawing/2014/main" id="{780F816F-240E-8E75-9E3E-BE8153876DC1}"/>
+                <a16:creationId xmlns:a16="http://schemas.microsoft.com/office/drawing/2014/main" id="{C3B4270B-997D-BDDB-0CA6-DA8827327E59}"/>
               </a:ext>
             </a:extLst>
           </p:cNvPr>
@@ -6592,61 +6679,88 @@
         </p:nvSpPr>
         <p:spPr>
           <a:xfrm>
-            <a:off x="1451579" y="1935126"/>
-            <a:ext cx="9603275" cy="4118355"/>
-          </a:xfrm>
-        </p:spPr>
-        <p:txBody>
-          <a:bodyPr/>
-          <a:lstStyle/>
-          <a:p>
-            <a:r>
-              <a:rPr lang="en-US" dirty="0"/>
-              <a:t>Doing EDA is something that will feel more natural with time. </a:t>
-            </a:r>
-          </a:p>
-          <a:p>
-            <a:r>
-              <a:rPr lang="en-US" dirty="0"/>
-              <a:t>We generally want to look graphically and arithmetically. </a:t>
-            </a:r>
-          </a:p>
-          <a:p>
-            <a:pPr lvl="1"/>
-            <a:r>
-              <a:rPr lang="en-US" dirty="0"/>
-              <a:t>Info, describe, and head/sample can give us a look at the stats. </a:t>
-            </a:r>
-          </a:p>
-          <a:p>
-            <a:pPr lvl="1"/>
+            <a:off x="1451579" y="1945758"/>
+            <a:ext cx="10254868" cy="4107723"/>
+          </a:xfrm>
+        </p:spPr>
+        <p:txBody>
+          <a:bodyPr>
+            <a:normAutofit/>
+          </a:bodyPr>
+          <a:lstStyle/>
+          <a:p>
+            <a:r>
+              <a:rPr lang="en-US" dirty="0"/>
+              <a:t>Having some </a:t>
+            </a:r>
             <a:r>
               <a:rPr lang="en-US" dirty="0" err="1"/>
-              <a:t>Pairplot</a:t>
-            </a:r>
-            <a:r>
-              <a:rPr lang="en-US" dirty="0"/>
-              <a:t>, box plot, count plot can give us a visual look. </a:t>
-            </a:r>
-          </a:p>
-          <a:p>
-            <a:r>
-              <a:rPr lang="en-US" dirty="0"/>
-              <a:t>Usually need to do some iteration. </a:t>
-            </a:r>
-          </a:p>
-          <a:p>
-            <a:pPr lvl="1"/>
-            <a:r>
-              <a:rPr lang="en-US" dirty="0"/>
-              <a:t>Clean something you notice, e.g. outliers. </a:t>
-            </a:r>
-          </a:p>
-          <a:p>
-            <a:pPr lvl="1"/>
-            <a:r>
-              <a:rPr lang="en-US" dirty="0"/>
-              <a:t>Check again to see how the data looks. </a:t>
+              <a:t>m.c.</a:t>
+            </a:r>
+            <a:r>
+              <a:rPr lang="en-US" dirty="0"/>
+              <a:t> won’t break things on its own. </a:t>
+            </a:r>
+          </a:p>
+          <a:p>
+            <a:r>
+              <a:rPr lang="en-US" dirty="0"/>
+              <a:t>In high-dimensional (many X) models, training may be slow or not converge. </a:t>
+            </a:r>
+          </a:p>
+          <a:p>
+            <a:r>
+              <a:rPr lang="en-US" dirty="0"/>
+              <a:t>In cases like our linear regression, we can’t know which inputs matter. </a:t>
+            </a:r>
+          </a:p>
+          <a:p>
+            <a:pPr lvl="1"/>
+            <a:r>
+              <a:rPr lang="en-US" dirty="0"/>
+              <a:t>Our first tuning step can be to remove, so model can fit accurately. </a:t>
+            </a:r>
+          </a:p>
+          <a:p>
+            <a:pPr lvl="1"/>
+            <a:r>
+              <a:rPr lang="en-US" dirty="0"/>
+              <a:t>The model is trying to weight importance, if the same thing comes from many sources, that’s hard. </a:t>
+            </a:r>
+          </a:p>
+          <a:p>
+            <a:r>
+              <a:rPr lang="en-US" dirty="0"/>
+              <a:t>Generally, the simpler the model, the better. </a:t>
+            </a:r>
+          </a:p>
+          <a:p>
+            <a:pPr lvl="1"/>
+            <a:r>
+              <a:rPr lang="en-US" dirty="0"/>
+              <a:t>Similar performance with fewer inputs is cheaper. </a:t>
+            </a:r>
+          </a:p>
+          <a:p>
+            <a:pPr lvl="1"/>
+            <a:r>
+              <a:rPr lang="en-US" dirty="0"/>
+              <a:t>In the bf% example, we literally need less work and tools. </a:t>
+            </a:r>
+          </a:p>
+          <a:p>
+            <a:pPr lvl="1"/>
+            <a:r>
+              <a:rPr lang="en-US" dirty="0"/>
+              <a:t>Other whys and </a:t>
+            </a:r>
+            <a:r>
+              <a:rPr lang="en-US" dirty="0" err="1"/>
+              <a:t>hows</a:t>
+            </a:r>
+            <a:r>
+              <a:rPr lang="en-US" dirty="0"/>
+              <a:t> to come later. </a:t>
             </a:r>
           </a:p>
         </p:txBody>
@@ -6654,7 +6768,7 @@
     </p:spTree>
     <p:extLst>
       <p:ext uri="{BB962C8B-B14F-4D97-AF65-F5344CB8AC3E}">
-        <p14:creationId xmlns:p14="http://schemas.microsoft.com/office/powerpoint/2010/main" val="3257656829"/>
+        <p14:creationId xmlns:p14="http://schemas.microsoft.com/office/powerpoint/2010/main" val="2220712716"/>
       </p:ext>
     </p:extLst>
   </p:cSld>
@@ -6686,7 +6800,7 @@
           <p:cNvPr id="2" name="Title 1">
             <a:extLst>
               <a:ext uri="{FF2B5EF4-FFF2-40B4-BE49-F238E27FC236}">
-                <a16:creationId xmlns:a16="http://schemas.microsoft.com/office/drawing/2014/main" id="{D5817EF8-E39C-2C99-C847-C9C851B0D810}"/>
+                <a16:creationId xmlns:a16="http://schemas.microsoft.com/office/drawing/2014/main" id="{D54CD3E1-85EC-DFC3-D236-AE8FBAA7F9F6}"/>
               </a:ext>
             </a:extLst>
           </p:cNvPr>
@@ -6704,8 +6818,13 @@
           <a:p>
             <a:r>
               <a:rPr lang="en-US" dirty="0"/>
-              <a:t>Example – Nothing of interest</a:t>
-            </a:r>
+              <a:t>Detecting </a:t>
+            </a:r>
+            <a:r>
+              <a:rPr lang="en-US" dirty="0" err="1"/>
+              <a:t>M.c.</a:t>
+            </a:r>
+            <a:endParaRPr lang="en-US" dirty="0"/>
           </a:p>
         </p:txBody>
       </p:sp>
@@ -6714,7 +6833,7 @@
           <p:cNvPr id="3" name="Content Placeholder 2">
             <a:extLst>
               <a:ext uri="{FF2B5EF4-FFF2-40B4-BE49-F238E27FC236}">
-                <a16:creationId xmlns:a16="http://schemas.microsoft.com/office/drawing/2014/main" id="{0007CA20-2F49-6A82-8DAB-B37C4A40A4D8}"/>
+                <a16:creationId xmlns:a16="http://schemas.microsoft.com/office/drawing/2014/main" id="{2B8D077B-E87A-1B58-2E36-FE87921AC61D}"/>
               </a:ext>
             </a:extLst>
           </p:cNvPr>
@@ -6727,54 +6846,41 @@
         </p:nvSpPr>
         <p:spPr>
           <a:xfrm>
-            <a:off x="423001" y="2015732"/>
-            <a:ext cx="5830216" cy="3450613"/>
-          </a:xfrm>
-        </p:spPr>
-        <p:txBody>
-          <a:bodyPr/>
-          <a:lstStyle/>
-          <a:p>
-            <a:r>
-              <a:rPr lang="en-US" dirty="0"/>
-              <a:t>This is some data with nothing obvious to address.</a:t>
-            </a:r>
-          </a:p>
-          <a:p>
-            <a:pPr lvl="1"/>
-            <a:r>
-              <a:rPr lang="en-US" dirty="0"/>
-              <a:t>No odd patterns. </a:t>
-            </a:r>
-          </a:p>
-          <a:p>
-            <a:pPr lvl="1"/>
-            <a:r>
-              <a:rPr lang="en-US" dirty="0"/>
-              <a:t>No clear outliers.  </a:t>
-            </a:r>
-          </a:p>
-          <a:p>
-            <a:pPr lvl="1"/>
-            <a:r>
-              <a:rPr lang="en-US" dirty="0"/>
-              <a:t>Variables seem to have a ‘normal’ amount of variance. </a:t>
-            </a:r>
-          </a:p>
-          <a:p>
-            <a:r>
-              <a:rPr lang="en-US" dirty="0"/>
-              <a:t>This data is ready to be used by a model. </a:t>
+            <a:off x="574158" y="2015732"/>
+            <a:ext cx="4742380" cy="3450613"/>
+          </a:xfrm>
+        </p:spPr>
+        <p:txBody>
+          <a:bodyPr/>
+          <a:lstStyle/>
+          <a:p>
+            <a:r>
+              <a:rPr lang="en-US" dirty="0"/>
+              <a:t>We can usually spot it in a </a:t>
+            </a:r>
+            <a:r>
+              <a:rPr lang="en-US" dirty="0" err="1"/>
+              <a:t>pairplot</a:t>
+            </a:r>
+            <a:r>
+              <a:rPr lang="en-US" dirty="0"/>
+              <a:t>. </a:t>
+            </a:r>
+          </a:p>
+          <a:p>
+            <a:r>
+              <a:rPr lang="en-US" dirty="0"/>
+              <a:t>Pairs of variables that appear highly correlated. </a:t>
             </a:r>
           </a:p>
         </p:txBody>
       </p:sp>
       <p:pic>
         <p:nvPicPr>
-          <p:cNvPr id="2050" name="Picture 2" descr="Dramatically Improve Your Exploratory Data Analysis (EDA) | Towards Data  Science">
+          <p:cNvPr id="10242" name="Picture 2" descr="3 Ways To Detect Multicollinearity &amp; Reasons Why To Expect It | by M.  Hammad Hassan | Medium">
             <a:extLst>
               <a:ext uri="{FF2B5EF4-FFF2-40B4-BE49-F238E27FC236}">
-                <a16:creationId xmlns:a16="http://schemas.microsoft.com/office/drawing/2014/main" id="{62C6B302-3011-29D1-D3F3-EDB4D3F80499}"/>
+                <a16:creationId xmlns:a16="http://schemas.microsoft.com/office/drawing/2014/main" id="{5C097F58-9604-5F4C-187F-B53F3D156ED5}"/>
               </a:ext>
             </a:extLst>
           </p:cNvPr>
@@ -6798,8 +6904,8 @@
         </p:blipFill>
         <p:spPr bwMode="auto">
           <a:xfrm>
-            <a:off x="6253216" y="1532238"/>
-            <a:ext cx="5830217" cy="4707924"/>
+            <a:off x="5316537" y="0"/>
+            <a:ext cx="6875463" cy="6858000"/>
           </a:xfrm>
           <a:prstGeom prst="rect">
             <a:avLst/>
@@ -6819,7 +6925,7 @@
     </p:spTree>
     <p:extLst>
       <p:ext uri="{BB962C8B-B14F-4D97-AF65-F5344CB8AC3E}">
-        <p14:creationId xmlns:p14="http://schemas.microsoft.com/office/powerpoint/2010/main" val="4244201324"/>
+        <p14:creationId xmlns:p14="http://schemas.microsoft.com/office/powerpoint/2010/main" val="2772730483"/>
       </p:ext>
     </p:extLst>
   </p:cSld>
@@ -6851,7 +6957,7 @@
           <p:cNvPr id="2" name="Title 1">
             <a:extLst>
               <a:ext uri="{FF2B5EF4-FFF2-40B4-BE49-F238E27FC236}">
-                <a16:creationId xmlns:a16="http://schemas.microsoft.com/office/drawing/2014/main" id="{F646F2B0-E9E8-6ECD-010A-951DCE13AF15}"/>
+                <a16:creationId xmlns:a16="http://schemas.microsoft.com/office/drawing/2014/main" id="{81F9C6C2-A154-8825-FDBB-D88C4FC13FE2}"/>
               </a:ext>
             </a:extLst>
           </p:cNvPr>
@@ -6869,7 +6975,7 @@
           <a:p>
             <a:r>
               <a:rPr lang="en-US" dirty="0"/>
-              <a:t>Something Weird!</a:t>
+              <a:t>Measuring M.C. </a:t>
             </a:r>
           </a:p>
         </p:txBody>
@@ -6879,7 +6985,7 @@
           <p:cNvPr id="3" name="Content Placeholder 2">
             <a:extLst>
               <a:ext uri="{FF2B5EF4-FFF2-40B4-BE49-F238E27FC236}">
-                <a16:creationId xmlns:a16="http://schemas.microsoft.com/office/drawing/2014/main" id="{E3E974AF-233E-0DB4-053E-917DB605B8F3}"/>
+                <a16:creationId xmlns:a16="http://schemas.microsoft.com/office/drawing/2014/main" id="{1A27369B-0495-86E7-C547-0997A874E96A}"/>
               </a:ext>
             </a:extLst>
           </p:cNvPr>
@@ -6892,47 +6998,93 @@
         </p:nvSpPr>
         <p:spPr>
           <a:xfrm>
-            <a:off x="8669278" y="2015732"/>
-            <a:ext cx="3522721" cy="4119254"/>
-          </a:xfrm>
-        </p:spPr>
-        <p:txBody>
-          <a:bodyPr/>
-          <a:lstStyle/>
-          <a:p>
-            <a:r>
-              <a:rPr lang="en-US" dirty="0"/>
-              <a:t>This dataset shows a clear separation of one class from the other two. </a:t>
-            </a:r>
-          </a:p>
-          <a:p>
-            <a:r>
-              <a:rPr lang="en-US" dirty="0"/>
-              <a:t>This may guide us…</a:t>
-            </a:r>
-          </a:p>
-          <a:p>
-            <a:pPr lvl="1"/>
-            <a:r>
-              <a:rPr lang="en-US" dirty="0"/>
-              <a:t>If we want to classify, that division helps. </a:t>
-            </a:r>
-          </a:p>
-          <a:p>
-            <a:pPr lvl="1"/>
-            <a:r>
-              <a:rPr lang="en-US" dirty="0"/>
-              <a:t>If that value is a feature, maybe it is better categorical. (??)</a:t>
+            <a:off x="1451579" y="1853754"/>
+            <a:ext cx="9603275" cy="4199727"/>
+          </a:xfrm>
+        </p:spPr>
+        <p:txBody>
+          <a:bodyPr/>
+          <a:lstStyle/>
+          <a:p>
+            <a:r>
+              <a:rPr lang="en-US" dirty="0"/>
+              <a:t>We can also calculate a metric called the VIF – variable inflation factor. </a:t>
+            </a:r>
+          </a:p>
+          <a:p>
+            <a:r>
+              <a:rPr lang="en-US" dirty="0"/>
+              <a:t>VIF measures how much of this variable’s info is explained by others. </a:t>
+            </a:r>
+          </a:p>
+          <a:p>
+            <a:pPr lvl="1"/>
+            <a:r>
+              <a:rPr lang="en-US" dirty="0"/>
+              <a:t>We get a value for each input variable. </a:t>
+            </a:r>
+          </a:p>
+          <a:p>
+            <a:pPr lvl="1"/>
+            <a:r>
+              <a:rPr lang="en-US" dirty="0"/>
+              <a:t>1 means there is no multicollinearity. </a:t>
+            </a:r>
+          </a:p>
+          <a:p>
+            <a:pPr lvl="1"/>
+            <a:r>
+              <a:rPr lang="en-US" dirty="0"/>
+              <a:t>Over about 10 are ones that require real investigation. </a:t>
+            </a:r>
+          </a:p>
+          <a:p>
+            <a:r>
+              <a:rPr lang="en-US" dirty="0"/>
+              <a:t>We can remove redundant ones with the help of the p values. </a:t>
+            </a:r>
+          </a:p>
+          <a:p>
+            <a:pPr lvl="1"/>
+            <a:r>
+              <a:rPr lang="en-US" dirty="0" err="1"/>
+              <a:t>Statsmodels</a:t>
+            </a:r>
+            <a:r>
+              <a:rPr lang="en-US" dirty="0"/>
+              <a:t> will give us per variable p-values. </a:t>
+            </a:r>
+          </a:p>
+          <a:p>
+            <a:pPr lvl="1"/>
+            <a:r>
+              <a:rPr lang="en-US" dirty="0"/>
+              <a:t>NH – this feature does not matter (m=0), what is the prob of seeing results this large. </a:t>
+            </a:r>
+          </a:p>
+          <a:p>
+            <a:pPr lvl="1"/>
+            <a:r>
+              <a:rPr lang="en-US" dirty="0"/>
+              <a:t>Be aware, there can be odd swings when </a:t>
+            </a:r>
+            <a:r>
+              <a:rPr lang="en-US" dirty="0" err="1"/>
+              <a:t>m.c.</a:t>
+            </a:r>
+            <a:r>
+              <a:rPr lang="en-US" dirty="0"/>
+              <a:t> is there – model can’t weight properly. </a:t>
             </a:r>
           </a:p>
         </p:txBody>
       </p:sp>
       <p:pic>
         <p:nvPicPr>
-          <p:cNvPr id="1026" name="Picture 2" descr="Fundamentals of Exploratory Data Analysis with Python Implementation">
+          <p:cNvPr id="11266" name="Picture 2" descr="Variance Inflation Factor (VIF). We have always heard about… | by Saurabh  Gupta | Analytics Vidhya | Medium">
             <a:extLst>
               <a:ext uri="{FF2B5EF4-FFF2-40B4-BE49-F238E27FC236}">
-                <a16:creationId xmlns:a16="http://schemas.microsoft.com/office/drawing/2014/main" id="{BC0AE3D8-EB56-C1D7-273C-DF74389A7933}"/>
+                <a16:creationId xmlns:a16="http://schemas.microsoft.com/office/drawing/2014/main" id="{5A08ABD7-9778-8F5C-69F3-0F2BE4220957}"/>
               </a:ext>
             </a:extLst>
           </p:cNvPr>
@@ -6956,8 +7108,8 @@
         </p:blipFill>
         <p:spPr bwMode="auto">
           <a:xfrm>
-            <a:off x="180753" y="1853754"/>
-            <a:ext cx="8488526" cy="4203368"/>
+            <a:off x="8591106" y="2961900"/>
+            <a:ext cx="3600893" cy="1870594"/>
           </a:xfrm>
           <a:prstGeom prst="rect">
             <a:avLst/>
@@ -6974,10 +7126,40 @@
           </a:extLst>
         </p:spPr>
       </p:pic>
+      <p:pic>
+        <p:nvPicPr>
+          <p:cNvPr id="4" name="Picture 3">
+            <a:extLst>
+              <a:ext uri="{FF2B5EF4-FFF2-40B4-BE49-F238E27FC236}">
+                <a16:creationId xmlns:a16="http://schemas.microsoft.com/office/drawing/2014/main" id="{C5897E0E-5BAD-7D17-1E79-0C36FB87B252}"/>
+              </a:ext>
+            </a:extLst>
+          </p:cNvPr>
+          <p:cNvPicPr>
+            <a:picLocks noChangeAspect="1"/>
+          </p:cNvPicPr>
+          <p:nvPr/>
+        </p:nvPicPr>
+        <p:blipFill>
+          <a:blip r:embed="rId3"/>
+          <a:stretch>
+            <a:fillRect/>
+          </a:stretch>
+        </p:blipFill>
+        <p:spPr>
+          <a:xfrm>
+            <a:off x="6943060" y="-8357"/>
+            <a:ext cx="5248939" cy="1836678"/>
+          </a:xfrm>
+          <a:prstGeom prst="rect">
+            <a:avLst/>
+          </a:prstGeom>
+        </p:spPr>
+      </p:pic>
     </p:spTree>
     <p:extLst>
       <p:ext uri="{BB962C8B-B14F-4D97-AF65-F5344CB8AC3E}">
-        <p14:creationId xmlns:p14="http://schemas.microsoft.com/office/powerpoint/2010/main" val="1405714686"/>
+        <p14:creationId xmlns:p14="http://schemas.microsoft.com/office/powerpoint/2010/main" val="1177527087"/>
       </p:ext>
     </p:extLst>
   </p:cSld>
@@ -7009,7 +7191,7 @@
           <p:cNvPr id="2" name="Title 1">
             <a:extLst>
               <a:ext uri="{FF2B5EF4-FFF2-40B4-BE49-F238E27FC236}">
-                <a16:creationId xmlns:a16="http://schemas.microsoft.com/office/drawing/2014/main" id="{43CC361B-31A2-BBC7-8128-D8B8C25AD75B}"/>
+                <a16:creationId xmlns:a16="http://schemas.microsoft.com/office/drawing/2014/main" id="{DBAB7B93-741F-751B-B5F9-E27762CAD4C7}"/>
               </a:ext>
             </a:extLst>
           </p:cNvPr>
@@ -7020,119 +7202,112 @@
             <p:ph type="title"/>
           </p:nvPr>
         </p:nvSpPr>
+        <p:spPr/>
+        <p:txBody>
+          <a:bodyPr/>
+          <a:lstStyle/>
+          <a:p>
+            <a:r>
+              <a:rPr lang="en-US" dirty="0"/>
+              <a:t>Multicollinearity Process</a:t>
+            </a:r>
+          </a:p>
+        </p:txBody>
+      </p:sp>
+      <p:sp>
+        <p:nvSpPr>
+          <p:cNvPr id="3" name="Content Placeholder 2">
+            <a:extLst>
+              <a:ext uri="{FF2B5EF4-FFF2-40B4-BE49-F238E27FC236}">
+                <a16:creationId xmlns:a16="http://schemas.microsoft.com/office/drawing/2014/main" id="{D5F24B8C-3C93-10B9-E249-DA76197B69D8}"/>
+              </a:ext>
+            </a:extLst>
+          </p:cNvPr>
+          <p:cNvSpPr>
+            <a:spLocks noGrp="1"/>
+          </p:cNvSpPr>
+          <p:nvPr>
+            <p:ph idx="1"/>
+          </p:nvPr>
+        </p:nvSpPr>
         <p:spPr>
           <a:xfrm>
-            <a:off x="1451580" y="804519"/>
-            <a:ext cx="3468084" cy="1049235"/>
-          </a:xfrm>
-        </p:spPr>
-        <p:txBody>
-          <a:bodyPr/>
-          <a:lstStyle/>
-          <a:p>
-            <a:r>
-              <a:rPr lang="en-US" dirty="0"/>
-              <a:t>Outliers and Categorical</a:t>
-            </a:r>
-          </a:p>
-        </p:txBody>
-      </p:sp>
-      <p:sp>
-        <p:nvSpPr>
-          <p:cNvPr id="3" name="Content Placeholder 2">
-            <a:extLst>
-              <a:ext uri="{FF2B5EF4-FFF2-40B4-BE49-F238E27FC236}">
-                <a16:creationId xmlns:a16="http://schemas.microsoft.com/office/drawing/2014/main" id="{6500D048-50A6-B407-5D37-96849F79C2CF}"/>
-              </a:ext>
-            </a:extLst>
-          </p:cNvPr>
-          <p:cNvSpPr>
-            <a:spLocks noGrp="1"/>
-          </p:cNvSpPr>
-          <p:nvPr>
-            <p:ph idx="1"/>
-          </p:nvPr>
-        </p:nvSpPr>
-        <p:spPr>
-          <a:xfrm>
-            <a:off x="1" y="2015732"/>
-            <a:ext cx="4805916" cy="3906603"/>
-          </a:xfrm>
-        </p:spPr>
-        <p:txBody>
-          <a:bodyPr/>
-          <a:lstStyle/>
-          <a:p>
-            <a:r>
-              <a:rPr lang="en-US" dirty="0"/>
-              <a:t>This data appears to have outliers. </a:t>
-            </a:r>
-          </a:p>
-          <a:p>
-            <a:r>
-              <a:rPr lang="en-US" dirty="0"/>
-              <a:t>The last column appears to be better as categorical. </a:t>
-            </a:r>
-          </a:p>
-          <a:p>
-            <a:r>
-              <a:rPr lang="en-US" dirty="0"/>
-              <a:t>The ‘hour’ column has a weird distribution – depending on what I am doing, this might matter. </a:t>
-            </a:r>
-          </a:p>
-        </p:txBody>
-      </p:sp>
-      <p:pic>
-        <p:nvPicPr>
-          <p:cNvPr id="3078" name="Picture 6" descr="distributions - How to interpret pairplots() - Cross Validated">
-            <a:extLst>
-              <a:ext uri="{FF2B5EF4-FFF2-40B4-BE49-F238E27FC236}">
-                <a16:creationId xmlns:a16="http://schemas.microsoft.com/office/drawing/2014/main" id="{03CF9A95-830B-82D9-D993-2BEF2843CF4D}"/>
-              </a:ext>
-            </a:extLst>
-          </p:cNvPr>
-          <p:cNvPicPr>
-            <a:picLocks noChangeAspect="1" noChangeArrowheads="1"/>
-          </p:cNvPicPr>
-          <p:nvPr/>
-        </p:nvPicPr>
-        <p:blipFill>
-          <a:blip r:embed="rId2">
-            <a:extLst>
-              <a:ext uri="{28A0092B-C50C-407E-A947-70E740481C1C}">
-                <a14:useLocalDpi xmlns:a14="http://schemas.microsoft.com/office/drawing/2010/main" val="0"/>
-              </a:ext>
-            </a:extLst>
-          </a:blip>
-          <a:srcRect/>
-          <a:stretch>
-            <a:fillRect/>
-          </a:stretch>
-        </p:blipFill>
-        <p:spPr bwMode="auto">
-          <a:xfrm>
-            <a:off x="4919663" y="0"/>
-            <a:ext cx="7272337" cy="6858000"/>
-          </a:xfrm>
-          <a:prstGeom prst="rect">
-            <a:avLst/>
-          </a:prstGeom>
-          <a:noFill/>
-          <a:extLst>
-            <a:ext uri="{909E8E84-426E-40DD-AFC4-6F175D3DCCD1}">
-              <a14:hiddenFill xmlns:a14="http://schemas.microsoft.com/office/drawing/2010/main">
-                <a:solidFill>
-                  <a:srgbClr val="FFFFFF"/>
-                </a:solidFill>
-              </a14:hiddenFill>
-            </a:ext>
-          </a:extLst>
-        </p:spPr>
-      </p:pic>
+            <a:off x="1451579" y="2015732"/>
+            <a:ext cx="9603275" cy="4037749"/>
+          </a:xfrm>
+        </p:spPr>
+        <p:txBody>
+          <a:bodyPr/>
+          <a:lstStyle/>
+          <a:p>
+            <a:r>
+              <a:rPr lang="en-US" dirty="0"/>
+              <a:t>We can do an iterative process to deal with </a:t>
+            </a:r>
+            <a:r>
+              <a:rPr lang="en-US" dirty="0" err="1"/>
+              <a:t>m.c.</a:t>
+            </a:r>
+            <a:r>
+              <a:rPr lang="en-US" dirty="0"/>
+              <a:t>:</a:t>
+            </a:r>
+          </a:p>
+          <a:p>
+            <a:pPr lvl="1"/>
+            <a:r>
+              <a:rPr lang="en-US" dirty="0"/>
+              <a:t>Run the VIF values. </a:t>
+            </a:r>
+          </a:p>
+          <a:p>
+            <a:pPr lvl="1"/>
+            <a:r>
+              <a:rPr lang="en-US" dirty="0"/>
+              <a:t>Run a model via </a:t>
+            </a:r>
+            <a:r>
+              <a:rPr lang="en-US" dirty="0" err="1"/>
+              <a:t>statsmodels</a:t>
+            </a:r>
+            <a:r>
+              <a:rPr lang="en-US" dirty="0"/>
+              <a:t>. </a:t>
+            </a:r>
+          </a:p>
+          <a:p>
+            <a:pPr lvl="1"/>
+            <a:r>
+              <a:rPr lang="en-US" dirty="0"/>
+              <a:t>Remove some variables based on VIF, p-value, and domain knowledge (i.e. which measures actually overlap in real life.)</a:t>
+            </a:r>
+          </a:p>
+          <a:p>
+            <a:pPr lvl="1"/>
+            <a:r>
+              <a:rPr lang="en-US" dirty="0"/>
+              <a:t>Repeat as needed. </a:t>
+            </a:r>
+          </a:p>
+          <a:p>
+            <a:r>
+              <a:rPr lang="en-US" dirty="0"/>
+              <a:t>Tuning a model is largely a judgment call, don’t obsess over where to draw line now. </a:t>
+            </a:r>
+          </a:p>
+          <a:p>
+            <a:pPr lvl="1"/>
+            <a:r>
+              <a:rPr lang="en-US" dirty="0"/>
+              <a:t>No high p-values is a good rule of thumb for now. </a:t>
+            </a:r>
+          </a:p>
+        </p:txBody>
+      </p:sp>
     </p:spTree>
     <p:extLst>
       <p:ext uri="{BB962C8B-B14F-4D97-AF65-F5344CB8AC3E}">
-        <p14:creationId xmlns:p14="http://schemas.microsoft.com/office/powerpoint/2010/main" val="4043875854"/>
+        <p14:creationId xmlns:p14="http://schemas.microsoft.com/office/powerpoint/2010/main" val="3320482818"/>
       </p:ext>
     </p:extLst>
   </p:cSld>
@@ -7342,6 +7517,896 @@
           <p:cNvPr id="2" name="Title 1">
             <a:extLst>
               <a:ext uri="{FF2B5EF4-FFF2-40B4-BE49-F238E27FC236}">
+                <a16:creationId xmlns:a16="http://schemas.microsoft.com/office/drawing/2014/main" id="{F00579DB-FA27-0B61-6BD7-E48DD2765F59}"/>
+              </a:ext>
+            </a:extLst>
+          </p:cNvPr>
+          <p:cNvSpPr>
+            <a:spLocks noGrp="1"/>
+          </p:cNvSpPr>
+          <p:nvPr>
+            <p:ph type="title"/>
+          </p:nvPr>
+        </p:nvSpPr>
+        <p:spPr/>
+        <p:txBody>
+          <a:bodyPr/>
+          <a:lstStyle/>
+          <a:p>
+            <a:r>
+              <a:rPr lang="en-US" dirty="0"/>
+              <a:t>R2 and Multiple Regression</a:t>
+            </a:r>
+          </a:p>
+        </p:txBody>
+      </p:sp>
+      <p:sp>
+        <p:nvSpPr>
+          <p:cNvPr id="3" name="Content Placeholder 2">
+            <a:extLst>
+              <a:ext uri="{FF2B5EF4-FFF2-40B4-BE49-F238E27FC236}">
+                <a16:creationId xmlns:a16="http://schemas.microsoft.com/office/drawing/2014/main" id="{7D80E5D9-4ECB-3A34-3356-7F1C8EA976A8}"/>
+              </a:ext>
+            </a:extLst>
+          </p:cNvPr>
+          <p:cNvSpPr>
+            <a:spLocks noGrp="1"/>
+          </p:cNvSpPr>
+          <p:nvPr>
+            <p:ph idx="1"/>
+          </p:nvPr>
+        </p:nvSpPr>
+        <p:spPr>
+          <a:xfrm>
+            <a:off x="1451579" y="2015732"/>
+            <a:ext cx="9603275" cy="4037749"/>
+          </a:xfrm>
+        </p:spPr>
+        <p:txBody>
+          <a:bodyPr/>
+          <a:lstStyle/>
+          <a:p>
+            <a:r>
+              <a:rPr lang="en-US" dirty="0"/>
+              <a:t>We can measure the ‘completeness’ of our model with R2. </a:t>
+            </a:r>
+          </a:p>
+          <a:p>
+            <a:pPr lvl="1"/>
+            <a:r>
+              <a:rPr lang="en-US" dirty="0"/>
+              <a:t>How much of the variance of Y do we capture, and how much do we miss? </a:t>
+            </a:r>
+          </a:p>
+          <a:p>
+            <a:pPr lvl="1"/>
+            <a:r>
+              <a:rPr lang="en-US" dirty="0"/>
+              <a:t>Default score is easy to use and compare to others. </a:t>
+            </a:r>
+          </a:p>
+          <a:p>
+            <a:r>
+              <a:rPr lang="en-US" dirty="0"/>
+              <a:t>We can build a more complete model by adding inputs to X. </a:t>
+            </a:r>
+          </a:p>
+          <a:p>
+            <a:pPr lvl="1"/>
+            <a:r>
+              <a:rPr lang="en-US" dirty="0"/>
+              <a:t>Most things are determined by many factors. </a:t>
+            </a:r>
+          </a:p>
+          <a:p>
+            <a:pPr lvl="1"/>
+            <a:r>
+              <a:rPr lang="en-US" dirty="0"/>
+              <a:t>Little changes, other than it becomes harder to visualize and do by hand. </a:t>
+            </a:r>
+          </a:p>
+        </p:txBody>
+      </p:sp>
+    </p:spTree>
+    <p:extLst>
+      <p:ext uri="{BB962C8B-B14F-4D97-AF65-F5344CB8AC3E}">
+        <p14:creationId xmlns:p14="http://schemas.microsoft.com/office/powerpoint/2010/main" val="2254303245"/>
+      </p:ext>
+    </p:extLst>
+  </p:cSld>
+  <p:clrMapOvr>
+    <a:masterClrMapping/>
+  </p:clrMapOvr>
+</p:sld>
+</file>
+
+<file path=ppt/slides/slide31.xml><?xml version="1.0" encoding="utf-8"?>
+<p:sld xmlns:a="http://schemas.openxmlformats.org/drawingml/2006/main" xmlns:r="http://schemas.openxmlformats.org/officeDocument/2006/relationships" xmlns:p="http://schemas.openxmlformats.org/presentationml/2006/main">
+  <p:cSld>
+    <p:spTree>
+      <p:nvGrpSpPr>
+        <p:cNvPr id="1" name=""/>
+        <p:cNvGrpSpPr/>
+        <p:nvPr/>
+      </p:nvGrpSpPr>
+      <p:grpSpPr>
+        <a:xfrm>
+          <a:off x="0" y="0"/>
+          <a:ext cx="0" cy="0"/>
+          <a:chOff x="0" y="0"/>
+          <a:chExt cx="0" cy="0"/>
+        </a:xfrm>
+      </p:grpSpPr>
+      <p:sp>
+        <p:nvSpPr>
+          <p:cNvPr id="2" name="Title 1">
+            <a:extLst>
+              <a:ext uri="{FF2B5EF4-FFF2-40B4-BE49-F238E27FC236}">
+                <a16:creationId xmlns:a16="http://schemas.microsoft.com/office/drawing/2014/main" id="{87976A0E-3B86-BD5A-B164-A9353F4D9A40}"/>
+              </a:ext>
+            </a:extLst>
+          </p:cNvPr>
+          <p:cNvSpPr>
+            <a:spLocks noGrp="1"/>
+          </p:cNvSpPr>
+          <p:nvPr>
+            <p:ph type="title"/>
+          </p:nvPr>
+        </p:nvSpPr>
+        <p:spPr/>
+        <p:txBody>
+          <a:bodyPr/>
+          <a:lstStyle/>
+          <a:p>
+            <a:r>
+              <a:rPr lang="en-US" dirty="0"/>
+              <a:t>Applying the Stats Stuff</a:t>
+            </a:r>
+          </a:p>
+        </p:txBody>
+      </p:sp>
+      <p:sp>
+        <p:nvSpPr>
+          <p:cNvPr id="3" name="Content Placeholder 2">
+            <a:extLst>
+              <a:ext uri="{FF2B5EF4-FFF2-40B4-BE49-F238E27FC236}">
+                <a16:creationId xmlns:a16="http://schemas.microsoft.com/office/drawing/2014/main" id="{C88534AB-87B6-8BCB-5980-B03E4DBA1ED0}"/>
+              </a:ext>
+            </a:extLst>
+          </p:cNvPr>
+          <p:cNvSpPr>
+            <a:spLocks noGrp="1"/>
+          </p:cNvSpPr>
+          <p:nvPr>
+            <p:ph idx="1"/>
+          </p:nvPr>
+        </p:nvSpPr>
+        <p:spPr>
+          <a:xfrm>
+            <a:off x="1137147" y="1853754"/>
+            <a:ext cx="10229058" cy="4199727"/>
+          </a:xfrm>
+        </p:spPr>
+        <p:txBody>
+          <a:bodyPr/>
+          <a:lstStyle/>
+          <a:p>
+            <a:r>
+              <a:rPr lang="en-US" dirty="0"/>
+              <a:t>The first way that we’ll directly use the stats in ML is EDA – exploratory data analysis. </a:t>
+            </a:r>
+          </a:p>
+          <a:p>
+            <a:r>
+              <a:rPr lang="en-US" dirty="0"/>
+              <a:t>This is both art and science, there isn’t a specific set of steps. </a:t>
+            </a:r>
+          </a:p>
+          <a:p>
+            <a:r>
+              <a:rPr lang="en-US" dirty="0"/>
+              <a:t>We do EDA up front to basically look for stuff in our data that may matter. </a:t>
+            </a:r>
+          </a:p>
+          <a:p>
+            <a:pPr lvl="1"/>
+            <a:r>
+              <a:rPr lang="en-US" dirty="0"/>
+              <a:t>Missing values. </a:t>
+            </a:r>
+          </a:p>
+          <a:p>
+            <a:pPr lvl="1"/>
+            <a:r>
+              <a:rPr lang="en-US" dirty="0"/>
+              <a:t>Outliers. </a:t>
+            </a:r>
+          </a:p>
+          <a:p>
+            <a:pPr lvl="1"/>
+            <a:r>
+              <a:rPr lang="en-US" dirty="0"/>
+              <a:t>Errors. </a:t>
+            </a:r>
+          </a:p>
+          <a:p>
+            <a:pPr lvl="1"/>
+            <a:r>
+              <a:rPr lang="en-US" dirty="0"/>
+              <a:t>Patterns in data – numeric that is categorical, odd distributions, correlation, </a:t>
+            </a:r>
+            <a:r>
+              <a:rPr lang="en-US" dirty="0" err="1"/>
+              <a:t>etc</a:t>
+            </a:r>
+            <a:r>
+              <a:rPr lang="en-US" dirty="0"/>
+              <a:t>…</a:t>
+            </a:r>
+          </a:p>
+          <a:p>
+            <a:pPr lvl="1"/>
+            <a:r>
+              <a:rPr lang="en-US" dirty="0"/>
+              <a:t>Things that don’t vary. </a:t>
+            </a:r>
+          </a:p>
+          <a:p>
+            <a:r>
+              <a:rPr lang="en-US" dirty="0"/>
+              <a:t>Exactly what we are looking for varies, generally anything that may impact model accuracy. </a:t>
+            </a:r>
+          </a:p>
+        </p:txBody>
+      </p:sp>
+    </p:spTree>
+    <p:extLst>
+      <p:ext uri="{BB962C8B-B14F-4D97-AF65-F5344CB8AC3E}">
+        <p14:creationId xmlns:p14="http://schemas.microsoft.com/office/powerpoint/2010/main" val="681943827"/>
+      </p:ext>
+    </p:extLst>
+  </p:cSld>
+  <p:clrMapOvr>
+    <a:masterClrMapping/>
+  </p:clrMapOvr>
+</p:sld>
+</file>
+
+<file path=ppt/slides/slide32.xml><?xml version="1.0" encoding="utf-8"?>
+<p:sld xmlns:a="http://schemas.openxmlformats.org/drawingml/2006/main" xmlns:r="http://schemas.openxmlformats.org/officeDocument/2006/relationships" xmlns:p="http://schemas.openxmlformats.org/presentationml/2006/main">
+  <p:cSld>
+    <p:spTree>
+      <p:nvGrpSpPr>
+        <p:cNvPr id="1" name=""/>
+        <p:cNvGrpSpPr/>
+        <p:nvPr/>
+      </p:nvGrpSpPr>
+      <p:grpSpPr>
+        <a:xfrm>
+          <a:off x="0" y="0"/>
+          <a:ext cx="0" cy="0"/>
+          <a:chOff x="0" y="0"/>
+          <a:chExt cx="0" cy="0"/>
+        </a:xfrm>
+      </p:grpSpPr>
+      <p:sp>
+        <p:nvSpPr>
+          <p:cNvPr id="2" name="Title 1">
+            <a:extLst>
+              <a:ext uri="{FF2B5EF4-FFF2-40B4-BE49-F238E27FC236}">
+                <a16:creationId xmlns:a16="http://schemas.microsoft.com/office/drawing/2014/main" id="{4A4C0882-D407-8B64-8F0A-A2FCB1DD5132}"/>
+              </a:ext>
+            </a:extLst>
+          </p:cNvPr>
+          <p:cNvSpPr>
+            <a:spLocks noGrp="1"/>
+          </p:cNvSpPr>
+          <p:nvPr>
+            <p:ph type="title"/>
+          </p:nvPr>
+        </p:nvSpPr>
+        <p:spPr/>
+        <p:txBody>
+          <a:bodyPr/>
+          <a:lstStyle/>
+          <a:p>
+            <a:r>
+              <a:rPr lang="en-US" dirty="0"/>
+              <a:t>EDA Process</a:t>
+            </a:r>
+          </a:p>
+        </p:txBody>
+      </p:sp>
+      <p:sp>
+        <p:nvSpPr>
+          <p:cNvPr id="3" name="Content Placeholder 2">
+            <a:extLst>
+              <a:ext uri="{FF2B5EF4-FFF2-40B4-BE49-F238E27FC236}">
+                <a16:creationId xmlns:a16="http://schemas.microsoft.com/office/drawing/2014/main" id="{780F816F-240E-8E75-9E3E-BE8153876DC1}"/>
+              </a:ext>
+            </a:extLst>
+          </p:cNvPr>
+          <p:cNvSpPr>
+            <a:spLocks noGrp="1"/>
+          </p:cNvSpPr>
+          <p:nvPr>
+            <p:ph idx="1"/>
+          </p:nvPr>
+        </p:nvSpPr>
+        <p:spPr>
+          <a:xfrm>
+            <a:off x="1451579" y="1935126"/>
+            <a:ext cx="9603275" cy="4118355"/>
+          </a:xfrm>
+        </p:spPr>
+        <p:txBody>
+          <a:bodyPr/>
+          <a:lstStyle/>
+          <a:p>
+            <a:r>
+              <a:rPr lang="en-US" dirty="0"/>
+              <a:t>Doing EDA is something that will feel more natural with time. </a:t>
+            </a:r>
+          </a:p>
+          <a:p>
+            <a:r>
+              <a:rPr lang="en-US" dirty="0"/>
+              <a:t>We generally want to look graphically and arithmetically. </a:t>
+            </a:r>
+          </a:p>
+          <a:p>
+            <a:pPr lvl="1"/>
+            <a:r>
+              <a:rPr lang="en-US" dirty="0"/>
+              <a:t>Info, describe, and head/sample can give us a look at the stats. </a:t>
+            </a:r>
+          </a:p>
+          <a:p>
+            <a:pPr lvl="1"/>
+            <a:r>
+              <a:rPr lang="en-US" dirty="0" err="1"/>
+              <a:t>Pairplot</a:t>
+            </a:r>
+            <a:r>
+              <a:rPr lang="en-US" dirty="0"/>
+              <a:t>, box plot, count plot can give us a visual look. </a:t>
+            </a:r>
+          </a:p>
+          <a:p>
+            <a:r>
+              <a:rPr lang="en-US" dirty="0"/>
+              <a:t>Usually need to do some iteration. </a:t>
+            </a:r>
+          </a:p>
+          <a:p>
+            <a:pPr lvl="1"/>
+            <a:r>
+              <a:rPr lang="en-US" dirty="0"/>
+              <a:t>Clean something you notice, e.g. outliers. </a:t>
+            </a:r>
+          </a:p>
+          <a:p>
+            <a:pPr lvl="1"/>
+            <a:r>
+              <a:rPr lang="en-US" dirty="0"/>
+              <a:t>Check again to see how the data looks. </a:t>
+            </a:r>
+          </a:p>
+        </p:txBody>
+      </p:sp>
+    </p:spTree>
+    <p:extLst>
+      <p:ext uri="{BB962C8B-B14F-4D97-AF65-F5344CB8AC3E}">
+        <p14:creationId xmlns:p14="http://schemas.microsoft.com/office/powerpoint/2010/main" val="3257656829"/>
+      </p:ext>
+    </p:extLst>
+  </p:cSld>
+  <p:clrMapOvr>
+    <a:masterClrMapping/>
+  </p:clrMapOvr>
+</p:sld>
+</file>
+
+<file path=ppt/slides/slide33.xml><?xml version="1.0" encoding="utf-8"?>
+<p:sld xmlns:a="http://schemas.openxmlformats.org/drawingml/2006/main" xmlns:r="http://schemas.openxmlformats.org/officeDocument/2006/relationships" xmlns:p="http://schemas.openxmlformats.org/presentationml/2006/main">
+  <p:cSld>
+    <p:spTree>
+      <p:nvGrpSpPr>
+        <p:cNvPr id="1" name=""/>
+        <p:cNvGrpSpPr/>
+        <p:nvPr/>
+      </p:nvGrpSpPr>
+      <p:grpSpPr>
+        <a:xfrm>
+          <a:off x="0" y="0"/>
+          <a:ext cx="0" cy="0"/>
+          <a:chOff x="0" y="0"/>
+          <a:chExt cx="0" cy="0"/>
+        </a:xfrm>
+      </p:grpSpPr>
+      <p:sp>
+        <p:nvSpPr>
+          <p:cNvPr id="2" name="Title 1">
+            <a:extLst>
+              <a:ext uri="{FF2B5EF4-FFF2-40B4-BE49-F238E27FC236}">
+                <a16:creationId xmlns:a16="http://schemas.microsoft.com/office/drawing/2014/main" id="{D5817EF8-E39C-2C99-C847-C9C851B0D810}"/>
+              </a:ext>
+            </a:extLst>
+          </p:cNvPr>
+          <p:cNvSpPr>
+            <a:spLocks noGrp="1"/>
+          </p:cNvSpPr>
+          <p:nvPr>
+            <p:ph type="title"/>
+          </p:nvPr>
+        </p:nvSpPr>
+        <p:spPr/>
+        <p:txBody>
+          <a:bodyPr/>
+          <a:lstStyle/>
+          <a:p>
+            <a:r>
+              <a:rPr lang="en-US" dirty="0"/>
+              <a:t>Example – Nothing of interest</a:t>
+            </a:r>
+          </a:p>
+        </p:txBody>
+      </p:sp>
+      <p:sp>
+        <p:nvSpPr>
+          <p:cNvPr id="3" name="Content Placeholder 2">
+            <a:extLst>
+              <a:ext uri="{FF2B5EF4-FFF2-40B4-BE49-F238E27FC236}">
+                <a16:creationId xmlns:a16="http://schemas.microsoft.com/office/drawing/2014/main" id="{0007CA20-2F49-6A82-8DAB-B37C4A40A4D8}"/>
+              </a:ext>
+            </a:extLst>
+          </p:cNvPr>
+          <p:cNvSpPr>
+            <a:spLocks noGrp="1"/>
+          </p:cNvSpPr>
+          <p:nvPr>
+            <p:ph idx="1"/>
+          </p:nvPr>
+        </p:nvSpPr>
+        <p:spPr>
+          <a:xfrm>
+            <a:off x="423001" y="2015732"/>
+            <a:ext cx="5830216" cy="3450613"/>
+          </a:xfrm>
+        </p:spPr>
+        <p:txBody>
+          <a:bodyPr/>
+          <a:lstStyle/>
+          <a:p>
+            <a:r>
+              <a:rPr lang="en-US" dirty="0"/>
+              <a:t>This is some data with nothing obvious to address.</a:t>
+            </a:r>
+          </a:p>
+          <a:p>
+            <a:pPr lvl="1"/>
+            <a:r>
+              <a:rPr lang="en-US" dirty="0"/>
+              <a:t>No odd patterns. </a:t>
+            </a:r>
+          </a:p>
+          <a:p>
+            <a:pPr lvl="1"/>
+            <a:r>
+              <a:rPr lang="en-US" dirty="0"/>
+              <a:t>No clear outliers.  </a:t>
+            </a:r>
+          </a:p>
+          <a:p>
+            <a:pPr lvl="1"/>
+            <a:r>
+              <a:rPr lang="en-US" dirty="0"/>
+              <a:t>Variables seem to have a ‘normal’ amount of variance. </a:t>
+            </a:r>
+          </a:p>
+          <a:p>
+            <a:r>
+              <a:rPr lang="en-US" dirty="0"/>
+              <a:t>This data is ready to be used by a model. </a:t>
+            </a:r>
+          </a:p>
+        </p:txBody>
+      </p:sp>
+      <p:pic>
+        <p:nvPicPr>
+          <p:cNvPr id="2050" name="Picture 2" descr="Dramatically Improve Your Exploratory Data Analysis (EDA) | Towards Data  Science">
+            <a:extLst>
+              <a:ext uri="{FF2B5EF4-FFF2-40B4-BE49-F238E27FC236}">
+                <a16:creationId xmlns:a16="http://schemas.microsoft.com/office/drawing/2014/main" id="{62C6B302-3011-29D1-D3F3-EDB4D3F80499}"/>
+              </a:ext>
+            </a:extLst>
+          </p:cNvPr>
+          <p:cNvPicPr>
+            <a:picLocks noChangeAspect="1" noChangeArrowheads="1"/>
+          </p:cNvPicPr>
+          <p:nvPr/>
+        </p:nvPicPr>
+        <p:blipFill>
+          <a:blip r:embed="rId2">
+            <a:extLst>
+              <a:ext uri="{28A0092B-C50C-407E-A947-70E740481C1C}">
+                <a14:useLocalDpi xmlns:a14="http://schemas.microsoft.com/office/drawing/2010/main" val="0"/>
+              </a:ext>
+            </a:extLst>
+          </a:blip>
+          <a:srcRect/>
+          <a:stretch>
+            <a:fillRect/>
+          </a:stretch>
+        </p:blipFill>
+        <p:spPr bwMode="auto">
+          <a:xfrm>
+            <a:off x="6253216" y="1532238"/>
+            <a:ext cx="5830217" cy="4707924"/>
+          </a:xfrm>
+          <a:prstGeom prst="rect">
+            <a:avLst/>
+          </a:prstGeom>
+          <a:noFill/>
+          <a:extLst>
+            <a:ext uri="{909E8E84-426E-40DD-AFC4-6F175D3DCCD1}">
+              <a14:hiddenFill xmlns:a14="http://schemas.microsoft.com/office/drawing/2010/main">
+                <a:solidFill>
+                  <a:srgbClr val="FFFFFF"/>
+                </a:solidFill>
+              </a14:hiddenFill>
+            </a:ext>
+          </a:extLst>
+        </p:spPr>
+      </p:pic>
+    </p:spTree>
+    <p:extLst>
+      <p:ext uri="{BB962C8B-B14F-4D97-AF65-F5344CB8AC3E}">
+        <p14:creationId xmlns:p14="http://schemas.microsoft.com/office/powerpoint/2010/main" val="4244201324"/>
+      </p:ext>
+    </p:extLst>
+  </p:cSld>
+  <p:clrMapOvr>
+    <a:masterClrMapping/>
+  </p:clrMapOvr>
+</p:sld>
+</file>
+
+<file path=ppt/slides/slide34.xml><?xml version="1.0" encoding="utf-8"?>
+<p:sld xmlns:a="http://schemas.openxmlformats.org/drawingml/2006/main" xmlns:r="http://schemas.openxmlformats.org/officeDocument/2006/relationships" xmlns:p="http://schemas.openxmlformats.org/presentationml/2006/main">
+  <p:cSld>
+    <p:spTree>
+      <p:nvGrpSpPr>
+        <p:cNvPr id="1" name=""/>
+        <p:cNvGrpSpPr/>
+        <p:nvPr/>
+      </p:nvGrpSpPr>
+      <p:grpSpPr>
+        <a:xfrm>
+          <a:off x="0" y="0"/>
+          <a:ext cx="0" cy="0"/>
+          <a:chOff x="0" y="0"/>
+          <a:chExt cx="0" cy="0"/>
+        </a:xfrm>
+      </p:grpSpPr>
+      <p:sp>
+        <p:nvSpPr>
+          <p:cNvPr id="2" name="Title 1">
+            <a:extLst>
+              <a:ext uri="{FF2B5EF4-FFF2-40B4-BE49-F238E27FC236}">
+                <a16:creationId xmlns:a16="http://schemas.microsoft.com/office/drawing/2014/main" id="{F646F2B0-E9E8-6ECD-010A-951DCE13AF15}"/>
+              </a:ext>
+            </a:extLst>
+          </p:cNvPr>
+          <p:cNvSpPr>
+            <a:spLocks noGrp="1"/>
+          </p:cNvSpPr>
+          <p:nvPr>
+            <p:ph type="title"/>
+          </p:nvPr>
+        </p:nvSpPr>
+        <p:spPr/>
+        <p:txBody>
+          <a:bodyPr/>
+          <a:lstStyle/>
+          <a:p>
+            <a:r>
+              <a:rPr lang="en-US" dirty="0"/>
+              <a:t>Something Weird!</a:t>
+            </a:r>
+          </a:p>
+        </p:txBody>
+      </p:sp>
+      <p:sp>
+        <p:nvSpPr>
+          <p:cNvPr id="3" name="Content Placeholder 2">
+            <a:extLst>
+              <a:ext uri="{FF2B5EF4-FFF2-40B4-BE49-F238E27FC236}">
+                <a16:creationId xmlns:a16="http://schemas.microsoft.com/office/drawing/2014/main" id="{E3E974AF-233E-0DB4-053E-917DB605B8F3}"/>
+              </a:ext>
+            </a:extLst>
+          </p:cNvPr>
+          <p:cNvSpPr>
+            <a:spLocks noGrp="1"/>
+          </p:cNvSpPr>
+          <p:nvPr>
+            <p:ph idx="1"/>
+          </p:nvPr>
+        </p:nvSpPr>
+        <p:spPr>
+          <a:xfrm>
+            <a:off x="8669278" y="2015732"/>
+            <a:ext cx="3522721" cy="4119254"/>
+          </a:xfrm>
+        </p:spPr>
+        <p:txBody>
+          <a:bodyPr/>
+          <a:lstStyle/>
+          <a:p>
+            <a:r>
+              <a:rPr lang="en-US" dirty="0"/>
+              <a:t>This dataset shows a clear separation of one class from the other two. </a:t>
+            </a:r>
+          </a:p>
+          <a:p>
+            <a:r>
+              <a:rPr lang="en-US" dirty="0"/>
+              <a:t>This may guide us…</a:t>
+            </a:r>
+          </a:p>
+          <a:p>
+            <a:pPr lvl="1"/>
+            <a:r>
+              <a:rPr lang="en-US" dirty="0"/>
+              <a:t>If we want to classify, that division helps. </a:t>
+            </a:r>
+          </a:p>
+          <a:p>
+            <a:pPr lvl="1"/>
+            <a:r>
+              <a:rPr lang="en-US" dirty="0"/>
+              <a:t>If that value is a feature, maybe it is better categorical. (??)</a:t>
+            </a:r>
+          </a:p>
+        </p:txBody>
+      </p:sp>
+      <p:pic>
+        <p:nvPicPr>
+          <p:cNvPr id="1026" name="Picture 2" descr="Fundamentals of Exploratory Data Analysis with Python Implementation">
+            <a:extLst>
+              <a:ext uri="{FF2B5EF4-FFF2-40B4-BE49-F238E27FC236}">
+                <a16:creationId xmlns:a16="http://schemas.microsoft.com/office/drawing/2014/main" id="{BC0AE3D8-EB56-C1D7-273C-DF74389A7933}"/>
+              </a:ext>
+            </a:extLst>
+          </p:cNvPr>
+          <p:cNvPicPr>
+            <a:picLocks noChangeAspect="1" noChangeArrowheads="1"/>
+          </p:cNvPicPr>
+          <p:nvPr/>
+        </p:nvPicPr>
+        <p:blipFill>
+          <a:blip r:embed="rId2">
+            <a:extLst>
+              <a:ext uri="{28A0092B-C50C-407E-A947-70E740481C1C}">
+                <a14:useLocalDpi xmlns:a14="http://schemas.microsoft.com/office/drawing/2010/main" val="0"/>
+              </a:ext>
+            </a:extLst>
+          </a:blip>
+          <a:srcRect/>
+          <a:stretch>
+            <a:fillRect/>
+          </a:stretch>
+        </p:blipFill>
+        <p:spPr bwMode="auto">
+          <a:xfrm>
+            <a:off x="180753" y="1853754"/>
+            <a:ext cx="8488526" cy="4203368"/>
+          </a:xfrm>
+          <a:prstGeom prst="rect">
+            <a:avLst/>
+          </a:prstGeom>
+          <a:noFill/>
+          <a:extLst>
+            <a:ext uri="{909E8E84-426E-40DD-AFC4-6F175D3DCCD1}">
+              <a14:hiddenFill xmlns:a14="http://schemas.microsoft.com/office/drawing/2010/main">
+                <a:solidFill>
+                  <a:srgbClr val="FFFFFF"/>
+                </a:solidFill>
+              </a14:hiddenFill>
+            </a:ext>
+          </a:extLst>
+        </p:spPr>
+      </p:pic>
+    </p:spTree>
+    <p:extLst>
+      <p:ext uri="{BB962C8B-B14F-4D97-AF65-F5344CB8AC3E}">
+        <p14:creationId xmlns:p14="http://schemas.microsoft.com/office/powerpoint/2010/main" val="1405714686"/>
+      </p:ext>
+    </p:extLst>
+  </p:cSld>
+  <p:clrMapOvr>
+    <a:masterClrMapping/>
+  </p:clrMapOvr>
+</p:sld>
+</file>
+
+<file path=ppt/slides/slide35.xml><?xml version="1.0" encoding="utf-8"?>
+<p:sld xmlns:a="http://schemas.openxmlformats.org/drawingml/2006/main" xmlns:r="http://schemas.openxmlformats.org/officeDocument/2006/relationships" xmlns:p="http://schemas.openxmlformats.org/presentationml/2006/main">
+  <p:cSld>
+    <p:spTree>
+      <p:nvGrpSpPr>
+        <p:cNvPr id="1" name=""/>
+        <p:cNvGrpSpPr/>
+        <p:nvPr/>
+      </p:nvGrpSpPr>
+      <p:grpSpPr>
+        <a:xfrm>
+          <a:off x="0" y="0"/>
+          <a:ext cx="0" cy="0"/>
+          <a:chOff x="0" y="0"/>
+          <a:chExt cx="0" cy="0"/>
+        </a:xfrm>
+      </p:grpSpPr>
+      <p:sp>
+        <p:nvSpPr>
+          <p:cNvPr id="2" name="Title 1">
+            <a:extLst>
+              <a:ext uri="{FF2B5EF4-FFF2-40B4-BE49-F238E27FC236}">
+                <a16:creationId xmlns:a16="http://schemas.microsoft.com/office/drawing/2014/main" id="{43CC361B-31A2-BBC7-8128-D8B8C25AD75B}"/>
+              </a:ext>
+            </a:extLst>
+          </p:cNvPr>
+          <p:cNvSpPr>
+            <a:spLocks noGrp="1"/>
+          </p:cNvSpPr>
+          <p:nvPr>
+            <p:ph type="title"/>
+          </p:nvPr>
+        </p:nvSpPr>
+        <p:spPr>
+          <a:xfrm>
+            <a:off x="1451580" y="804519"/>
+            <a:ext cx="3468084" cy="1049235"/>
+          </a:xfrm>
+        </p:spPr>
+        <p:txBody>
+          <a:bodyPr/>
+          <a:lstStyle/>
+          <a:p>
+            <a:r>
+              <a:rPr lang="en-US" dirty="0"/>
+              <a:t>Outliers and Categorical</a:t>
+            </a:r>
+          </a:p>
+        </p:txBody>
+      </p:sp>
+      <p:sp>
+        <p:nvSpPr>
+          <p:cNvPr id="3" name="Content Placeholder 2">
+            <a:extLst>
+              <a:ext uri="{FF2B5EF4-FFF2-40B4-BE49-F238E27FC236}">
+                <a16:creationId xmlns:a16="http://schemas.microsoft.com/office/drawing/2014/main" id="{6500D048-50A6-B407-5D37-96849F79C2CF}"/>
+              </a:ext>
+            </a:extLst>
+          </p:cNvPr>
+          <p:cNvSpPr>
+            <a:spLocks noGrp="1"/>
+          </p:cNvSpPr>
+          <p:nvPr>
+            <p:ph idx="1"/>
+          </p:nvPr>
+        </p:nvSpPr>
+        <p:spPr>
+          <a:xfrm>
+            <a:off x="1" y="2015732"/>
+            <a:ext cx="4805916" cy="3906603"/>
+          </a:xfrm>
+        </p:spPr>
+        <p:txBody>
+          <a:bodyPr/>
+          <a:lstStyle/>
+          <a:p>
+            <a:r>
+              <a:rPr lang="en-US" dirty="0"/>
+              <a:t>This data appears to have outliers. </a:t>
+            </a:r>
+          </a:p>
+          <a:p>
+            <a:r>
+              <a:rPr lang="en-US" dirty="0"/>
+              <a:t>The last column appears to be better as categorical. </a:t>
+            </a:r>
+          </a:p>
+          <a:p>
+            <a:r>
+              <a:rPr lang="en-US" dirty="0"/>
+              <a:t>The ‘hour’ column has a weird distribution – depending on what I am doing, this might matter. </a:t>
+            </a:r>
+          </a:p>
+        </p:txBody>
+      </p:sp>
+      <p:pic>
+        <p:nvPicPr>
+          <p:cNvPr id="3078" name="Picture 6" descr="distributions - How to interpret pairplots() - Cross Validated">
+            <a:extLst>
+              <a:ext uri="{FF2B5EF4-FFF2-40B4-BE49-F238E27FC236}">
+                <a16:creationId xmlns:a16="http://schemas.microsoft.com/office/drawing/2014/main" id="{03CF9A95-830B-82D9-D993-2BEF2843CF4D}"/>
+              </a:ext>
+            </a:extLst>
+          </p:cNvPr>
+          <p:cNvPicPr>
+            <a:picLocks noChangeAspect="1" noChangeArrowheads="1"/>
+          </p:cNvPicPr>
+          <p:nvPr/>
+        </p:nvPicPr>
+        <p:blipFill>
+          <a:blip r:embed="rId2">
+            <a:extLst>
+              <a:ext uri="{28A0092B-C50C-407E-A947-70E740481C1C}">
+                <a14:useLocalDpi xmlns:a14="http://schemas.microsoft.com/office/drawing/2010/main" val="0"/>
+              </a:ext>
+            </a:extLst>
+          </a:blip>
+          <a:srcRect/>
+          <a:stretch>
+            <a:fillRect/>
+          </a:stretch>
+        </p:blipFill>
+        <p:spPr bwMode="auto">
+          <a:xfrm>
+            <a:off x="4919663" y="0"/>
+            <a:ext cx="7272337" cy="6858000"/>
+          </a:xfrm>
+          <a:prstGeom prst="rect">
+            <a:avLst/>
+          </a:prstGeom>
+          <a:noFill/>
+          <a:extLst>
+            <a:ext uri="{909E8E84-426E-40DD-AFC4-6F175D3DCCD1}">
+              <a14:hiddenFill xmlns:a14="http://schemas.microsoft.com/office/drawing/2010/main">
+                <a:solidFill>
+                  <a:srgbClr val="FFFFFF"/>
+                </a:solidFill>
+              </a14:hiddenFill>
+            </a:ext>
+          </a:extLst>
+        </p:spPr>
+      </p:pic>
+    </p:spTree>
+    <p:extLst>
+      <p:ext uri="{BB962C8B-B14F-4D97-AF65-F5344CB8AC3E}">
+        <p14:creationId xmlns:p14="http://schemas.microsoft.com/office/powerpoint/2010/main" val="4043875854"/>
+      </p:ext>
+    </p:extLst>
+  </p:cSld>
+  <p:clrMapOvr>
+    <a:masterClrMapping/>
+  </p:clrMapOvr>
+</p:sld>
+</file>
+
+<file path=ppt/slides/slide36.xml><?xml version="1.0" encoding="utf-8"?>
+<p:sld xmlns:a="http://schemas.openxmlformats.org/drawingml/2006/main" xmlns:r="http://schemas.openxmlformats.org/officeDocument/2006/relationships" xmlns:p="http://schemas.openxmlformats.org/presentationml/2006/main">
+  <p:cSld>
+    <p:spTree>
+      <p:nvGrpSpPr>
+        <p:cNvPr id="1" name=""/>
+        <p:cNvGrpSpPr/>
+        <p:nvPr/>
+      </p:nvGrpSpPr>
+      <p:grpSpPr>
+        <a:xfrm>
+          <a:off x="0" y="0"/>
+          <a:ext cx="0" cy="0"/>
+          <a:chOff x="0" y="0"/>
+          <a:chExt cx="0" cy="0"/>
+        </a:xfrm>
+      </p:grpSpPr>
+      <p:sp>
+        <p:nvSpPr>
+          <p:cNvPr id="2" name="Title 1">
+            <a:extLst>
+              <a:ext uri="{FF2B5EF4-FFF2-40B4-BE49-F238E27FC236}">
                 <a16:creationId xmlns:a16="http://schemas.microsoft.com/office/drawing/2014/main" id="{A0A2B0D2-0D58-554E-D694-76BAC3DD2921}"/>
               </a:ext>
             </a:extLst>
@@ -8044,7 +9109,7 @@
           <p:cNvPr id="2" name="Title 1">
             <a:extLst>
               <a:ext uri="{FF2B5EF4-FFF2-40B4-BE49-F238E27FC236}">
-                <a16:creationId xmlns:a16="http://schemas.microsoft.com/office/drawing/2014/main" id="{490D845B-FF2C-F36D-DEF4-8E1B14E8A159}"/>
+                <a16:creationId xmlns:a16="http://schemas.microsoft.com/office/drawing/2014/main" id="{1CB807B9-A408-0E32-FE0A-E217779521F4}"/>
               </a:ext>
             </a:extLst>
           </p:cNvPr>
@@ -8062,7 +9127,7 @@
           <a:p>
             <a:r>
               <a:rPr lang="en-US" dirty="0"/>
-              <a:t>Reexamining Fit – R Squared</a:t>
+              <a:t>Error Aggregation</a:t>
             </a:r>
           </a:p>
         </p:txBody>
@@ -8072,7 +9137,7 @@
           <p:cNvPr id="3" name="Content Placeholder 2">
             <a:extLst>
               <a:ext uri="{FF2B5EF4-FFF2-40B4-BE49-F238E27FC236}">
-                <a16:creationId xmlns:a16="http://schemas.microsoft.com/office/drawing/2014/main" id="{D990A26F-9EB3-1F40-ED20-68B5F6887EA9}"/>
+                <a16:creationId xmlns:a16="http://schemas.microsoft.com/office/drawing/2014/main" id="{08793D39-7DD6-9D32-7E6C-40C6D0928D07}"/>
               </a:ext>
             </a:extLst>
           </p:cNvPr>
@@ -8083,45 +9148,20 @@
             <p:ph idx="1"/>
           </p:nvPr>
         </p:nvSpPr>
-        <p:spPr>
-          <a:xfrm>
-            <a:off x="1451579" y="2015732"/>
-            <a:ext cx="9603275" cy="4037749"/>
-          </a:xfrm>
-        </p:spPr>
-        <p:txBody>
-          <a:bodyPr/>
-          <a:lstStyle/>
-          <a:p>
-            <a:r>
-              <a:rPr lang="en-US" dirty="0"/>
-              <a:t>In predictive modeling we often use a different metric for quality along with RMSE – R2. </a:t>
-            </a:r>
-          </a:p>
-          <a:p>
-            <a:r>
-              <a:rPr lang="en-US" dirty="0"/>
-              <a:t>R squared, or R2 is the coefficient of determination. </a:t>
-            </a:r>
-          </a:p>
-          <a:p>
-            <a:pPr lvl="1"/>
-            <a:r>
-              <a:rPr lang="en-US" dirty="0"/>
-              <a:t>This measures the amount of variance that is explained by the model. </a:t>
-            </a:r>
-          </a:p>
-          <a:p>
-            <a:pPr lvl="1"/>
-            <a:r>
-              <a:rPr lang="en-US" dirty="0"/>
-              <a:t>It is also the square of the correlation. </a:t>
-            </a:r>
-          </a:p>
-          <a:p>
-            <a:r>
-              <a:rPr lang="en-US" dirty="0"/>
-              <a:t>I think it is easiest to think of it in terms of variance, in a few steps. </a:t>
+        <p:spPr/>
+        <p:txBody>
+          <a:bodyPr/>
+          <a:lstStyle/>
+          <a:p>
+            <a:r>
+              <a:rPr lang="en-US" dirty="0"/>
+              <a:t>We generally aggregate residuals into the RMSE/MSE. </a:t>
+            </a:r>
+          </a:p>
+          <a:p>
+            <a:r>
+              <a:rPr lang="en-US" dirty="0"/>
+              <a:t>Gives us an easy to use/compare results. </a:t>
             </a:r>
           </a:p>
         </p:txBody>
@@ -8129,7 +9169,7 @@
     </p:spTree>
     <p:extLst>
       <p:ext uri="{BB962C8B-B14F-4D97-AF65-F5344CB8AC3E}">
-        <p14:creationId xmlns:p14="http://schemas.microsoft.com/office/powerpoint/2010/main" val="2634301341"/>
+        <p14:creationId xmlns:p14="http://schemas.microsoft.com/office/powerpoint/2010/main" val="2884472938"/>
       </p:ext>
     </p:extLst>
   </p:cSld>
@@ -8161,7 +9201,7 @@
           <p:cNvPr id="2" name="Title 1">
             <a:extLst>
               <a:ext uri="{FF2B5EF4-FFF2-40B4-BE49-F238E27FC236}">
-                <a16:creationId xmlns:a16="http://schemas.microsoft.com/office/drawing/2014/main" id="{0507D6C5-A8AB-509C-41B6-10B5AF5271F7}"/>
+                <a16:creationId xmlns:a16="http://schemas.microsoft.com/office/drawing/2014/main" id="{B80A9F7B-C917-0049-6B96-87F3F8718A19}"/>
               </a:ext>
             </a:extLst>
           </p:cNvPr>
@@ -8172,156 +9212,121 @@
             <p:ph type="title"/>
           </p:nvPr>
         </p:nvSpPr>
+        <p:spPr/>
+        <p:txBody>
+          <a:bodyPr/>
+          <a:lstStyle/>
+          <a:p>
+            <a:r>
+              <a:rPr lang="en-US" dirty="0"/>
+              <a:t>R-Squared and Correlation</a:t>
+            </a:r>
+          </a:p>
+        </p:txBody>
+      </p:sp>
+      <p:sp>
+        <p:nvSpPr>
+          <p:cNvPr id="3" name="Content Placeholder 2">
+            <a:extLst>
+              <a:ext uri="{FF2B5EF4-FFF2-40B4-BE49-F238E27FC236}">
+                <a16:creationId xmlns:a16="http://schemas.microsoft.com/office/drawing/2014/main" id="{FF9D6732-C120-3874-132A-B061C0E5066F}"/>
+              </a:ext>
+            </a:extLst>
+          </p:cNvPr>
+          <p:cNvSpPr>
+            <a:spLocks noGrp="1"/>
+          </p:cNvSpPr>
+          <p:nvPr>
+            <p:ph idx="1"/>
+          </p:nvPr>
+        </p:nvSpPr>
         <p:spPr>
           <a:xfrm>
-            <a:off x="778477" y="804519"/>
-            <a:ext cx="10276378" cy="1049235"/>
-          </a:xfrm>
-        </p:spPr>
-        <p:txBody>
-          <a:bodyPr/>
-          <a:lstStyle/>
-          <a:p>
-            <a:r>
-              <a:rPr lang="en-US" dirty="0"/>
-              <a:t>Variance – Our data varies</a:t>
-            </a:r>
-          </a:p>
-        </p:txBody>
-      </p:sp>
-      <p:sp>
-        <p:nvSpPr>
-          <p:cNvPr id="3" name="Content Placeholder 2">
-            <a:extLst>
-              <a:ext uri="{FF2B5EF4-FFF2-40B4-BE49-F238E27FC236}">
-                <a16:creationId xmlns:a16="http://schemas.microsoft.com/office/drawing/2014/main" id="{C18B5CDD-C7C6-04CD-AA50-BDA0EAE527F8}"/>
-              </a:ext>
-            </a:extLst>
-          </p:cNvPr>
-          <p:cNvSpPr>
-            <a:spLocks noGrp="1"/>
-          </p:cNvSpPr>
-          <p:nvPr>
-            <p:ph idx="1"/>
-          </p:nvPr>
-        </p:nvSpPr>
-        <p:spPr>
-          <a:xfrm>
-            <a:off x="1201479" y="2015732"/>
-            <a:ext cx="9853375" cy="4037749"/>
-          </a:xfrm>
-        </p:spPr>
-        <p:txBody>
-          <a:bodyPr/>
-          <a:lstStyle/>
-          <a:p>
-            <a:r>
-              <a:rPr lang="en-US" dirty="0"/>
-              <a:t>We can think of our target, y, in terms of its variance. </a:t>
-            </a:r>
-          </a:p>
-          <a:p>
-            <a:pPr lvl="1"/>
-            <a:r>
-              <a:rPr lang="en-US" dirty="0"/>
-              <a:t>Y varies – it literally has different values for different x inputs. </a:t>
-            </a:r>
-          </a:p>
-          <a:p>
-            <a:pPr lvl="1"/>
-            <a:r>
-              <a:rPr lang="en-US" dirty="0"/>
-              <a:t>We can measure that amount of </a:t>
-            </a:r>
-            <a:r>
-              <a:rPr lang="en-US" dirty="0" err="1"/>
-              <a:t>varaiance</a:t>
-            </a:r>
-            <a:r>
-              <a:rPr lang="en-US" dirty="0"/>
-              <a:t> by measuring how far values are from the mean. </a:t>
-            </a:r>
-          </a:p>
-          <a:p>
-            <a:r>
-              <a:rPr lang="en-US" dirty="0"/>
-              <a:t>This is known as SST or sum of squares total. </a:t>
-            </a:r>
-          </a:p>
-          <a:p>
-            <a:pPr lvl="1"/>
-            <a:r>
-              <a:rPr lang="en-US" dirty="0"/>
-              <a:t>It’s also the top of the variance calculation. </a:t>
-            </a:r>
-          </a:p>
-          <a:p>
-            <a:pPr lvl="1"/>
-            <a:r>
-              <a:rPr lang="en-US" dirty="0"/>
-              <a:t>This measures how much the real values vary from the mean – a baseline. </a:t>
-            </a:r>
-          </a:p>
-          <a:p>
-            <a:pPr lvl="1"/>
-            <a:r>
-              <a:rPr lang="en-US" dirty="0"/>
-              <a:t>I.e. (thought model, not def.) the model is attempting to tell us Y, think of the default value for Y that it tells us to be the mean, this tells us how much the model must ‘move’ from that default. </a:t>
+            <a:off x="0" y="1853754"/>
+            <a:ext cx="5303847" cy="4272148"/>
+          </a:xfrm>
+        </p:spPr>
+        <p:txBody>
+          <a:bodyPr>
+            <a:normAutofit/>
+          </a:bodyPr>
+          <a:lstStyle/>
+          <a:p>
+            <a:r>
+              <a:rPr lang="en-US" dirty="0"/>
+              <a:t>Remember the correlation – relationship between X and Y. </a:t>
+            </a:r>
+          </a:p>
+          <a:p>
+            <a:r>
+              <a:rPr lang="en-US" dirty="0"/>
+              <a:t>The larger the magnitude of correlation, the ‘tighter’ the relationship. </a:t>
+            </a:r>
+          </a:p>
+          <a:p>
+            <a:r>
+              <a:rPr lang="en-US" dirty="0"/>
+              <a:t>R-squared magnifies this. </a:t>
+            </a:r>
+          </a:p>
+          <a:p>
+            <a:pPr lvl="1"/>
+            <a:r>
+              <a:rPr lang="en-US" dirty="0"/>
+              <a:t>Drops the residual and ‘lessens’ the raw numerical values of correlation. </a:t>
+            </a:r>
+          </a:p>
+          <a:p>
+            <a:pPr lvl="1"/>
+            <a:r>
+              <a:rPr lang="en-US" dirty="0"/>
+              <a:t>I.e. you need to be </a:t>
+            </a:r>
+            <a:r>
+              <a:rPr lang="en-US" i="1" dirty="0"/>
+              <a:t>really</a:t>
+            </a:r>
+            <a:r>
+              <a:rPr lang="en-US" dirty="0"/>
+              <a:t> correlated to have a high r squared. </a:t>
             </a:r>
           </a:p>
         </p:txBody>
       </p:sp>
       <p:pic>
         <p:nvPicPr>
-          <p:cNvPr id="3074" name="Picture 2" descr="SST = SSR + SSE in regression ...">
+          <p:cNvPr id="4" name="Picture 3" descr="How to interpret an R of .736 and R2 of 0.54 - Quora">
             <a:extLst>
               <a:ext uri="{FF2B5EF4-FFF2-40B4-BE49-F238E27FC236}">
-                <a16:creationId xmlns:a16="http://schemas.microsoft.com/office/drawing/2014/main" id="{81384808-AB71-34AB-1FA1-CF4B9F5A7008}"/>
+                <a16:creationId xmlns:a16="http://schemas.microsoft.com/office/drawing/2014/main" id="{4A2CE8D1-1C68-EB68-3E59-D9AA5BAEAB6F}"/>
               </a:ext>
             </a:extLst>
           </p:cNvPr>
           <p:cNvPicPr>
-            <a:picLocks noChangeAspect="1" noChangeArrowheads="1"/>
+            <a:picLocks noChangeAspect="1"/>
           </p:cNvPicPr>
           <p:nvPr/>
         </p:nvPicPr>
         <p:blipFill>
-          <a:blip r:embed="rId2">
-            <a:extLst>
-              <a:ext uri="{28A0092B-C50C-407E-A947-70E740481C1C}">
-                <a14:useLocalDpi xmlns:a14="http://schemas.microsoft.com/office/drawing/2010/main" val="0"/>
-              </a:ext>
-            </a:extLst>
-          </a:blip>
-          <a:srcRect/>
+          <a:blip r:embed="rId2"/>
           <a:stretch>
             <a:fillRect/>
           </a:stretch>
         </p:blipFill>
-        <p:spPr bwMode="auto">
-          <a:xfrm>
-            <a:off x="7264400" y="202754"/>
-            <a:ext cx="4927600" cy="1651000"/>
+        <p:spPr>
+          <a:xfrm>
+            <a:off x="5303847" y="1853754"/>
+            <a:ext cx="6723702" cy="4110170"/>
           </a:xfrm>
           <a:prstGeom prst="rect">
             <a:avLst/>
           </a:prstGeom>
-          <a:noFill/>
-          <a:extLst>
-            <a:ext uri="{909E8E84-426E-40DD-AFC4-6F175D3DCCD1}">
-              <a14:hiddenFill xmlns:a14="http://schemas.microsoft.com/office/drawing/2010/main">
-                <a:solidFill>
-                  <a:srgbClr val="FFFFFF"/>
-                </a:solidFill>
-              </a14:hiddenFill>
-            </a:ext>
-          </a:extLst>
         </p:spPr>
       </p:pic>
     </p:spTree>
     <p:extLst>
       <p:ext uri="{BB962C8B-B14F-4D97-AF65-F5344CB8AC3E}">
-        <p14:creationId xmlns:p14="http://schemas.microsoft.com/office/powerpoint/2010/main" val="3189705387"/>
+        <p14:creationId xmlns:p14="http://schemas.microsoft.com/office/powerpoint/2010/main" val="2331100617"/>
       </p:ext>
     </p:extLst>
   </p:cSld>
@@ -8353,7 +9358,7 @@
           <p:cNvPr id="2" name="Title 1">
             <a:extLst>
               <a:ext uri="{FF2B5EF4-FFF2-40B4-BE49-F238E27FC236}">
-                <a16:creationId xmlns:a16="http://schemas.microsoft.com/office/drawing/2014/main" id="{7B5929C5-3292-71F4-42DC-C1786154E484}"/>
+                <a16:creationId xmlns:a16="http://schemas.microsoft.com/office/drawing/2014/main" id="{490D845B-FF2C-F36D-DEF4-8E1B14E8A159}"/>
               </a:ext>
             </a:extLst>
           </p:cNvPr>
@@ -8364,146 +9369,81 @@
             <p:ph type="title"/>
           </p:nvPr>
         </p:nvSpPr>
+        <p:spPr/>
+        <p:txBody>
+          <a:bodyPr/>
+          <a:lstStyle/>
+          <a:p>
+            <a:r>
+              <a:rPr lang="en-US" dirty="0"/>
+              <a:t>Reexamining Fit – R Squared</a:t>
+            </a:r>
+          </a:p>
+        </p:txBody>
+      </p:sp>
+      <p:sp>
+        <p:nvSpPr>
+          <p:cNvPr id="3" name="Content Placeholder 2">
+            <a:extLst>
+              <a:ext uri="{FF2B5EF4-FFF2-40B4-BE49-F238E27FC236}">
+                <a16:creationId xmlns:a16="http://schemas.microsoft.com/office/drawing/2014/main" id="{D990A26F-9EB3-1F40-ED20-68B5F6887EA9}"/>
+              </a:ext>
+            </a:extLst>
+          </p:cNvPr>
+          <p:cNvSpPr>
+            <a:spLocks noGrp="1"/>
+          </p:cNvSpPr>
+          <p:nvPr>
+            <p:ph idx="1"/>
+          </p:nvPr>
+        </p:nvSpPr>
         <p:spPr>
           <a:xfrm>
-            <a:off x="7311974" y="804519"/>
-            <a:ext cx="3742880" cy="1049235"/>
-          </a:xfrm>
-        </p:spPr>
-        <p:txBody>
-          <a:bodyPr/>
-          <a:lstStyle/>
-          <a:p>
-            <a:r>
-              <a:rPr lang="en-US" dirty="0"/>
-              <a:t>Break that apart</a:t>
-            </a:r>
-          </a:p>
-        </p:txBody>
-      </p:sp>
-      <p:sp>
-        <p:nvSpPr>
-          <p:cNvPr id="3" name="Content Placeholder 2">
-            <a:extLst>
-              <a:ext uri="{FF2B5EF4-FFF2-40B4-BE49-F238E27FC236}">
-                <a16:creationId xmlns:a16="http://schemas.microsoft.com/office/drawing/2014/main" id="{B16B9A2D-7550-9738-8BDF-F45827EFBF3B}"/>
-              </a:ext>
-            </a:extLst>
-          </p:cNvPr>
-          <p:cNvSpPr>
-            <a:spLocks noGrp="1"/>
-          </p:cNvSpPr>
-          <p:nvPr>
-            <p:ph idx="1"/>
-          </p:nvPr>
-        </p:nvSpPr>
-        <p:spPr>
-          <a:xfrm>
-            <a:off x="7311974" y="2015732"/>
-            <a:ext cx="4711150" cy="3767230"/>
-          </a:xfrm>
-        </p:spPr>
-        <p:txBody>
-          <a:bodyPr/>
-          <a:lstStyle/>
-          <a:p>
-            <a:r>
-              <a:rPr lang="en-US" dirty="0"/>
-              <a:t>The data varies from the mean – SST. </a:t>
-            </a:r>
-          </a:p>
-          <a:p>
-            <a:pPr lvl="1"/>
-            <a:r>
-              <a:rPr lang="en-US" dirty="0"/>
-              <a:t>Mean is baseline, departures vary away.</a:t>
-            </a:r>
-          </a:p>
-          <a:p>
-            <a:r>
-              <a:rPr lang="en-US" dirty="0"/>
-              <a:t>Some variance ’explained’ by the model. </a:t>
-            </a:r>
-          </a:p>
-          <a:p>
-            <a:pPr lvl="1"/>
-            <a:r>
-              <a:rPr lang="en-US" dirty="0"/>
-              <a:t>Model gets us close to the value. </a:t>
-            </a:r>
-          </a:p>
-          <a:p>
-            <a:r>
-              <a:rPr lang="en-US" dirty="0"/>
-              <a:t>The rest is the residual – error. </a:t>
-            </a:r>
-          </a:p>
-          <a:p>
-            <a:pPr lvl="1"/>
-            <a:r>
-              <a:rPr lang="en-US" dirty="0"/>
-              <a:t>The model got us closer, but we are still this far away. </a:t>
-            </a:r>
-          </a:p>
-          <a:p>
-            <a:r>
-              <a:rPr lang="en-US" dirty="0"/>
-              <a:t>The closer the model is, the more SSR. </a:t>
-            </a:r>
-          </a:p>
-        </p:txBody>
-      </p:sp>
-      <p:pic>
-        <p:nvPicPr>
-          <p:cNvPr id="4098" name="Picture 2" descr="Statistical Regression SSR / SSE / SST | Dr. Walid Soula | Artificial  Intelligence in Plain English">
-            <a:extLst>
-              <a:ext uri="{FF2B5EF4-FFF2-40B4-BE49-F238E27FC236}">
-                <a16:creationId xmlns:a16="http://schemas.microsoft.com/office/drawing/2014/main" id="{4E772850-0C7A-856C-3064-7B5F93AA8581}"/>
-              </a:ext>
-            </a:extLst>
-          </p:cNvPr>
-          <p:cNvPicPr>
-            <a:picLocks noChangeAspect="1" noChangeArrowheads="1"/>
-          </p:cNvPicPr>
-          <p:nvPr/>
-        </p:nvPicPr>
-        <p:blipFill>
-          <a:blip r:embed="rId2">
-            <a:extLst>
-              <a:ext uri="{28A0092B-C50C-407E-A947-70E740481C1C}">
-                <a14:useLocalDpi xmlns:a14="http://schemas.microsoft.com/office/drawing/2010/main" val="0"/>
-              </a:ext>
-            </a:extLst>
-          </a:blip>
-          <a:srcRect/>
-          <a:stretch>
-            <a:fillRect/>
-          </a:stretch>
-        </p:blipFill>
-        <p:spPr bwMode="auto">
-          <a:xfrm>
-            <a:off x="0" y="580767"/>
-            <a:ext cx="7311974" cy="5202195"/>
-          </a:xfrm>
-          <a:prstGeom prst="rect">
-            <a:avLst/>
-          </a:prstGeom>
-          <a:noFill/>
-          <a:extLst>
-            <a:ext uri="{909E8E84-426E-40DD-AFC4-6F175D3DCCD1}">
-              <a14:hiddenFill xmlns:a14="http://schemas.microsoft.com/office/drawing/2010/main">
-                <a:solidFill>
-                  <a:srgbClr val="FFFFFF"/>
-                </a:solidFill>
-              </a14:hiddenFill>
-            </a:ext>
-          </a:extLst>
-        </p:spPr>
-      </p:pic>
+            <a:off x="1451579" y="2015732"/>
+            <a:ext cx="9603275" cy="4037749"/>
+          </a:xfrm>
+        </p:spPr>
+        <p:txBody>
+          <a:bodyPr/>
+          <a:lstStyle/>
+          <a:p>
+            <a:r>
+              <a:rPr lang="en-US" dirty="0"/>
+              <a:t>In predictive modeling we often use a different metric for quality along with RMSE – R2. </a:t>
+            </a:r>
+          </a:p>
+          <a:p>
+            <a:r>
+              <a:rPr lang="en-US" dirty="0"/>
+              <a:t>R squared, or R2 is the coefficient of determination. </a:t>
+            </a:r>
+          </a:p>
+          <a:p>
+            <a:pPr lvl="1"/>
+            <a:r>
+              <a:rPr lang="en-US" dirty="0"/>
+              <a:t>This measures the amount of variance that is explained by the model. </a:t>
+            </a:r>
+          </a:p>
+          <a:p>
+            <a:pPr lvl="1"/>
+            <a:r>
+              <a:rPr lang="en-US" dirty="0"/>
+              <a:t>It is also the square of the correlation. </a:t>
+            </a:r>
+          </a:p>
+          <a:p>
+            <a:r>
+              <a:rPr lang="en-US" dirty="0"/>
+              <a:t>I think it is easiest to think of it in terms of variance, in a few steps. </a:t>
+            </a:r>
+          </a:p>
+        </p:txBody>
+      </p:sp>
     </p:spTree>
     <p:extLst>
       <p:ext uri="{BB962C8B-B14F-4D97-AF65-F5344CB8AC3E}">
-        <p14:creationId xmlns:p14="http://schemas.microsoft.com/office/powerpoint/2010/main" val="3181117461"/>
+        <p14:creationId xmlns:p14="http://schemas.microsoft.com/office/powerpoint/2010/main" val="2634301341"/>
       </p:ext>
     </p:extLst>
   </p:cSld>

--- a/reference_material/slides/021_r_squared.pptx
+++ b/reference_material/slides/021_r_squared.pptx
@@ -21,26 +21,28 @@
     <p:sldId id="262" r:id="rId15"/>
     <p:sldId id="288" r:id="rId16"/>
     <p:sldId id="264" r:id="rId17"/>
-    <p:sldId id="265" r:id="rId18"/>
-    <p:sldId id="266" r:id="rId19"/>
-    <p:sldId id="277" r:id="rId20"/>
-    <p:sldId id="267" r:id="rId21"/>
-    <p:sldId id="268" r:id="rId22"/>
-    <p:sldId id="269" r:id="rId23"/>
-    <p:sldId id="290" r:id="rId24"/>
-    <p:sldId id="270" r:id="rId25"/>
-    <p:sldId id="291" r:id="rId26"/>
-    <p:sldId id="271" r:id="rId27"/>
-    <p:sldId id="272" r:id="rId28"/>
-    <p:sldId id="273" r:id="rId29"/>
-    <p:sldId id="274" r:id="rId30"/>
-    <p:sldId id="275" r:id="rId31"/>
-    <p:sldId id="278" r:id="rId32"/>
-    <p:sldId id="281" r:id="rId33"/>
-    <p:sldId id="279" r:id="rId34"/>
-    <p:sldId id="280" r:id="rId35"/>
-    <p:sldId id="282" r:id="rId36"/>
-    <p:sldId id="283" r:id="rId37"/>
+    <p:sldId id="303" r:id="rId18"/>
+    <p:sldId id="265" r:id="rId19"/>
+    <p:sldId id="302" r:id="rId20"/>
+    <p:sldId id="266" r:id="rId21"/>
+    <p:sldId id="277" r:id="rId22"/>
+    <p:sldId id="267" r:id="rId23"/>
+    <p:sldId id="268" r:id="rId24"/>
+    <p:sldId id="269" r:id="rId25"/>
+    <p:sldId id="290" r:id="rId26"/>
+    <p:sldId id="270" r:id="rId27"/>
+    <p:sldId id="291" r:id="rId28"/>
+    <p:sldId id="271" r:id="rId29"/>
+    <p:sldId id="272" r:id="rId30"/>
+    <p:sldId id="273" r:id="rId31"/>
+    <p:sldId id="274" r:id="rId32"/>
+    <p:sldId id="275" r:id="rId33"/>
+    <p:sldId id="278" r:id="rId34"/>
+    <p:sldId id="281" r:id="rId35"/>
+    <p:sldId id="279" r:id="rId36"/>
+    <p:sldId id="280" r:id="rId37"/>
+    <p:sldId id="282" r:id="rId38"/>
+    <p:sldId id="283" r:id="rId39"/>
   </p:sldIdLst>
   <p:sldSz cx="12192000" cy="6858000"/>
   <p:notesSz cx="6858000" cy="9144000"/>
@@ -5071,7 +5073,7 @@
           <p:cNvPr id="2" name="Title 1">
             <a:extLst>
               <a:ext uri="{FF2B5EF4-FFF2-40B4-BE49-F238E27FC236}">
-                <a16:creationId xmlns:a16="http://schemas.microsoft.com/office/drawing/2014/main" id="{6BF65C20-A3DB-CC86-7479-60674AF383A8}"/>
+                <a16:creationId xmlns:a16="http://schemas.microsoft.com/office/drawing/2014/main" id="{94B7870C-E75F-7572-00B0-C2CBC05281AC}"/>
               </a:ext>
             </a:extLst>
           </p:cNvPr>
@@ -5089,7 +5091,7 @@
           <a:p>
             <a:r>
               <a:rPr lang="en-US" dirty="0"/>
-              <a:t>Multiple Inputs for X</a:t>
+              <a:t>And a Slight Adjustment</a:t>
             </a:r>
           </a:p>
         </p:txBody>
@@ -5099,7 +5101,7 @@
           <p:cNvPr id="3" name="Content Placeholder 2">
             <a:extLst>
               <a:ext uri="{FF2B5EF4-FFF2-40B4-BE49-F238E27FC236}">
-                <a16:creationId xmlns:a16="http://schemas.microsoft.com/office/drawing/2014/main" id="{529EEFEB-DF04-7EAE-3754-CD99255770D5}"/>
+                <a16:creationId xmlns:a16="http://schemas.microsoft.com/office/drawing/2014/main" id="{DA9EEE06-5CBE-0CC7-952B-B33FC9F4A814}"/>
               </a:ext>
             </a:extLst>
           </p:cNvPr>
@@ -5122,68 +5124,90 @@
           <a:p>
             <a:r>
               <a:rPr lang="en-US" dirty="0"/>
-              <a:t>In most cases, we have several inputs to predict one output. </a:t>
-            </a:r>
-          </a:p>
-          <a:p>
-            <a:pPr lvl="1"/>
-            <a:r>
-              <a:rPr lang="en-US" dirty="0"/>
-              <a:t>E.g. a loan may take in income, age, profession, credit… to predict interest rate. </a:t>
-            </a:r>
-          </a:p>
-          <a:p>
-            <a:pPr lvl="1"/>
-            <a:r>
-              <a:rPr lang="en-US" dirty="0"/>
-              <a:t>Real scenarios can have thousands or millions (image, language, genetics…)</a:t>
-            </a:r>
-          </a:p>
-          <a:p>
-            <a:r>
-              <a:rPr lang="en-US" dirty="0"/>
-              <a:t>The more X inputs we have (assuming relevance), the higher our ceiling is.</a:t>
-            </a:r>
-          </a:p>
-          <a:p>
-            <a:pPr lvl="1"/>
-            <a:r>
-              <a:rPr lang="en-US" dirty="0"/>
-              <a:t>We can capture more of the SST into the model. </a:t>
-            </a:r>
-          </a:p>
-          <a:p>
-            <a:r>
-              <a:rPr lang="en-US" dirty="0"/>
-              <a:t>For us, not all that much changes:</a:t>
-            </a:r>
-          </a:p>
-          <a:p>
-            <a:pPr lvl="1"/>
-            <a:r>
-              <a:rPr lang="en-US" dirty="0"/>
-              <a:t>Data is prepared and shaped the same, X is just wider. </a:t>
-            </a:r>
-          </a:p>
-          <a:p>
-            <a:pPr lvl="1"/>
-            <a:r>
-              <a:rPr lang="en-US" dirty="0"/>
-              <a:t>Sklearn will handle the details for us. </a:t>
-            </a:r>
-          </a:p>
-          <a:p>
-            <a:r>
-              <a:rPr lang="en-US" dirty="0"/>
-              <a:t>We often call the x values features, and the y value the target. </a:t>
-            </a:r>
-          </a:p>
-        </p:txBody>
-      </p:sp>
+              <a:t>You may see adjusted R2 around. </a:t>
+            </a:r>
+          </a:p>
+          <a:p>
+            <a:r>
+              <a:rPr lang="en-US" dirty="0"/>
+              <a:t>R2 doesn’t account for useless predictors. </a:t>
+            </a:r>
+          </a:p>
+          <a:p>
+            <a:pPr lvl="1"/>
+            <a:r>
+              <a:rPr lang="en-US" dirty="0"/>
+              <a:t>E.g. if you add phone number as an input to the weight prediction model. </a:t>
+            </a:r>
+          </a:p>
+          <a:p>
+            <a:r>
+              <a:rPr lang="en-US" dirty="0"/>
+              <a:t>Adding features with no predictive value won’t reduce R2. </a:t>
+            </a:r>
+          </a:p>
+          <a:p>
+            <a:r>
+              <a:rPr lang="en-US" dirty="0"/>
+              <a:t>Adjusted R2 corrects for number of features. </a:t>
+            </a:r>
+          </a:p>
+          <a:p>
+            <a:pPr lvl="1"/>
+            <a:r>
+              <a:rPr lang="en-US" dirty="0"/>
+              <a:t>Goes down if we add a feature that doesn’t “help enough”. </a:t>
+            </a:r>
+          </a:p>
+          <a:p>
+            <a:pPr lvl="1"/>
+            <a:r>
+              <a:rPr lang="en-US" dirty="0"/>
+              <a:t>A.k.a. model must overcome the penalty of k+1 to ‘justify’ adding a feature. </a:t>
+            </a:r>
+          </a:p>
+          <a:p>
+            <a:r>
+              <a:rPr lang="en-US" dirty="0"/>
+              <a:t>We don’t use this directly all that much, but we’ll look at it more in tuning. </a:t>
+            </a:r>
+          </a:p>
+        </p:txBody>
+      </p:sp>
+      <p:pic>
+        <p:nvPicPr>
+          <p:cNvPr id="4" name="Picture 3">
+            <a:extLst>
+              <a:ext uri="{FF2B5EF4-FFF2-40B4-BE49-F238E27FC236}">
+                <a16:creationId xmlns:a16="http://schemas.microsoft.com/office/drawing/2014/main" id="{1CE30E04-E22F-B627-E30D-72859FD21448}"/>
+              </a:ext>
+            </a:extLst>
+          </p:cNvPr>
+          <p:cNvPicPr>
+            <a:picLocks noChangeAspect="1"/>
+          </p:cNvPicPr>
+          <p:nvPr/>
+        </p:nvPicPr>
+        <p:blipFill>
+          <a:blip r:embed="rId2"/>
+          <a:stretch>
+            <a:fillRect/>
+          </a:stretch>
+        </p:blipFill>
+        <p:spPr>
+          <a:xfrm>
+            <a:off x="7003535" y="804519"/>
+            <a:ext cx="5080000" cy="1752600"/>
+          </a:xfrm>
+          <a:prstGeom prst="rect">
+            <a:avLst/>
+          </a:prstGeom>
+        </p:spPr>
+      </p:pic>
     </p:spTree>
     <p:extLst>
       <p:ext uri="{BB962C8B-B14F-4D97-AF65-F5344CB8AC3E}">
-        <p14:creationId xmlns:p14="http://schemas.microsoft.com/office/powerpoint/2010/main" val="562453709"/>
+        <p14:creationId xmlns:p14="http://schemas.microsoft.com/office/powerpoint/2010/main" val="1327157146"/>
       </p:ext>
     </p:extLst>
   </p:cSld>
@@ -5215,7 +5239,7 @@
           <p:cNvPr id="2" name="Title 1">
             <a:extLst>
               <a:ext uri="{FF2B5EF4-FFF2-40B4-BE49-F238E27FC236}">
-                <a16:creationId xmlns:a16="http://schemas.microsoft.com/office/drawing/2014/main" id="{EAACAC41-7560-550A-22C7-25D1F869843F}"/>
+                <a16:creationId xmlns:a16="http://schemas.microsoft.com/office/drawing/2014/main" id="{6BF65C20-A3DB-CC86-7479-60674AF383A8}"/>
               </a:ext>
             </a:extLst>
           </p:cNvPr>
@@ -5233,7 +5257,7 @@
           <a:p>
             <a:r>
               <a:rPr lang="en-US" dirty="0"/>
-              <a:t>What’s going on in Multiple Regression?</a:t>
+              <a:t>Multiple Inputs for X</a:t>
             </a:r>
           </a:p>
         </p:txBody>
@@ -5243,7 +5267,7 @@
           <p:cNvPr id="3" name="Content Placeholder 2">
             <a:extLst>
               <a:ext uri="{FF2B5EF4-FFF2-40B4-BE49-F238E27FC236}">
-                <a16:creationId xmlns:a16="http://schemas.microsoft.com/office/drawing/2014/main" id="{57AB1097-754F-68CB-361F-23574EA1DCB4}"/>
+                <a16:creationId xmlns:a16="http://schemas.microsoft.com/office/drawing/2014/main" id="{529EEFEB-DF04-7EAE-3754-CD99255770D5}"/>
               </a:ext>
             </a:extLst>
           </p:cNvPr>
@@ -5256,111 +5280,78 @@
         </p:nvSpPr>
         <p:spPr>
           <a:xfrm>
-            <a:off x="7699975" y="2015732"/>
-            <a:ext cx="4341256" cy="3836773"/>
-          </a:xfrm>
-        </p:spPr>
-        <p:txBody>
-          <a:bodyPr/>
-          <a:lstStyle/>
-          <a:p>
-            <a:r>
-              <a:rPr lang="en-US" dirty="0"/>
-              <a:t>The concepts are identical to 1 X. </a:t>
-            </a:r>
-          </a:p>
-          <a:p>
-            <a:pPr lvl="1"/>
-            <a:r>
-              <a:rPr lang="en-US" dirty="0"/>
-              <a:t>We are still predicting Y. </a:t>
-            </a:r>
-          </a:p>
-          <a:p>
-            <a:pPr lvl="1"/>
-            <a:r>
-              <a:rPr lang="en-US" dirty="0"/>
-              <a:t>The line becomes a plane. </a:t>
-            </a:r>
-          </a:p>
-          <a:p>
-            <a:pPr lvl="1"/>
-            <a:r>
-              <a:rPr lang="en-US" dirty="0"/>
-              <a:t>The equation gains a term. </a:t>
-            </a:r>
-          </a:p>
-          <a:p>
-            <a:r>
-              <a:rPr lang="en-US" dirty="0"/>
-              <a:t>This extends to N dimensions. </a:t>
-            </a:r>
-          </a:p>
-          <a:p>
-            <a:r>
-              <a:rPr lang="en-US" dirty="0"/>
-              <a:t>The higher dimension, the more complex a thing we can predict. </a:t>
-            </a:r>
-          </a:p>
-          <a:p>
-            <a:r>
-              <a:rPr lang="en-US" dirty="0"/>
-              <a:t>We can see why outliers can hurt!</a:t>
-            </a:r>
-          </a:p>
-        </p:txBody>
-      </p:sp>
-      <p:pic>
-        <p:nvPicPr>
-          <p:cNvPr id="7170" name="Picture 2" descr="The regression model in a 3D space. A multi-variable regression model... |  Download Scientific Diagram">
-            <a:extLst>
-              <a:ext uri="{FF2B5EF4-FFF2-40B4-BE49-F238E27FC236}">
-                <a16:creationId xmlns:a16="http://schemas.microsoft.com/office/drawing/2014/main" id="{9402E54C-1A01-3FE9-0EC1-8CCB8291CAB1}"/>
-              </a:ext>
-            </a:extLst>
-          </p:cNvPr>
-          <p:cNvPicPr>
-            <a:picLocks noChangeAspect="1" noChangeArrowheads="1"/>
-          </p:cNvPicPr>
-          <p:nvPr/>
-        </p:nvPicPr>
-        <p:blipFill>
-          <a:blip r:embed="rId2">
-            <a:extLst>
-              <a:ext uri="{28A0092B-C50C-407E-A947-70E740481C1C}">
-                <a14:useLocalDpi xmlns:a14="http://schemas.microsoft.com/office/drawing/2010/main" val="0"/>
-              </a:ext>
-            </a:extLst>
-          </a:blip>
-          <a:srcRect/>
-          <a:stretch>
-            <a:fillRect/>
-          </a:stretch>
-        </p:blipFill>
-        <p:spPr bwMode="auto">
-          <a:xfrm>
-            <a:off x="150769" y="2015732"/>
-            <a:ext cx="7549206" cy="3836773"/>
-          </a:xfrm>
-          <a:prstGeom prst="rect">
-            <a:avLst/>
-          </a:prstGeom>
-          <a:noFill/>
-          <a:extLst>
-            <a:ext uri="{909E8E84-426E-40DD-AFC4-6F175D3DCCD1}">
-              <a14:hiddenFill xmlns:a14="http://schemas.microsoft.com/office/drawing/2010/main">
-                <a:solidFill>
-                  <a:srgbClr val="FFFFFF"/>
-                </a:solidFill>
-              </a14:hiddenFill>
-            </a:ext>
-          </a:extLst>
-        </p:spPr>
-      </p:pic>
+            <a:off x="1451579" y="1853754"/>
+            <a:ext cx="9603275" cy="4199727"/>
+          </a:xfrm>
+        </p:spPr>
+        <p:txBody>
+          <a:bodyPr/>
+          <a:lstStyle/>
+          <a:p>
+            <a:r>
+              <a:rPr lang="en-US" dirty="0"/>
+              <a:t>In most cases, we have several inputs to predict one output. </a:t>
+            </a:r>
+          </a:p>
+          <a:p>
+            <a:pPr lvl="1"/>
+            <a:r>
+              <a:rPr lang="en-US" dirty="0"/>
+              <a:t>E.g. a loan may take in income, age, profession, credit… to predict interest rate. </a:t>
+            </a:r>
+          </a:p>
+          <a:p>
+            <a:pPr lvl="1"/>
+            <a:r>
+              <a:rPr lang="en-US" dirty="0"/>
+              <a:t>Real scenarios can have thousands or millions (image, language, genetics…)</a:t>
+            </a:r>
+          </a:p>
+          <a:p>
+            <a:r>
+              <a:rPr lang="en-US" dirty="0"/>
+              <a:t>The more X inputs we have (assuming relevance), the higher our ceiling is.</a:t>
+            </a:r>
+          </a:p>
+          <a:p>
+            <a:pPr lvl="1"/>
+            <a:r>
+              <a:rPr lang="en-US" dirty="0"/>
+              <a:t>We can capture more of the SST into the model. </a:t>
+            </a:r>
+          </a:p>
+          <a:p>
+            <a:r>
+              <a:rPr lang="en-US" dirty="0"/>
+              <a:t>For us, not all that much changes:</a:t>
+            </a:r>
+          </a:p>
+          <a:p>
+            <a:pPr lvl="1"/>
+            <a:r>
+              <a:rPr lang="en-US" dirty="0"/>
+              <a:t>Data is prepared and shaped the same, X is just wider. </a:t>
+            </a:r>
+          </a:p>
+          <a:p>
+            <a:pPr lvl="1"/>
+            <a:r>
+              <a:rPr lang="en-US" dirty="0"/>
+              <a:t>Sklearn will handle the details for us. </a:t>
+            </a:r>
+          </a:p>
+          <a:p>
+            <a:r>
+              <a:rPr lang="en-US" dirty="0"/>
+              <a:t>We often call the x values features, and the y value the target. </a:t>
+            </a:r>
+          </a:p>
+        </p:txBody>
+      </p:sp>
     </p:spTree>
     <p:extLst>
       <p:ext uri="{BB962C8B-B14F-4D97-AF65-F5344CB8AC3E}">
-        <p14:creationId xmlns:p14="http://schemas.microsoft.com/office/powerpoint/2010/main" val="2542446162"/>
+        <p14:creationId xmlns:p14="http://schemas.microsoft.com/office/powerpoint/2010/main" val="562453709"/>
       </p:ext>
     </p:extLst>
   </p:cSld>
@@ -5392,7 +5383,7 @@
           <p:cNvPr id="2" name="Title 1">
             <a:extLst>
               <a:ext uri="{FF2B5EF4-FFF2-40B4-BE49-F238E27FC236}">
-                <a16:creationId xmlns:a16="http://schemas.microsoft.com/office/drawing/2014/main" id="{9C40C123-02E6-FE33-9E1E-DF50EB9A49CA}"/>
+                <a16:creationId xmlns:a16="http://schemas.microsoft.com/office/drawing/2014/main" id="{6B816EFE-DFDC-95A9-6A58-147B03C6F388}"/>
               </a:ext>
             </a:extLst>
           </p:cNvPr>
@@ -5410,7 +5401,7 @@
           <a:p>
             <a:r>
               <a:rPr lang="en-US" dirty="0"/>
-              <a:t>In practice</a:t>
+              <a:t>Add Some More D</a:t>
             </a:r>
           </a:p>
         </p:txBody>
@@ -5420,7 +5411,7 @@
           <p:cNvPr id="3" name="Content Placeholder 2">
             <a:extLst>
               <a:ext uri="{FF2B5EF4-FFF2-40B4-BE49-F238E27FC236}">
-                <a16:creationId xmlns:a16="http://schemas.microsoft.com/office/drawing/2014/main" id="{8EABEBED-8085-1448-7245-38595630A521}"/>
+                <a16:creationId xmlns:a16="http://schemas.microsoft.com/office/drawing/2014/main" id="{97B86D47-A94F-5B56-23C0-53A134FB5AB7}"/>
               </a:ext>
             </a:extLst>
           </p:cNvPr>
@@ -5433,102 +5424,87 @@
         </p:nvSpPr>
         <p:spPr>
           <a:xfrm>
-            <a:off x="1451579" y="2015732"/>
-            <a:ext cx="5027193" cy="4037749"/>
-          </a:xfrm>
-        </p:spPr>
-        <p:txBody>
-          <a:bodyPr/>
-          <a:lstStyle/>
-          <a:p>
-            <a:r>
-              <a:rPr lang="en-US" dirty="0"/>
-              <a:t>In code very little needs to change. </a:t>
-            </a:r>
-          </a:p>
-          <a:p>
-            <a:pPr lvl="1"/>
-            <a:r>
-              <a:rPr lang="en-US" dirty="0"/>
-              <a:t>If we did it with 1 x, this is just wider. </a:t>
-            </a:r>
-          </a:p>
-          <a:p>
-            <a:r>
-              <a:rPr lang="en-US" dirty="0"/>
-              <a:t>The general process is identical. </a:t>
-            </a:r>
-          </a:p>
-          <a:p>
-            <a:pPr lvl="1"/>
-            <a:r>
-              <a:rPr lang="en-US" dirty="0"/>
-              <a:t>Exact steps that we need to do to process and prepare the data may change. </a:t>
-            </a:r>
-          </a:p>
-          <a:p>
-            <a:pPr lvl="1"/>
-            <a:r>
-              <a:rPr lang="en-US" dirty="0"/>
-              <a:t>Number of features could be ~unlimited. </a:t>
-            </a:r>
-          </a:p>
-          <a:p>
-            <a:endParaRPr lang="en-US" dirty="0"/>
+            <a:off x="127225" y="2015732"/>
+            <a:ext cx="6125991" cy="3450613"/>
+          </a:xfrm>
+        </p:spPr>
+        <p:txBody>
+          <a:bodyPr/>
+          <a:lstStyle/>
+          <a:p>
+            <a:r>
+              <a:rPr lang="en-US" dirty="0"/>
+              <a:t>Regression models with higher dimensionality are called multiple regression. </a:t>
+            </a:r>
+          </a:p>
+          <a:p>
+            <a:r>
+              <a:rPr lang="en-US" dirty="0"/>
+              <a:t>We can have an arbitrary number of inputs. </a:t>
+            </a:r>
+          </a:p>
+          <a:p>
+            <a:r>
+              <a:rPr lang="en-US" dirty="0"/>
+              <a:t>All concepts are identical, but it is hard to visualize. </a:t>
+            </a:r>
+          </a:p>
+          <a:p>
+            <a:pPr lvl="1"/>
+            <a:r>
+              <a:rPr lang="en-US" dirty="0"/>
+              <a:t>Each x has its own slope parameter. </a:t>
+            </a:r>
+          </a:p>
+          <a:p>
+            <a:pPr lvl="1"/>
+            <a:r>
+              <a:rPr lang="en-US" dirty="0"/>
+              <a:t>Slope along that dimension indicates weighting of x. </a:t>
+            </a:r>
+          </a:p>
+          <a:p>
+            <a:r>
+              <a:rPr lang="en-US" dirty="0"/>
+              <a:t>Direct calculation of LLS becomes less practical. </a:t>
+            </a:r>
           </a:p>
         </p:txBody>
       </p:sp>
       <p:pic>
         <p:nvPicPr>
-          <p:cNvPr id="12290" name="Picture 2" descr="Introducing Scikit-Learn | Python Data Science Handbook">
-            <a:extLst>
-              <a:ext uri="{FF2B5EF4-FFF2-40B4-BE49-F238E27FC236}">
-                <a16:creationId xmlns:a16="http://schemas.microsoft.com/office/drawing/2014/main" id="{526F1CF6-BBBD-CF2A-CADD-6E071E2B9C82}"/>
+          <p:cNvPr id="4" name="Picture 3" descr="Multiple Regression | CK-12 Foundation">
+            <a:extLst>
+              <a:ext uri="{FF2B5EF4-FFF2-40B4-BE49-F238E27FC236}">
+                <a16:creationId xmlns:a16="http://schemas.microsoft.com/office/drawing/2014/main" id="{1250862D-E7AD-2E60-DFC5-7F1806C60118}"/>
               </a:ext>
             </a:extLst>
           </p:cNvPr>
           <p:cNvPicPr>
-            <a:picLocks noChangeAspect="1" noChangeArrowheads="1"/>
+            <a:picLocks noChangeAspect="1"/>
           </p:cNvPicPr>
           <p:nvPr/>
         </p:nvPicPr>
         <p:blipFill>
-          <a:blip r:embed="rId2">
-            <a:extLst>
-              <a:ext uri="{28A0092B-C50C-407E-A947-70E740481C1C}">
-                <a14:useLocalDpi xmlns:a14="http://schemas.microsoft.com/office/drawing/2010/main" val="0"/>
-              </a:ext>
-            </a:extLst>
-          </a:blip>
-          <a:srcRect/>
+          <a:blip r:embed="rId2"/>
           <a:stretch>
             <a:fillRect/>
           </a:stretch>
         </p:blipFill>
-        <p:spPr bwMode="auto">
-          <a:xfrm>
-            <a:off x="6478772" y="2015732"/>
-            <a:ext cx="5486400" cy="3657600"/>
+        <p:spPr>
+          <a:xfrm>
+            <a:off x="6253216" y="2015731"/>
+            <a:ext cx="5811559" cy="3450613"/>
           </a:xfrm>
           <a:prstGeom prst="rect">
             <a:avLst/>
           </a:prstGeom>
-          <a:noFill/>
-          <a:extLst>
-            <a:ext uri="{909E8E84-426E-40DD-AFC4-6F175D3DCCD1}">
-              <a14:hiddenFill xmlns:a14="http://schemas.microsoft.com/office/drawing/2010/main">
-                <a:solidFill>
-                  <a:srgbClr val="FFFFFF"/>
-                </a:solidFill>
-              </a14:hiddenFill>
-            </a:ext>
-          </a:extLst>
         </p:spPr>
       </p:pic>
     </p:spTree>
     <p:extLst>
       <p:ext uri="{BB962C8B-B14F-4D97-AF65-F5344CB8AC3E}">
-        <p14:creationId xmlns:p14="http://schemas.microsoft.com/office/powerpoint/2010/main" val="3339658017"/>
+        <p14:creationId xmlns:p14="http://schemas.microsoft.com/office/powerpoint/2010/main" val="1482325169"/>
       </p:ext>
     </p:extLst>
   </p:cSld>
@@ -5650,7 +5626,7 @@
           <p:cNvPr id="2" name="Title 1">
             <a:extLst>
               <a:ext uri="{FF2B5EF4-FFF2-40B4-BE49-F238E27FC236}">
-                <a16:creationId xmlns:a16="http://schemas.microsoft.com/office/drawing/2014/main" id="{2C8A9012-918F-588C-D2B8-22CCF082990F}"/>
+                <a16:creationId xmlns:a16="http://schemas.microsoft.com/office/drawing/2014/main" id="{EAACAC41-7560-550A-22C7-25D1F869843F}"/>
               </a:ext>
             </a:extLst>
           </p:cNvPr>
@@ -5668,7 +5644,7 @@
           <a:p>
             <a:r>
               <a:rPr lang="en-US" dirty="0"/>
-              <a:t>The Regression Magic</a:t>
+              <a:t>What’s going on in Multiple Regression?</a:t>
             </a:r>
           </a:p>
         </p:txBody>
@@ -5678,7 +5654,7 @@
           <p:cNvPr id="3" name="Content Placeholder 2">
             <a:extLst>
               <a:ext uri="{FF2B5EF4-FFF2-40B4-BE49-F238E27FC236}">
-                <a16:creationId xmlns:a16="http://schemas.microsoft.com/office/drawing/2014/main" id="{89F7C95A-B432-EB5A-BAB2-9680ACB61B56}"/>
+                <a16:creationId xmlns:a16="http://schemas.microsoft.com/office/drawing/2014/main" id="{57AB1097-754F-68CB-361F-23574EA1DCB4}"/>
               </a:ext>
             </a:extLst>
           </p:cNvPr>
@@ -5691,78 +5667,66 @@
         </p:nvSpPr>
         <p:spPr>
           <a:xfrm>
-            <a:off x="319363" y="1853755"/>
-            <a:ext cx="5933854" cy="4199726"/>
-          </a:xfrm>
-        </p:spPr>
-        <p:txBody>
-          <a:bodyPr/>
-          <a:lstStyle/>
-          <a:p>
-            <a:r>
-              <a:rPr lang="en-US" dirty="0"/>
-              <a:t>Simple regression models let us see the logic. </a:t>
-            </a:r>
-          </a:p>
-          <a:p>
-            <a:pPr lvl="1"/>
-            <a:r>
-              <a:rPr lang="en-US" dirty="0"/>
-              <a:t>This often isn’t possible with the models we use later. </a:t>
-            </a:r>
-          </a:p>
-          <a:p>
-            <a:r>
-              <a:rPr lang="en-US" dirty="0"/>
-              <a:t>Prediction for Y is just a weighted combination of X. </a:t>
-            </a:r>
-          </a:p>
-          <a:p>
-            <a:pPr lvl="1"/>
-            <a:r>
-              <a:rPr lang="en-US" dirty="0"/>
-              <a:t>The machine learns what those should be. (LLS)</a:t>
-            </a:r>
-          </a:p>
-          <a:p>
-            <a:pPr lvl="1"/>
-            <a:r>
-              <a:rPr lang="en-US" dirty="0"/>
-              <a:t>The combo yields the least SSE possible (best fit). </a:t>
-            </a:r>
-          </a:p>
-          <a:p>
-            <a:pPr lvl="1"/>
-            <a:r>
-              <a:rPr lang="en-US" dirty="0"/>
-              <a:t>Each parameter controls weight of input. </a:t>
-            </a:r>
-          </a:p>
-          <a:p>
-            <a:pPr lvl="1"/>
-            <a:r>
-              <a:rPr lang="en-US" dirty="0"/>
-              <a:t>Intercept shifts entire thing up/down. </a:t>
-            </a:r>
-          </a:p>
-          <a:p>
-            <a:r>
-              <a:rPr lang="en-US" dirty="0"/>
-              <a:t>Based on these inputs, what’s the most accurate combination to predict y? </a:t>
-            </a:r>
-          </a:p>
-          <a:p>
-            <a:pPr lvl="1"/>
-            <a:endParaRPr lang="en-US" dirty="0"/>
+            <a:off x="7699975" y="2015732"/>
+            <a:ext cx="4341256" cy="3836773"/>
+          </a:xfrm>
+        </p:spPr>
+        <p:txBody>
+          <a:bodyPr/>
+          <a:lstStyle/>
+          <a:p>
+            <a:r>
+              <a:rPr lang="en-US" dirty="0"/>
+              <a:t>The concepts are identical to 1 X. </a:t>
+            </a:r>
+          </a:p>
+          <a:p>
+            <a:pPr lvl="1"/>
+            <a:r>
+              <a:rPr lang="en-US" dirty="0"/>
+              <a:t>We are still predicting Y. </a:t>
+            </a:r>
+          </a:p>
+          <a:p>
+            <a:pPr lvl="1"/>
+            <a:r>
+              <a:rPr lang="en-US" dirty="0"/>
+              <a:t>The line becomes a plane. </a:t>
+            </a:r>
+          </a:p>
+          <a:p>
+            <a:pPr lvl="1"/>
+            <a:r>
+              <a:rPr lang="en-US" dirty="0"/>
+              <a:t>The equation gains a term. </a:t>
+            </a:r>
+          </a:p>
+          <a:p>
+            <a:r>
+              <a:rPr lang="en-US" dirty="0"/>
+              <a:t>This extends to N dimensions. </a:t>
+            </a:r>
+          </a:p>
+          <a:p>
+            <a:r>
+              <a:rPr lang="en-US" dirty="0"/>
+              <a:t>The higher dimension, the more complex a thing we can predict. </a:t>
+            </a:r>
+          </a:p>
+          <a:p>
+            <a:r>
+              <a:rPr lang="en-US" dirty="0"/>
+              <a:t>We can see why outliers can hurt!</a:t>
+            </a:r>
           </a:p>
         </p:txBody>
       </p:sp>
       <p:pic>
         <p:nvPicPr>
-          <p:cNvPr id="8194" name="Picture 2" descr="Tutorial: Understanding Linear Regression and Regression Error Metrics">
-            <a:extLst>
-              <a:ext uri="{FF2B5EF4-FFF2-40B4-BE49-F238E27FC236}">
-                <a16:creationId xmlns:a16="http://schemas.microsoft.com/office/drawing/2014/main" id="{A12E9564-4B9A-C1C1-3B86-0983F4E16BF9}"/>
+          <p:cNvPr id="7170" name="Picture 2" descr="The regression model in a 3D space. A multi-variable regression model... |  Download Scientific Diagram">
+            <a:extLst>
+              <a:ext uri="{FF2B5EF4-FFF2-40B4-BE49-F238E27FC236}">
+                <a16:creationId xmlns:a16="http://schemas.microsoft.com/office/drawing/2014/main" id="{9402E54C-1A01-3FE9-0EC1-8CCB8291CAB1}"/>
               </a:ext>
             </a:extLst>
           </p:cNvPr>
@@ -5786,8 +5750,8 @@
         </p:blipFill>
         <p:spPr bwMode="auto">
           <a:xfrm>
-            <a:off x="6253216" y="2015732"/>
-            <a:ext cx="5933854" cy="3540642"/>
+            <a:off x="150769" y="2015732"/>
+            <a:ext cx="7549206" cy="3836773"/>
           </a:xfrm>
           <a:prstGeom prst="rect">
             <a:avLst/>
@@ -5807,7 +5771,7 @@
     </p:spTree>
     <p:extLst>
       <p:ext uri="{BB962C8B-B14F-4D97-AF65-F5344CB8AC3E}">
-        <p14:creationId xmlns:p14="http://schemas.microsoft.com/office/powerpoint/2010/main" val="1571698123"/>
+        <p14:creationId xmlns:p14="http://schemas.microsoft.com/office/powerpoint/2010/main" val="2542446162"/>
       </p:ext>
     </p:extLst>
   </p:cSld>
@@ -5839,7 +5803,7 @@
           <p:cNvPr id="2" name="Title 1">
             <a:extLst>
               <a:ext uri="{FF2B5EF4-FFF2-40B4-BE49-F238E27FC236}">
-                <a16:creationId xmlns:a16="http://schemas.microsoft.com/office/drawing/2014/main" id="{356F2141-30A2-DEEE-B454-ACA79776DB0E}"/>
+                <a16:creationId xmlns:a16="http://schemas.microsoft.com/office/drawing/2014/main" id="{9C40C123-02E6-FE33-9E1E-DF50EB9A49CA}"/>
               </a:ext>
             </a:extLst>
           </p:cNvPr>
@@ -5857,7 +5821,7 @@
           <a:p>
             <a:r>
               <a:rPr lang="en-US" dirty="0"/>
-              <a:t>Multicollinearity</a:t>
+              <a:t>In practice</a:t>
             </a:r>
           </a:p>
         </p:txBody>
@@ -5867,7 +5831,7 @@
           <p:cNvPr id="3" name="Content Placeholder 2">
             <a:extLst>
               <a:ext uri="{FF2B5EF4-FFF2-40B4-BE49-F238E27FC236}">
-                <a16:creationId xmlns:a16="http://schemas.microsoft.com/office/drawing/2014/main" id="{39D3A950-E4DA-B5FF-F7D1-356F30674396}"/>
+                <a16:creationId xmlns:a16="http://schemas.microsoft.com/office/drawing/2014/main" id="{8EABEBED-8085-1448-7245-38595630A521}"/>
               </a:ext>
             </a:extLst>
           </p:cNvPr>
@@ -5880,82 +5844,102 @@
         </p:nvSpPr>
         <p:spPr>
           <a:xfrm>
-            <a:off x="4769708" y="2015732"/>
-            <a:ext cx="6285146" cy="3959766"/>
-          </a:xfrm>
-        </p:spPr>
-        <p:txBody>
-          <a:bodyPr/>
-          <a:lstStyle/>
-          <a:p>
-            <a:r>
-              <a:rPr lang="en-US" dirty="0"/>
-              <a:t>If we have many relevant X inputs, our prediction for Y can be quite accurate. </a:t>
-            </a:r>
-          </a:p>
-          <a:p>
-            <a:pPr lvl="1"/>
-            <a:r>
-              <a:rPr lang="en-US" dirty="0"/>
-              <a:t>Model can take in many relevant factors and weight each appropriately. </a:t>
-            </a:r>
-          </a:p>
-          <a:p>
-            <a:r>
-              <a:rPr lang="en-US" dirty="0"/>
-              <a:t>What if we want to tune our model - make it more accurate or efficient?</a:t>
-            </a:r>
-          </a:p>
-          <a:p>
-            <a:pPr lvl="1"/>
-            <a:r>
-              <a:rPr lang="en-US" dirty="0"/>
-              <a:t>(We’ll do this commonly later for accuracy.) </a:t>
-            </a:r>
-          </a:p>
-          <a:p>
-            <a:pPr lvl="1"/>
-            <a:r>
-              <a:rPr lang="en-US" dirty="0"/>
-              <a:t>We may have many X inputs, but perhaps not all are needed…</a:t>
-            </a:r>
+            <a:off x="1451579" y="2015732"/>
+            <a:ext cx="5027193" cy="4037749"/>
+          </a:xfrm>
+        </p:spPr>
+        <p:txBody>
+          <a:bodyPr/>
+          <a:lstStyle/>
+          <a:p>
+            <a:r>
+              <a:rPr lang="en-US" dirty="0"/>
+              <a:t>In code very little needs to change. </a:t>
+            </a:r>
+          </a:p>
+          <a:p>
+            <a:pPr lvl="1"/>
+            <a:r>
+              <a:rPr lang="en-US" dirty="0"/>
+              <a:t>If we did it with 1 x, this is just wider. </a:t>
+            </a:r>
+          </a:p>
+          <a:p>
+            <a:r>
+              <a:rPr lang="en-US" dirty="0"/>
+              <a:t>The general process is identical. </a:t>
+            </a:r>
+          </a:p>
+          <a:p>
+            <a:pPr lvl="1"/>
+            <a:r>
+              <a:rPr lang="en-US" dirty="0"/>
+              <a:t>Exact steps that we need to do to process and prepare the data may change. </a:t>
+            </a:r>
+          </a:p>
+          <a:p>
+            <a:pPr lvl="1"/>
+            <a:r>
+              <a:rPr lang="en-US" dirty="0"/>
+              <a:t>Number of features could be ~unlimited. </a:t>
+            </a:r>
+          </a:p>
+          <a:p>
+            <a:endParaRPr lang="en-US" dirty="0"/>
           </a:p>
         </p:txBody>
       </p:sp>
       <p:pic>
         <p:nvPicPr>
-          <p:cNvPr id="4" name="Picture 3" descr="The Ballentine view of multicollinearity Muhammad Ali, PhD Scholar... |  Download Scientific Diagram">
-            <a:extLst>
-              <a:ext uri="{FF2B5EF4-FFF2-40B4-BE49-F238E27FC236}">
-                <a16:creationId xmlns:a16="http://schemas.microsoft.com/office/drawing/2014/main" id="{2F6C1E6A-6F33-F415-7271-09FE93A48140}"/>
+          <p:cNvPr id="12290" name="Picture 2" descr="Introducing Scikit-Learn | Python Data Science Handbook">
+            <a:extLst>
+              <a:ext uri="{FF2B5EF4-FFF2-40B4-BE49-F238E27FC236}">
+                <a16:creationId xmlns:a16="http://schemas.microsoft.com/office/drawing/2014/main" id="{526F1CF6-BBBD-CF2A-CADD-6E071E2B9C82}"/>
               </a:ext>
             </a:extLst>
           </p:cNvPr>
           <p:cNvPicPr>
-            <a:picLocks noChangeAspect="1"/>
+            <a:picLocks noChangeAspect="1" noChangeArrowheads="1"/>
           </p:cNvPicPr>
           <p:nvPr/>
         </p:nvPicPr>
         <p:blipFill>
-          <a:blip r:embed="rId2"/>
+          <a:blip r:embed="rId2">
+            <a:extLst>
+              <a:ext uri="{28A0092B-C50C-407E-A947-70E740481C1C}">
+                <a14:useLocalDpi xmlns:a14="http://schemas.microsoft.com/office/drawing/2010/main" val="0"/>
+              </a:ext>
+            </a:extLst>
+          </a:blip>
+          <a:srcRect/>
           <a:stretch>
             <a:fillRect/>
           </a:stretch>
         </p:blipFill>
-        <p:spPr>
-          <a:xfrm>
-            <a:off x="242896" y="1853754"/>
-            <a:ext cx="4526812" cy="4120560"/>
+        <p:spPr bwMode="auto">
+          <a:xfrm>
+            <a:off x="6478772" y="2015732"/>
+            <a:ext cx="5486400" cy="3657600"/>
           </a:xfrm>
           <a:prstGeom prst="rect">
             <a:avLst/>
           </a:prstGeom>
+          <a:noFill/>
+          <a:extLst>
+            <a:ext uri="{909E8E84-426E-40DD-AFC4-6F175D3DCCD1}">
+              <a14:hiddenFill xmlns:a14="http://schemas.microsoft.com/office/drawing/2010/main">
+                <a:solidFill>
+                  <a:srgbClr val="FFFFFF"/>
+                </a:solidFill>
+              </a14:hiddenFill>
+            </a:ext>
+          </a:extLst>
         </p:spPr>
       </p:pic>
     </p:spTree>
     <p:extLst>
       <p:ext uri="{BB962C8B-B14F-4D97-AF65-F5344CB8AC3E}">
-        <p14:creationId xmlns:p14="http://schemas.microsoft.com/office/powerpoint/2010/main" val="549387644"/>
+        <p14:creationId xmlns:p14="http://schemas.microsoft.com/office/powerpoint/2010/main" val="3339658017"/>
       </p:ext>
     </p:extLst>
   </p:cSld>
@@ -5987,7 +5971,7 @@
           <p:cNvPr id="2" name="Title 1">
             <a:extLst>
               <a:ext uri="{FF2B5EF4-FFF2-40B4-BE49-F238E27FC236}">
-                <a16:creationId xmlns:a16="http://schemas.microsoft.com/office/drawing/2014/main" id="{A00BDED4-C114-4F97-9896-A75AAFF437FD}"/>
+                <a16:creationId xmlns:a16="http://schemas.microsoft.com/office/drawing/2014/main" id="{2C8A9012-918F-588C-D2B8-22CCF082990F}"/>
               </a:ext>
             </a:extLst>
           </p:cNvPr>
@@ -6005,7 +5989,7 @@
           <a:p>
             <a:r>
               <a:rPr lang="en-US" dirty="0"/>
-              <a:t>Example – Medical Screening</a:t>
+              <a:t>The Regression Magic</a:t>
             </a:r>
           </a:p>
         </p:txBody>
@@ -6015,7 +5999,7 @@
           <p:cNvPr id="3" name="Content Placeholder 2">
             <a:extLst>
               <a:ext uri="{FF2B5EF4-FFF2-40B4-BE49-F238E27FC236}">
-                <a16:creationId xmlns:a16="http://schemas.microsoft.com/office/drawing/2014/main" id="{D2717539-74A2-9EE4-4F88-43AAE97788B3}"/>
+                <a16:creationId xmlns:a16="http://schemas.microsoft.com/office/drawing/2014/main" id="{89F7C95A-B432-EB5A-BAB2-9680ACB61B56}"/>
               </a:ext>
             </a:extLst>
           </p:cNvPr>
@@ -6028,79 +6012,123 @@
         </p:nvSpPr>
         <p:spPr>
           <a:xfrm>
-            <a:off x="1451579" y="1853753"/>
-            <a:ext cx="9603275" cy="4199727"/>
-          </a:xfrm>
-        </p:spPr>
-        <p:txBody>
-          <a:bodyPr/>
-          <a:lstStyle/>
-          <a:p>
-            <a:r>
-              <a:rPr lang="en-US" dirty="0"/>
-              <a:t>Suppose we have a model predicting bodyfat percentage for patients. </a:t>
-            </a:r>
-          </a:p>
-          <a:p>
-            <a:pPr lvl="1"/>
-            <a:r>
-              <a:rPr lang="en-US" dirty="0"/>
-              <a:t>Measuring bodyfat is slow and expensive for large numbers of people. </a:t>
-            </a:r>
-          </a:p>
-          <a:p>
-            <a:pPr lvl="1"/>
-            <a:r>
-              <a:rPr lang="en-US" dirty="0"/>
-              <a:t>It can be important for forecasting health outcomes. </a:t>
-            </a:r>
-          </a:p>
-          <a:p>
-            <a:r>
-              <a:rPr lang="en-US" dirty="0"/>
-              <a:t>Several other metrics can tell us about bodyfat percentage, partially. </a:t>
-            </a:r>
-          </a:p>
-          <a:p>
-            <a:pPr lvl="1"/>
-            <a:r>
-              <a:rPr lang="en-US" dirty="0"/>
-              <a:t>Weight, height, waist size, thigh size, calf size, hip size, chest size…</a:t>
-            </a:r>
-          </a:p>
-          <a:p>
-            <a:pPr lvl="1"/>
-            <a:r>
-              <a:rPr lang="en-US" dirty="0"/>
-              <a:t>These are all easier and faster to take and log. </a:t>
-            </a:r>
-          </a:p>
-          <a:p>
-            <a:r>
-              <a:rPr lang="en-US" dirty="0"/>
-              <a:t>Each of these metrics give us some information about bf%. </a:t>
-            </a:r>
-          </a:p>
-          <a:p>
-            <a:pPr lvl="1"/>
-            <a:r>
-              <a:rPr lang="en-US" dirty="0"/>
-              <a:t>There’s a lot of overlap in the information given. </a:t>
-            </a:r>
-          </a:p>
-          <a:p>
-            <a:pPr lvl="1"/>
-            <a:r>
-              <a:rPr lang="en-US" dirty="0"/>
-              <a:t>Waist size, hip size, thigh size aren’t the same, but they tend to tell us almost the same info.</a:t>
-            </a:r>
-          </a:p>
-        </p:txBody>
-      </p:sp>
+            <a:off x="319363" y="1853755"/>
+            <a:ext cx="5933854" cy="4199726"/>
+          </a:xfrm>
+        </p:spPr>
+        <p:txBody>
+          <a:bodyPr/>
+          <a:lstStyle/>
+          <a:p>
+            <a:r>
+              <a:rPr lang="en-US" dirty="0"/>
+              <a:t>Simple regression models let us see the logic. </a:t>
+            </a:r>
+          </a:p>
+          <a:p>
+            <a:pPr lvl="1"/>
+            <a:r>
+              <a:rPr lang="en-US" dirty="0"/>
+              <a:t>This often isn’t possible with the models we use later. </a:t>
+            </a:r>
+          </a:p>
+          <a:p>
+            <a:r>
+              <a:rPr lang="en-US" dirty="0"/>
+              <a:t>Prediction for Y is just a weighted combination of X. </a:t>
+            </a:r>
+          </a:p>
+          <a:p>
+            <a:pPr lvl="1"/>
+            <a:r>
+              <a:rPr lang="en-US" dirty="0"/>
+              <a:t>The machine learns what those should be. (LLS)</a:t>
+            </a:r>
+          </a:p>
+          <a:p>
+            <a:pPr lvl="1"/>
+            <a:r>
+              <a:rPr lang="en-US" dirty="0"/>
+              <a:t>The combo yields the least SSE possible (best fit). </a:t>
+            </a:r>
+          </a:p>
+          <a:p>
+            <a:pPr lvl="1"/>
+            <a:r>
+              <a:rPr lang="en-US" dirty="0"/>
+              <a:t>Each parameter controls weight of input. </a:t>
+            </a:r>
+          </a:p>
+          <a:p>
+            <a:pPr lvl="1"/>
+            <a:r>
+              <a:rPr lang="en-US" dirty="0"/>
+              <a:t>Intercept shifts entire thing up/down. </a:t>
+            </a:r>
+          </a:p>
+          <a:p>
+            <a:r>
+              <a:rPr lang="en-US" dirty="0"/>
+              <a:t>Based on these inputs, what’s the most accurate combination to predict y? </a:t>
+            </a:r>
+          </a:p>
+          <a:p>
+            <a:pPr lvl="1"/>
+            <a:endParaRPr lang="en-US" dirty="0"/>
+          </a:p>
+        </p:txBody>
+      </p:sp>
+      <p:pic>
+        <p:nvPicPr>
+          <p:cNvPr id="8194" name="Picture 2" descr="Tutorial: Understanding Linear Regression and Regression Error Metrics">
+            <a:extLst>
+              <a:ext uri="{FF2B5EF4-FFF2-40B4-BE49-F238E27FC236}">
+                <a16:creationId xmlns:a16="http://schemas.microsoft.com/office/drawing/2014/main" id="{A12E9564-4B9A-C1C1-3B86-0983F4E16BF9}"/>
+              </a:ext>
+            </a:extLst>
+          </p:cNvPr>
+          <p:cNvPicPr>
+            <a:picLocks noChangeAspect="1" noChangeArrowheads="1"/>
+          </p:cNvPicPr>
+          <p:nvPr/>
+        </p:nvPicPr>
+        <p:blipFill>
+          <a:blip r:embed="rId2">
+            <a:extLst>
+              <a:ext uri="{28A0092B-C50C-407E-A947-70E740481C1C}">
+                <a14:useLocalDpi xmlns:a14="http://schemas.microsoft.com/office/drawing/2010/main" val="0"/>
+              </a:ext>
+            </a:extLst>
+          </a:blip>
+          <a:srcRect/>
+          <a:stretch>
+            <a:fillRect/>
+          </a:stretch>
+        </p:blipFill>
+        <p:spPr bwMode="auto">
+          <a:xfrm>
+            <a:off x="6253216" y="2015732"/>
+            <a:ext cx="5933854" cy="3540642"/>
+          </a:xfrm>
+          <a:prstGeom prst="rect">
+            <a:avLst/>
+          </a:prstGeom>
+          <a:noFill/>
+          <a:extLst>
+            <a:ext uri="{909E8E84-426E-40DD-AFC4-6F175D3DCCD1}">
+              <a14:hiddenFill xmlns:a14="http://schemas.microsoft.com/office/drawing/2010/main">
+                <a:solidFill>
+                  <a:srgbClr val="FFFFFF"/>
+                </a:solidFill>
+              </a14:hiddenFill>
+            </a:ext>
+          </a:extLst>
+        </p:spPr>
+      </p:pic>
     </p:spTree>
     <p:extLst>
       <p:ext uri="{BB962C8B-B14F-4D97-AF65-F5344CB8AC3E}">
-        <p14:creationId xmlns:p14="http://schemas.microsoft.com/office/powerpoint/2010/main" val="1427320560"/>
+        <p14:creationId xmlns:p14="http://schemas.microsoft.com/office/powerpoint/2010/main" val="1571698123"/>
       </p:ext>
     </p:extLst>
   </p:cSld>
@@ -6132,7 +6160,7 @@
           <p:cNvPr id="2" name="Title 1">
             <a:extLst>
               <a:ext uri="{FF2B5EF4-FFF2-40B4-BE49-F238E27FC236}">
-                <a16:creationId xmlns:a16="http://schemas.microsoft.com/office/drawing/2014/main" id="{0D7AAB49-4FDA-9A61-7F67-D0C57818888B}"/>
+                <a16:creationId xmlns:a16="http://schemas.microsoft.com/office/drawing/2014/main" id="{356F2141-30A2-DEEE-B454-ACA79776DB0E}"/>
               </a:ext>
             </a:extLst>
           </p:cNvPr>
@@ -6150,7 +6178,7 @@
           <a:p>
             <a:r>
               <a:rPr lang="en-US" dirty="0"/>
-              <a:t>Separate Information from Variable</a:t>
+              <a:t>Multicollinearity</a:t>
             </a:r>
           </a:p>
         </p:txBody>
@@ -6160,7 +6188,7 @@
           <p:cNvPr id="3" name="Content Placeholder 2">
             <a:extLst>
               <a:ext uri="{FF2B5EF4-FFF2-40B4-BE49-F238E27FC236}">
-                <a16:creationId xmlns:a16="http://schemas.microsoft.com/office/drawing/2014/main" id="{4EC843E9-B92B-CD06-5580-1A8B9EB76296}"/>
+                <a16:creationId xmlns:a16="http://schemas.microsoft.com/office/drawing/2014/main" id="{39D3A950-E4DA-B5FF-F7D1-356F30674396}"/>
               </a:ext>
             </a:extLst>
           </p:cNvPr>
@@ -6173,88 +6201,82 @@
         </p:nvSpPr>
         <p:spPr>
           <a:xfrm>
-            <a:off x="1451579" y="1853753"/>
-            <a:ext cx="9603275" cy="4291865"/>
-          </a:xfrm>
-        </p:spPr>
-        <p:txBody>
-          <a:bodyPr/>
-          <a:lstStyle/>
-          <a:p>
-            <a:r>
-              <a:rPr lang="en-US" dirty="0"/>
-              <a:t>This is easier if we can think of “information” that a variable holds as separate from itself.</a:t>
-            </a:r>
-          </a:p>
-          <a:p>
-            <a:pPr lvl="1"/>
-            <a:r>
-              <a:rPr lang="en-US" dirty="0"/>
-              <a:t>E.g. knee size, ankle size, thigh size, calf size, </a:t>
-            </a:r>
-            <a:r>
-              <a:rPr lang="en-US" dirty="0" err="1"/>
-              <a:t>etc</a:t>
-            </a:r>
-            <a:r>
-              <a:rPr lang="en-US" dirty="0"/>
-              <a:t>… all give info on “size of leg”. </a:t>
-            </a:r>
-          </a:p>
-          <a:p>
-            <a:r>
-              <a:rPr lang="en-US" dirty="0"/>
-              <a:t>The “piece of info” isn’t necessarily a directly observable thing. </a:t>
-            </a:r>
-          </a:p>
-          <a:p>
-            <a:pPr lvl="1"/>
-            <a:r>
-              <a:rPr lang="en-US" dirty="0"/>
-              <a:t>The info is what the model actually needs to make accurate predictions. </a:t>
-            </a:r>
-          </a:p>
-          <a:p>
-            <a:r>
-              <a:rPr lang="en-US" dirty="0"/>
-              <a:t>Ideally, we’d have one variable for each “piece of info”. </a:t>
-            </a:r>
-          </a:p>
-          <a:p>
-            <a:r>
-              <a:rPr lang="en-US" dirty="0"/>
-              <a:t>If we want to tune a model, we’d adjust the parameters (weight of inputs). </a:t>
-            </a:r>
-          </a:p>
-          <a:p>
-            <a:pPr lvl="1"/>
-            <a:r>
-              <a:rPr lang="en-US" dirty="0"/>
-              <a:t>Suppose ”leg size” is something that determines weight, and we have the above features. </a:t>
-            </a:r>
-          </a:p>
-          <a:p>
-            <a:pPr lvl="1"/>
-            <a:r>
-              <a:rPr lang="en-US" dirty="0"/>
-              <a:t>How would a model know where the “leg size” info is coming from? </a:t>
-            </a:r>
-          </a:p>
-          <a:p>
-            <a:r>
-              <a:rPr lang="en-US" dirty="0"/>
-              <a:t>*Note: The tuning process will be more clear in a couple of weeks. </a:t>
-            </a:r>
-          </a:p>
-          <a:p>
-            <a:endParaRPr lang="en-US" dirty="0"/>
-          </a:p>
-        </p:txBody>
-      </p:sp>
+            <a:off x="4769708" y="2015732"/>
+            <a:ext cx="6285146" cy="3959766"/>
+          </a:xfrm>
+        </p:spPr>
+        <p:txBody>
+          <a:bodyPr/>
+          <a:lstStyle/>
+          <a:p>
+            <a:r>
+              <a:rPr lang="en-US" dirty="0"/>
+              <a:t>If we have many relevant X inputs, our prediction for Y can be quite accurate. </a:t>
+            </a:r>
+          </a:p>
+          <a:p>
+            <a:pPr lvl="1"/>
+            <a:r>
+              <a:rPr lang="en-US" dirty="0"/>
+              <a:t>Model can take in many relevant factors and weight each appropriately. </a:t>
+            </a:r>
+          </a:p>
+          <a:p>
+            <a:r>
+              <a:rPr lang="en-US" dirty="0"/>
+              <a:t>What if we want to tune our model - make it more accurate or efficient?</a:t>
+            </a:r>
+          </a:p>
+          <a:p>
+            <a:pPr lvl="1"/>
+            <a:r>
+              <a:rPr lang="en-US" dirty="0"/>
+              <a:t>(We’ll do this commonly later for accuracy.) </a:t>
+            </a:r>
+          </a:p>
+          <a:p>
+            <a:pPr lvl="1"/>
+            <a:r>
+              <a:rPr lang="en-US" dirty="0"/>
+              <a:t>We may have many X inputs, but perhaps not all are needed…</a:t>
+            </a:r>
+          </a:p>
+        </p:txBody>
+      </p:sp>
+      <p:pic>
+        <p:nvPicPr>
+          <p:cNvPr id="4" name="Picture 3" descr="The Ballentine view of multicollinearity Muhammad Ali, PhD Scholar... |  Download Scientific Diagram">
+            <a:extLst>
+              <a:ext uri="{FF2B5EF4-FFF2-40B4-BE49-F238E27FC236}">
+                <a16:creationId xmlns:a16="http://schemas.microsoft.com/office/drawing/2014/main" id="{2F6C1E6A-6F33-F415-7271-09FE93A48140}"/>
+              </a:ext>
+            </a:extLst>
+          </p:cNvPr>
+          <p:cNvPicPr>
+            <a:picLocks noChangeAspect="1"/>
+          </p:cNvPicPr>
+          <p:nvPr/>
+        </p:nvPicPr>
+        <p:blipFill>
+          <a:blip r:embed="rId2"/>
+          <a:stretch>
+            <a:fillRect/>
+          </a:stretch>
+        </p:blipFill>
+        <p:spPr>
+          <a:xfrm>
+            <a:off x="242896" y="1853754"/>
+            <a:ext cx="4526812" cy="4120560"/>
+          </a:xfrm>
+          <a:prstGeom prst="rect">
+            <a:avLst/>
+          </a:prstGeom>
+        </p:spPr>
+      </p:pic>
     </p:spTree>
     <p:extLst>
       <p:ext uri="{BB962C8B-B14F-4D97-AF65-F5344CB8AC3E}">
-        <p14:creationId xmlns:p14="http://schemas.microsoft.com/office/powerpoint/2010/main" val="4063668131"/>
+        <p14:creationId xmlns:p14="http://schemas.microsoft.com/office/powerpoint/2010/main" val="549387644"/>
       </p:ext>
     </p:extLst>
   </p:cSld>
@@ -6286,7 +6308,7 @@
           <p:cNvPr id="2" name="Title 1">
             <a:extLst>
               <a:ext uri="{FF2B5EF4-FFF2-40B4-BE49-F238E27FC236}">
-                <a16:creationId xmlns:a16="http://schemas.microsoft.com/office/drawing/2014/main" id="{719CCE9F-899C-DC97-92C7-EBA7069C9889}"/>
+                <a16:creationId xmlns:a16="http://schemas.microsoft.com/office/drawing/2014/main" id="{A00BDED4-C114-4F97-9896-A75AAFF437FD}"/>
               </a:ext>
             </a:extLst>
           </p:cNvPr>
@@ -6304,7 +6326,7 @@
           <a:p>
             <a:r>
               <a:rPr lang="en-US" dirty="0"/>
-              <a:t>So, What’s the Problem? </a:t>
+              <a:t>Example – Medical Screening</a:t>
             </a:r>
           </a:p>
         </p:txBody>
@@ -6314,7 +6336,7 @@
           <p:cNvPr id="3" name="Content Placeholder 2">
             <a:extLst>
               <a:ext uri="{FF2B5EF4-FFF2-40B4-BE49-F238E27FC236}">
-                <a16:creationId xmlns:a16="http://schemas.microsoft.com/office/drawing/2014/main" id="{04BEC346-AE6F-4717-1ED0-F90F8661361B}"/>
+                <a16:creationId xmlns:a16="http://schemas.microsoft.com/office/drawing/2014/main" id="{D2717539-74A2-9EE4-4F88-43AAE97788B3}"/>
               </a:ext>
             </a:extLst>
           </p:cNvPr>
@@ -6327,119 +6349,79 @@
         </p:nvSpPr>
         <p:spPr>
           <a:xfrm>
-            <a:off x="1451579" y="2015732"/>
-            <a:ext cx="9603275" cy="4037749"/>
-          </a:xfrm>
-        </p:spPr>
-        <p:txBody>
-          <a:bodyPr/>
-          <a:lstStyle/>
-          <a:p>
-            <a:r>
-              <a:rPr lang="en-US" dirty="0"/>
-              <a:t>If we have X values that are largely the same we call that multicollinearity. </a:t>
-            </a:r>
-          </a:p>
-          <a:p>
-            <a:pPr lvl="1"/>
-            <a:r>
-              <a:rPr lang="en-US" dirty="0"/>
-              <a:t>I.e. several things are highly correlated with each other. </a:t>
-            </a:r>
-          </a:p>
-          <a:p>
-            <a:r>
-              <a:rPr lang="en-US" dirty="0"/>
-              <a:t>This isn’t fatal, but can give us some issues. </a:t>
-            </a:r>
-          </a:p>
-          <a:p>
-            <a:pPr lvl="1"/>
-            <a:r>
-              <a:rPr lang="en-US" dirty="0"/>
-              <a:t>If multiple inputs have the same info, the model can’t figure out how to weight each. </a:t>
-            </a:r>
-          </a:p>
-          <a:p>
-            <a:pPr lvl="1"/>
-            <a:r>
-              <a:rPr lang="en-US" dirty="0"/>
-              <a:t>The assumption is inputs are orthogonal, they have nothing to do with each other. </a:t>
-            </a:r>
-          </a:p>
-          <a:p>
-            <a:pPr lvl="1"/>
-            <a:r>
-              <a:rPr lang="en-US" dirty="0"/>
-              <a:t>A model can’t be sure how to change coefficients as several are almost the same. </a:t>
-            </a:r>
-          </a:p>
-          <a:p>
-            <a:pPr lvl="1"/>
-            <a:r>
-              <a:rPr lang="en-US" dirty="0"/>
-              <a:t>The learning can be hard (not with LLS) and can swing with small changes. </a:t>
-            </a:r>
-          </a:p>
-          <a:p>
-            <a:r>
-              <a:rPr lang="en-US" dirty="0"/>
-              <a:t>Ideally, we want each thing measured exactly once. </a:t>
-            </a:r>
-          </a:p>
-        </p:txBody>
-      </p:sp>
-      <p:pic>
-        <p:nvPicPr>
-          <p:cNvPr id="4" name="Picture 2" descr="The regression model in a 3D space. A multi-variable regression model... |  Download Scientific Diagram">
-            <a:extLst>
-              <a:ext uri="{FF2B5EF4-FFF2-40B4-BE49-F238E27FC236}">
-                <a16:creationId xmlns:a16="http://schemas.microsoft.com/office/drawing/2014/main" id="{F81911F5-536D-B1B7-23C0-DAE0A5792CBF}"/>
-              </a:ext>
-            </a:extLst>
-          </p:cNvPr>
-          <p:cNvPicPr>
-            <a:picLocks noChangeAspect="1" noChangeArrowheads="1"/>
-          </p:cNvPicPr>
-          <p:nvPr/>
-        </p:nvPicPr>
-        <p:blipFill>
-          <a:blip r:embed="rId2">
-            <a:extLst>
-              <a:ext uri="{28A0092B-C50C-407E-A947-70E740481C1C}">
-                <a14:useLocalDpi xmlns:a14="http://schemas.microsoft.com/office/drawing/2010/main" val="0"/>
-              </a:ext>
-            </a:extLst>
-          </a:blip>
-          <a:srcRect/>
-          <a:stretch>
-            <a:fillRect/>
-          </a:stretch>
-        </p:blipFill>
-        <p:spPr bwMode="auto">
-          <a:xfrm>
-            <a:off x="8155459" y="1"/>
-            <a:ext cx="4003590" cy="2034766"/>
-          </a:xfrm>
-          <a:prstGeom prst="rect">
-            <a:avLst/>
-          </a:prstGeom>
-          <a:noFill/>
-          <a:extLst>
-            <a:ext uri="{909E8E84-426E-40DD-AFC4-6F175D3DCCD1}">
-              <a14:hiddenFill xmlns:a14="http://schemas.microsoft.com/office/drawing/2010/main">
-                <a:solidFill>
-                  <a:srgbClr val="FFFFFF"/>
-                </a:solidFill>
-              </a14:hiddenFill>
-            </a:ext>
-          </a:extLst>
-        </p:spPr>
-      </p:pic>
+            <a:off x="1451579" y="1853753"/>
+            <a:ext cx="9603275" cy="4199727"/>
+          </a:xfrm>
+        </p:spPr>
+        <p:txBody>
+          <a:bodyPr/>
+          <a:lstStyle/>
+          <a:p>
+            <a:r>
+              <a:rPr lang="en-US" dirty="0"/>
+              <a:t>Suppose we have a model predicting bodyfat percentage for patients. </a:t>
+            </a:r>
+          </a:p>
+          <a:p>
+            <a:pPr lvl="1"/>
+            <a:r>
+              <a:rPr lang="en-US" dirty="0"/>
+              <a:t>Measuring bodyfat is slow and expensive for large numbers of people. </a:t>
+            </a:r>
+          </a:p>
+          <a:p>
+            <a:pPr lvl="1"/>
+            <a:r>
+              <a:rPr lang="en-US" dirty="0"/>
+              <a:t>It can be important for forecasting health outcomes. </a:t>
+            </a:r>
+          </a:p>
+          <a:p>
+            <a:r>
+              <a:rPr lang="en-US" dirty="0"/>
+              <a:t>Several other metrics can tell us about bodyfat percentage, partially. </a:t>
+            </a:r>
+          </a:p>
+          <a:p>
+            <a:pPr lvl="1"/>
+            <a:r>
+              <a:rPr lang="en-US" dirty="0"/>
+              <a:t>Weight, height, waist size, thigh size, calf size, hip size, chest size…</a:t>
+            </a:r>
+          </a:p>
+          <a:p>
+            <a:pPr lvl="1"/>
+            <a:r>
+              <a:rPr lang="en-US" dirty="0"/>
+              <a:t>These are all easier and faster to take and log. </a:t>
+            </a:r>
+          </a:p>
+          <a:p>
+            <a:r>
+              <a:rPr lang="en-US" dirty="0"/>
+              <a:t>Each of these metrics give us some information about bf%. </a:t>
+            </a:r>
+          </a:p>
+          <a:p>
+            <a:pPr lvl="1"/>
+            <a:r>
+              <a:rPr lang="en-US" dirty="0"/>
+              <a:t>There’s a lot of overlap in the information given. </a:t>
+            </a:r>
+          </a:p>
+          <a:p>
+            <a:pPr lvl="1"/>
+            <a:r>
+              <a:rPr lang="en-US" dirty="0"/>
+              <a:t>Waist size, hip size, thigh size aren’t the same, but they tend to tell us almost the same info.</a:t>
+            </a:r>
+          </a:p>
+        </p:txBody>
+      </p:sp>
     </p:spTree>
     <p:extLst>
       <p:ext uri="{BB962C8B-B14F-4D97-AF65-F5344CB8AC3E}">
-        <p14:creationId xmlns:p14="http://schemas.microsoft.com/office/powerpoint/2010/main" val="808301570"/>
+        <p14:creationId xmlns:p14="http://schemas.microsoft.com/office/powerpoint/2010/main" val="1427320560"/>
       </p:ext>
     </p:extLst>
   </p:cSld>
@@ -6471,7 +6453,7 @@
           <p:cNvPr id="2" name="Title 1">
             <a:extLst>
               <a:ext uri="{FF2B5EF4-FFF2-40B4-BE49-F238E27FC236}">
-                <a16:creationId xmlns:a16="http://schemas.microsoft.com/office/drawing/2014/main" id="{1C3EE54B-EBCF-BAFF-A500-7895B3D30FE2}"/>
+                <a16:creationId xmlns:a16="http://schemas.microsoft.com/office/drawing/2014/main" id="{0D7AAB49-4FDA-9A61-7F67-D0C57818888B}"/>
               </a:ext>
             </a:extLst>
           </p:cNvPr>
@@ -6489,7 +6471,7 @@
           <a:p>
             <a:r>
               <a:rPr lang="en-US" dirty="0"/>
-              <a:t>More Business-y Example</a:t>
+              <a:t>Separate Information from Variable</a:t>
             </a:r>
           </a:p>
         </p:txBody>
@@ -6499,7 +6481,7 @@
           <p:cNvPr id="3" name="Content Placeholder 2">
             <a:extLst>
               <a:ext uri="{FF2B5EF4-FFF2-40B4-BE49-F238E27FC236}">
-                <a16:creationId xmlns:a16="http://schemas.microsoft.com/office/drawing/2014/main" id="{D06565AD-BC48-AC50-D088-40E45C1A3C01}"/>
+                <a16:creationId xmlns:a16="http://schemas.microsoft.com/office/drawing/2014/main" id="{4EC843E9-B92B-CD06-5580-1A8B9EB76296}"/>
               </a:ext>
             </a:extLst>
           </p:cNvPr>
@@ -6512,30 +6494,24 @@
         </p:nvSpPr>
         <p:spPr>
           <a:xfrm>
-            <a:off x="1451579" y="1853755"/>
-            <a:ext cx="9603275" cy="4291864"/>
-          </a:xfrm>
-        </p:spPr>
-        <p:txBody>
-          <a:bodyPr/>
-          <a:lstStyle/>
-          <a:p>
-            <a:r>
-              <a:rPr lang="en-US" dirty="0"/>
-              <a:t>We have a model that predicts the success of our convenience stores. </a:t>
-            </a:r>
-          </a:p>
-          <a:p>
-            <a:r>
-              <a:rPr lang="en-US" dirty="0"/>
-              <a:t>Several things matter for a store’s success:</a:t>
-            </a:r>
-          </a:p>
-          <a:p>
-            <a:pPr lvl="1"/>
-            <a:r>
-              <a:rPr lang="en-US" dirty="0"/>
-              <a:t>Location, pricing, customer satisfaction, product mix, </a:t>
+            <a:off x="1451579" y="1853753"/>
+            <a:ext cx="9603275" cy="4291865"/>
+          </a:xfrm>
+        </p:spPr>
+        <p:txBody>
+          <a:bodyPr/>
+          <a:lstStyle/>
+          <a:p>
+            <a:r>
+              <a:rPr lang="en-US" dirty="0"/>
+              <a:t>This is easier if we can think of “information” that a variable holds as separate from itself.</a:t>
+            </a:r>
+          </a:p>
+          <a:p>
+            <a:pPr lvl="1"/>
+            <a:r>
+              <a:rPr lang="en-US" dirty="0"/>
+              <a:t>E.g. knee size, ankle size, thigh size, calf size, </a:t>
             </a:r>
             <a:r>
               <a:rPr lang="en-US" dirty="0" err="1"/>
@@ -6543,70 +6519,63 @@
             </a:r>
             <a:r>
               <a:rPr lang="en-US" dirty="0"/>
-              <a:t>…</a:t>
-            </a:r>
-          </a:p>
-          <a:p>
-            <a:r>
-              <a:rPr lang="en-US" dirty="0"/>
-              <a:t>Each of these can be measured, but not directly, e.g. location:</a:t>
-            </a:r>
-          </a:p>
-          <a:p>
-            <a:pPr lvl="1"/>
-            <a:r>
-              <a:rPr lang="en-US" dirty="0"/>
-              <a:t>There’s no direct measurement for “location goodness”, but it clearly matters. </a:t>
-            </a:r>
-          </a:p>
-          <a:p>
-            <a:pPr lvl="1"/>
-            <a:r>
-              <a:rPr lang="en-US" dirty="0"/>
-              <a:t>What features measure this? Distance to transit/highway/apartment/intersection. </a:t>
-            </a:r>
-          </a:p>
-          <a:p>
-            <a:pPr lvl="1"/>
-            <a:r>
-              <a:rPr lang="en-US" dirty="0"/>
-              <a:t>Foot traffic, car traffic, “ease of access”, population, visibility of store, sign placement, </a:t>
-            </a:r>
-            <a:r>
-              <a:rPr lang="en-US" dirty="0" err="1"/>
-              <a:t>etc</a:t>
-            </a:r>
-            <a:r>
-              <a:rPr lang="en-US" dirty="0"/>
-              <a:t>…</a:t>
-            </a:r>
-          </a:p>
-          <a:p>
-            <a:r>
-              <a:rPr lang="en-US" dirty="0"/>
-              <a:t>Each feature overlaps in what it contributes – e.g. foot traffic, transit, population density.</a:t>
-            </a:r>
-          </a:p>
-          <a:p>
-            <a:pPr lvl="1"/>
-            <a:r>
-              <a:rPr lang="en-US" dirty="0"/>
-              <a:t>If all three tell us something about “people walking around”, how do we know what matters?</a:t>
-            </a:r>
-          </a:p>
-          <a:p>
-            <a:pPr lvl="1"/>
-            <a:r>
-              <a:rPr lang="en-US" dirty="0"/>
-              <a:t>If people walking around is important, what do we weight more? </a:t>
-            </a:r>
+              <a:t>… all give info on “size of leg”. </a:t>
+            </a:r>
+          </a:p>
+          <a:p>
+            <a:r>
+              <a:rPr lang="en-US" dirty="0"/>
+              <a:t>The “piece of info” isn’t necessarily a directly observable thing. </a:t>
+            </a:r>
+          </a:p>
+          <a:p>
+            <a:pPr lvl="1"/>
+            <a:r>
+              <a:rPr lang="en-US" dirty="0"/>
+              <a:t>The info is what the model actually needs to make accurate predictions. </a:t>
+            </a:r>
+          </a:p>
+          <a:p>
+            <a:r>
+              <a:rPr lang="en-US" dirty="0"/>
+              <a:t>Ideally, we’d have one variable for each “piece of info”. </a:t>
+            </a:r>
+          </a:p>
+          <a:p>
+            <a:r>
+              <a:rPr lang="en-US" dirty="0"/>
+              <a:t>If we want to tune a model, we’d adjust the parameters (weight of inputs). </a:t>
+            </a:r>
+          </a:p>
+          <a:p>
+            <a:pPr lvl="1"/>
+            <a:r>
+              <a:rPr lang="en-US" dirty="0"/>
+              <a:t>Suppose ”leg size” is something that determines weight, and we have the above features. </a:t>
+            </a:r>
+          </a:p>
+          <a:p>
+            <a:pPr lvl="1"/>
+            <a:r>
+              <a:rPr lang="en-US" dirty="0"/>
+              <a:t>How would a model know where the “leg size” info is coming from? </a:t>
+            </a:r>
+          </a:p>
+          <a:p>
+            <a:r>
+              <a:rPr lang="en-US" dirty="0"/>
+              <a:t>*Note: The tuning process will be more clear in a couple of weeks. </a:t>
+            </a:r>
+          </a:p>
+          <a:p>
+            <a:endParaRPr lang="en-US" dirty="0"/>
           </a:p>
         </p:txBody>
       </p:sp>
     </p:spTree>
     <p:extLst>
       <p:ext uri="{BB962C8B-B14F-4D97-AF65-F5344CB8AC3E}">
-        <p14:creationId xmlns:p14="http://schemas.microsoft.com/office/powerpoint/2010/main" val="990605241"/>
+        <p14:creationId xmlns:p14="http://schemas.microsoft.com/office/powerpoint/2010/main" val="4063668131"/>
       </p:ext>
     </p:extLst>
   </p:cSld>
@@ -6638,7 +6607,7 @@
           <p:cNvPr id="2" name="Title 1">
             <a:extLst>
               <a:ext uri="{FF2B5EF4-FFF2-40B4-BE49-F238E27FC236}">
-                <a16:creationId xmlns:a16="http://schemas.microsoft.com/office/drawing/2014/main" id="{52E71A9E-7C47-6840-50F2-A56D39E218E9}"/>
+                <a16:creationId xmlns:a16="http://schemas.microsoft.com/office/drawing/2014/main" id="{719CCE9F-899C-DC97-92C7-EBA7069C9889}"/>
               </a:ext>
             </a:extLst>
           </p:cNvPr>
@@ -6656,7 +6625,7 @@
           <a:p>
             <a:r>
               <a:rPr lang="en-US" dirty="0"/>
-              <a:t>Managing M.C.</a:t>
+              <a:t>So, What’s the Problem? </a:t>
             </a:r>
           </a:p>
         </p:txBody>
@@ -6666,7 +6635,7 @@
           <p:cNvPr id="3" name="Content Placeholder 2">
             <a:extLst>
               <a:ext uri="{FF2B5EF4-FFF2-40B4-BE49-F238E27FC236}">
-                <a16:creationId xmlns:a16="http://schemas.microsoft.com/office/drawing/2014/main" id="{C3B4270B-997D-BDDB-0CA6-DA8827327E59}"/>
+                <a16:creationId xmlns:a16="http://schemas.microsoft.com/office/drawing/2014/main" id="{04BEC346-AE6F-4717-1ED0-F90F8661361B}"/>
               </a:ext>
             </a:extLst>
           </p:cNvPr>
@@ -6679,96 +6648,119 @@
         </p:nvSpPr>
         <p:spPr>
           <a:xfrm>
-            <a:off x="1451579" y="1945758"/>
-            <a:ext cx="10254868" cy="4107723"/>
-          </a:xfrm>
-        </p:spPr>
-        <p:txBody>
-          <a:bodyPr>
-            <a:normAutofit/>
-          </a:bodyPr>
-          <a:lstStyle/>
-          <a:p>
-            <a:r>
-              <a:rPr lang="en-US" dirty="0"/>
-              <a:t>Having some </a:t>
-            </a:r>
-            <a:r>
-              <a:rPr lang="en-US" dirty="0" err="1"/>
-              <a:t>m.c.</a:t>
-            </a:r>
-            <a:r>
-              <a:rPr lang="en-US" dirty="0"/>
-              <a:t> won’t break things on its own. </a:t>
-            </a:r>
-          </a:p>
-          <a:p>
-            <a:r>
-              <a:rPr lang="en-US" dirty="0"/>
-              <a:t>In high-dimensional (many X) models, training may be slow or not converge. </a:t>
-            </a:r>
-          </a:p>
-          <a:p>
-            <a:r>
-              <a:rPr lang="en-US" dirty="0"/>
-              <a:t>In cases like our linear regression, we can’t know which inputs matter. </a:t>
-            </a:r>
-          </a:p>
-          <a:p>
-            <a:pPr lvl="1"/>
-            <a:r>
-              <a:rPr lang="en-US" dirty="0"/>
-              <a:t>Our first tuning step can be to remove, so model can fit accurately. </a:t>
-            </a:r>
-          </a:p>
-          <a:p>
-            <a:pPr lvl="1"/>
-            <a:r>
-              <a:rPr lang="en-US" dirty="0"/>
-              <a:t>The model is trying to weight importance, if the same thing comes from many sources, that’s hard. </a:t>
-            </a:r>
-          </a:p>
-          <a:p>
-            <a:r>
-              <a:rPr lang="en-US" dirty="0"/>
-              <a:t>Generally, the simpler the model, the better. </a:t>
-            </a:r>
-          </a:p>
-          <a:p>
-            <a:pPr lvl="1"/>
-            <a:r>
-              <a:rPr lang="en-US" dirty="0"/>
-              <a:t>Similar performance with fewer inputs is cheaper. </a:t>
-            </a:r>
-          </a:p>
-          <a:p>
-            <a:pPr lvl="1"/>
-            <a:r>
-              <a:rPr lang="en-US" dirty="0"/>
-              <a:t>In the bf% example, we literally need less work and tools. </a:t>
-            </a:r>
-          </a:p>
-          <a:p>
-            <a:pPr lvl="1"/>
-            <a:r>
-              <a:rPr lang="en-US" dirty="0"/>
-              <a:t>Other whys and </a:t>
-            </a:r>
-            <a:r>
-              <a:rPr lang="en-US" dirty="0" err="1"/>
-              <a:t>hows</a:t>
-            </a:r>
-            <a:r>
-              <a:rPr lang="en-US" dirty="0"/>
-              <a:t> to come later. </a:t>
-            </a:r>
-          </a:p>
-        </p:txBody>
-      </p:sp>
+            <a:off x="1451579" y="2015732"/>
+            <a:ext cx="9603275" cy="4037749"/>
+          </a:xfrm>
+        </p:spPr>
+        <p:txBody>
+          <a:bodyPr/>
+          <a:lstStyle/>
+          <a:p>
+            <a:r>
+              <a:rPr lang="en-US" dirty="0"/>
+              <a:t>If we have X values that are largely the same we call that multicollinearity. </a:t>
+            </a:r>
+          </a:p>
+          <a:p>
+            <a:pPr lvl="1"/>
+            <a:r>
+              <a:rPr lang="en-US" dirty="0"/>
+              <a:t>I.e. several things are highly correlated with each other. </a:t>
+            </a:r>
+          </a:p>
+          <a:p>
+            <a:r>
+              <a:rPr lang="en-US" dirty="0"/>
+              <a:t>This isn’t fatal, but can give us some issues. </a:t>
+            </a:r>
+          </a:p>
+          <a:p>
+            <a:pPr lvl="1"/>
+            <a:r>
+              <a:rPr lang="en-US" dirty="0"/>
+              <a:t>If multiple inputs have the same info, the model can’t figure out how to weight each. </a:t>
+            </a:r>
+          </a:p>
+          <a:p>
+            <a:pPr lvl="1"/>
+            <a:r>
+              <a:rPr lang="en-US" dirty="0"/>
+              <a:t>The assumption is inputs are orthogonal, they have nothing to do with each other. </a:t>
+            </a:r>
+          </a:p>
+          <a:p>
+            <a:pPr lvl="1"/>
+            <a:r>
+              <a:rPr lang="en-US" dirty="0"/>
+              <a:t>A model can’t be sure how to change coefficients as several are almost the same. </a:t>
+            </a:r>
+          </a:p>
+          <a:p>
+            <a:pPr lvl="1"/>
+            <a:r>
+              <a:rPr lang="en-US" dirty="0"/>
+              <a:t>The learning can be hard (not with LLS) and can swing with small changes. </a:t>
+            </a:r>
+          </a:p>
+          <a:p>
+            <a:r>
+              <a:rPr lang="en-US" dirty="0"/>
+              <a:t>Ideally, we want each thing measured exactly once. </a:t>
+            </a:r>
+          </a:p>
+        </p:txBody>
+      </p:sp>
+      <p:pic>
+        <p:nvPicPr>
+          <p:cNvPr id="4" name="Picture 2" descr="The regression model in a 3D space. A multi-variable regression model... |  Download Scientific Diagram">
+            <a:extLst>
+              <a:ext uri="{FF2B5EF4-FFF2-40B4-BE49-F238E27FC236}">
+                <a16:creationId xmlns:a16="http://schemas.microsoft.com/office/drawing/2014/main" id="{F81911F5-536D-B1B7-23C0-DAE0A5792CBF}"/>
+              </a:ext>
+            </a:extLst>
+          </p:cNvPr>
+          <p:cNvPicPr>
+            <a:picLocks noChangeAspect="1" noChangeArrowheads="1"/>
+          </p:cNvPicPr>
+          <p:nvPr/>
+        </p:nvPicPr>
+        <p:blipFill>
+          <a:blip r:embed="rId2">
+            <a:extLst>
+              <a:ext uri="{28A0092B-C50C-407E-A947-70E740481C1C}">
+                <a14:useLocalDpi xmlns:a14="http://schemas.microsoft.com/office/drawing/2010/main" val="0"/>
+              </a:ext>
+            </a:extLst>
+          </a:blip>
+          <a:srcRect/>
+          <a:stretch>
+            <a:fillRect/>
+          </a:stretch>
+        </p:blipFill>
+        <p:spPr bwMode="auto">
+          <a:xfrm>
+            <a:off x="8155459" y="1"/>
+            <a:ext cx="4003590" cy="2034766"/>
+          </a:xfrm>
+          <a:prstGeom prst="rect">
+            <a:avLst/>
+          </a:prstGeom>
+          <a:noFill/>
+          <a:extLst>
+            <a:ext uri="{909E8E84-426E-40DD-AFC4-6F175D3DCCD1}">
+              <a14:hiddenFill xmlns:a14="http://schemas.microsoft.com/office/drawing/2010/main">
+                <a:solidFill>
+                  <a:srgbClr val="FFFFFF"/>
+                </a:solidFill>
+              </a14:hiddenFill>
+            </a:ext>
+          </a:extLst>
+        </p:spPr>
+      </p:pic>
     </p:spTree>
     <p:extLst>
       <p:ext uri="{BB962C8B-B14F-4D97-AF65-F5344CB8AC3E}">
-        <p14:creationId xmlns:p14="http://schemas.microsoft.com/office/powerpoint/2010/main" val="2220712716"/>
+        <p14:creationId xmlns:p14="http://schemas.microsoft.com/office/powerpoint/2010/main" val="808301570"/>
       </p:ext>
     </p:extLst>
   </p:cSld>
@@ -6800,7 +6792,7 @@
           <p:cNvPr id="2" name="Title 1">
             <a:extLst>
               <a:ext uri="{FF2B5EF4-FFF2-40B4-BE49-F238E27FC236}">
-                <a16:creationId xmlns:a16="http://schemas.microsoft.com/office/drawing/2014/main" id="{D54CD3E1-85EC-DFC3-D236-AE8FBAA7F9F6}"/>
+                <a16:creationId xmlns:a16="http://schemas.microsoft.com/office/drawing/2014/main" id="{1C3EE54B-EBCF-BAFF-A500-7895B3D30FE2}"/>
               </a:ext>
             </a:extLst>
           </p:cNvPr>
@@ -6818,114 +6810,124 @@
           <a:p>
             <a:r>
               <a:rPr lang="en-US" dirty="0"/>
-              <a:t>Detecting </a:t>
+              <a:t>More Business-y Example</a:t>
+            </a:r>
+          </a:p>
+        </p:txBody>
+      </p:sp>
+      <p:sp>
+        <p:nvSpPr>
+          <p:cNvPr id="3" name="Content Placeholder 2">
+            <a:extLst>
+              <a:ext uri="{FF2B5EF4-FFF2-40B4-BE49-F238E27FC236}">
+                <a16:creationId xmlns:a16="http://schemas.microsoft.com/office/drawing/2014/main" id="{D06565AD-BC48-AC50-D088-40E45C1A3C01}"/>
+              </a:ext>
+            </a:extLst>
+          </p:cNvPr>
+          <p:cNvSpPr>
+            <a:spLocks noGrp="1"/>
+          </p:cNvSpPr>
+          <p:nvPr>
+            <p:ph idx="1"/>
+          </p:nvPr>
+        </p:nvSpPr>
+        <p:spPr>
+          <a:xfrm>
+            <a:off x="1451579" y="1853755"/>
+            <a:ext cx="9603275" cy="4291864"/>
+          </a:xfrm>
+        </p:spPr>
+        <p:txBody>
+          <a:bodyPr/>
+          <a:lstStyle/>
+          <a:p>
+            <a:r>
+              <a:rPr lang="en-US" dirty="0"/>
+              <a:t>We have a model that predicts the success of our convenience stores. </a:t>
+            </a:r>
+          </a:p>
+          <a:p>
+            <a:r>
+              <a:rPr lang="en-US" dirty="0"/>
+              <a:t>Several things matter for a store’s success:</a:t>
+            </a:r>
+          </a:p>
+          <a:p>
+            <a:pPr lvl="1"/>
+            <a:r>
+              <a:rPr lang="en-US" dirty="0"/>
+              <a:t>Location, pricing, customer satisfaction, product mix, </a:t>
             </a:r>
             <a:r>
               <a:rPr lang="en-US" dirty="0" err="1"/>
-              <a:t>M.c.</a:t>
-            </a:r>
-            <a:endParaRPr lang="en-US" dirty="0"/>
-          </a:p>
-        </p:txBody>
-      </p:sp>
-      <p:sp>
-        <p:nvSpPr>
-          <p:cNvPr id="3" name="Content Placeholder 2">
-            <a:extLst>
-              <a:ext uri="{FF2B5EF4-FFF2-40B4-BE49-F238E27FC236}">
-                <a16:creationId xmlns:a16="http://schemas.microsoft.com/office/drawing/2014/main" id="{2B8D077B-E87A-1B58-2E36-FE87921AC61D}"/>
-              </a:ext>
-            </a:extLst>
-          </p:cNvPr>
-          <p:cNvSpPr>
-            <a:spLocks noGrp="1"/>
-          </p:cNvSpPr>
-          <p:nvPr>
-            <p:ph idx="1"/>
-          </p:nvPr>
-        </p:nvSpPr>
-        <p:spPr>
-          <a:xfrm>
-            <a:off x="574158" y="2015732"/>
-            <a:ext cx="4742380" cy="3450613"/>
-          </a:xfrm>
-        </p:spPr>
-        <p:txBody>
-          <a:bodyPr/>
-          <a:lstStyle/>
-          <a:p>
-            <a:r>
-              <a:rPr lang="en-US" dirty="0"/>
-              <a:t>We can usually spot it in a </a:t>
+              <a:t>etc</a:t>
+            </a:r>
+            <a:r>
+              <a:rPr lang="en-US" dirty="0"/>
+              <a:t>…</a:t>
+            </a:r>
+          </a:p>
+          <a:p>
+            <a:r>
+              <a:rPr lang="en-US" dirty="0"/>
+              <a:t>Each of these can be measured, but not directly, e.g. location:</a:t>
+            </a:r>
+          </a:p>
+          <a:p>
+            <a:pPr lvl="1"/>
+            <a:r>
+              <a:rPr lang="en-US" dirty="0"/>
+              <a:t>There’s no direct measurement for “location goodness”, but it clearly matters. </a:t>
+            </a:r>
+          </a:p>
+          <a:p>
+            <a:pPr lvl="1"/>
+            <a:r>
+              <a:rPr lang="en-US" dirty="0"/>
+              <a:t>What features measure this? Distance to transit/highway/apartment/intersection. </a:t>
+            </a:r>
+          </a:p>
+          <a:p>
+            <a:pPr lvl="1"/>
+            <a:r>
+              <a:rPr lang="en-US" dirty="0"/>
+              <a:t>Foot traffic, car traffic, “ease of access”, population, visibility of store, sign placement, </a:t>
             </a:r>
             <a:r>
               <a:rPr lang="en-US" dirty="0" err="1"/>
-              <a:t>pairplot</a:t>
-            </a:r>
-            <a:r>
-              <a:rPr lang="en-US" dirty="0"/>
-              <a:t>. </a:t>
-            </a:r>
-          </a:p>
-          <a:p>
-            <a:r>
-              <a:rPr lang="en-US" dirty="0"/>
-              <a:t>Pairs of variables that appear highly correlated. </a:t>
-            </a:r>
-          </a:p>
-        </p:txBody>
-      </p:sp>
-      <p:pic>
-        <p:nvPicPr>
-          <p:cNvPr id="10242" name="Picture 2" descr="3 Ways To Detect Multicollinearity &amp; Reasons Why To Expect It | by M.  Hammad Hassan | Medium">
-            <a:extLst>
-              <a:ext uri="{FF2B5EF4-FFF2-40B4-BE49-F238E27FC236}">
-                <a16:creationId xmlns:a16="http://schemas.microsoft.com/office/drawing/2014/main" id="{5C097F58-9604-5F4C-187F-B53F3D156ED5}"/>
-              </a:ext>
-            </a:extLst>
-          </p:cNvPr>
-          <p:cNvPicPr>
-            <a:picLocks noChangeAspect="1" noChangeArrowheads="1"/>
-          </p:cNvPicPr>
-          <p:nvPr/>
-        </p:nvPicPr>
-        <p:blipFill>
-          <a:blip r:embed="rId2">
-            <a:extLst>
-              <a:ext uri="{28A0092B-C50C-407E-A947-70E740481C1C}">
-                <a14:useLocalDpi xmlns:a14="http://schemas.microsoft.com/office/drawing/2010/main" val="0"/>
-              </a:ext>
-            </a:extLst>
-          </a:blip>
-          <a:srcRect/>
-          <a:stretch>
-            <a:fillRect/>
-          </a:stretch>
-        </p:blipFill>
-        <p:spPr bwMode="auto">
-          <a:xfrm>
-            <a:off x="5316537" y="0"/>
-            <a:ext cx="6875463" cy="6858000"/>
-          </a:xfrm>
-          <a:prstGeom prst="rect">
-            <a:avLst/>
-          </a:prstGeom>
-          <a:noFill/>
-          <a:extLst>
-            <a:ext uri="{909E8E84-426E-40DD-AFC4-6F175D3DCCD1}">
-              <a14:hiddenFill xmlns:a14="http://schemas.microsoft.com/office/drawing/2010/main">
-                <a:solidFill>
-                  <a:srgbClr val="FFFFFF"/>
-                </a:solidFill>
-              </a14:hiddenFill>
-            </a:ext>
-          </a:extLst>
-        </p:spPr>
-      </p:pic>
+              <a:t>etc</a:t>
+            </a:r>
+            <a:r>
+              <a:rPr lang="en-US" dirty="0"/>
+              <a:t>…</a:t>
+            </a:r>
+          </a:p>
+          <a:p>
+            <a:r>
+              <a:rPr lang="en-US" dirty="0"/>
+              <a:t>Each feature overlaps in what it contributes – e.g. foot traffic, transit, population density.</a:t>
+            </a:r>
+          </a:p>
+          <a:p>
+            <a:pPr lvl="1"/>
+            <a:r>
+              <a:rPr lang="en-US" dirty="0"/>
+              <a:t>If all three tell us something about “people walking around”, how do we know what matters?</a:t>
+            </a:r>
+          </a:p>
+          <a:p>
+            <a:pPr lvl="1"/>
+            <a:r>
+              <a:rPr lang="en-US" dirty="0"/>
+              <a:t>If people walking around is important, what do we weight more? </a:t>
+            </a:r>
+          </a:p>
+        </p:txBody>
+      </p:sp>
     </p:spTree>
     <p:extLst>
       <p:ext uri="{BB962C8B-B14F-4D97-AF65-F5344CB8AC3E}">
-        <p14:creationId xmlns:p14="http://schemas.microsoft.com/office/powerpoint/2010/main" val="2772730483"/>
+        <p14:creationId xmlns:p14="http://schemas.microsoft.com/office/powerpoint/2010/main" val="990605241"/>
       </p:ext>
     </p:extLst>
   </p:cSld>
@@ -6957,7 +6959,7 @@
           <p:cNvPr id="2" name="Title 1">
             <a:extLst>
               <a:ext uri="{FF2B5EF4-FFF2-40B4-BE49-F238E27FC236}">
-                <a16:creationId xmlns:a16="http://schemas.microsoft.com/office/drawing/2014/main" id="{81F9C6C2-A154-8825-FDBB-D88C4FC13FE2}"/>
+                <a16:creationId xmlns:a16="http://schemas.microsoft.com/office/drawing/2014/main" id="{52E71A9E-7C47-6840-50F2-A56D39E218E9}"/>
               </a:ext>
             </a:extLst>
           </p:cNvPr>
@@ -6975,7 +6977,7 @@
           <a:p>
             <a:r>
               <a:rPr lang="en-US" dirty="0"/>
-              <a:t>Measuring M.C. </a:t>
+              <a:t>Managing M.C.</a:t>
             </a:r>
           </a:p>
         </p:txBody>
@@ -6985,7 +6987,7 @@
           <p:cNvPr id="3" name="Content Placeholder 2">
             <a:extLst>
               <a:ext uri="{FF2B5EF4-FFF2-40B4-BE49-F238E27FC236}">
-                <a16:creationId xmlns:a16="http://schemas.microsoft.com/office/drawing/2014/main" id="{1A27369B-0495-86E7-C547-0997A874E96A}"/>
+                <a16:creationId xmlns:a16="http://schemas.microsoft.com/office/drawing/2014/main" id="{C3B4270B-997D-BDDB-0CA6-DA8827327E59}"/>
               </a:ext>
             </a:extLst>
           </p:cNvPr>
@@ -6998,75 +7000,19 @@
         </p:nvSpPr>
         <p:spPr>
           <a:xfrm>
-            <a:off x="1451579" y="1853754"/>
-            <a:ext cx="9603275" cy="4199727"/>
-          </a:xfrm>
-        </p:spPr>
-        <p:txBody>
-          <a:bodyPr/>
-          <a:lstStyle/>
-          <a:p>
-            <a:r>
-              <a:rPr lang="en-US" dirty="0"/>
-              <a:t>We can also calculate a metric called the VIF – variable inflation factor. </a:t>
-            </a:r>
-          </a:p>
-          <a:p>
-            <a:r>
-              <a:rPr lang="en-US" dirty="0"/>
-              <a:t>VIF measures how much of this variable’s info is explained by others. </a:t>
-            </a:r>
-          </a:p>
-          <a:p>
-            <a:pPr lvl="1"/>
-            <a:r>
-              <a:rPr lang="en-US" dirty="0"/>
-              <a:t>We get a value for each input variable. </a:t>
-            </a:r>
-          </a:p>
-          <a:p>
-            <a:pPr lvl="1"/>
-            <a:r>
-              <a:rPr lang="en-US" dirty="0"/>
-              <a:t>1 means there is no multicollinearity. </a:t>
-            </a:r>
-          </a:p>
-          <a:p>
-            <a:pPr lvl="1"/>
-            <a:r>
-              <a:rPr lang="en-US" dirty="0"/>
-              <a:t>Over about 10 are ones that require real investigation. </a:t>
-            </a:r>
-          </a:p>
-          <a:p>
-            <a:r>
-              <a:rPr lang="en-US" dirty="0"/>
-              <a:t>We can remove redundant ones with the help of the p values. </a:t>
-            </a:r>
-          </a:p>
-          <a:p>
-            <a:pPr lvl="1"/>
-            <a:r>
-              <a:rPr lang="en-US" dirty="0" err="1"/>
-              <a:t>Statsmodels</a:t>
-            </a:r>
-            <a:r>
-              <a:rPr lang="en-US" dirty="0"/>
-              <a:t> will give us per variable p-values. </a:t>
-            </a:r>
-          </a:p>
-          <a:p>
-            <a:pPr lvl="1"/>
-            <a:r>
-              <a:rPr lang="en-US" dirty="0"/>
-              <a:t>NH – this feature does not matter (m=0), what is the prob of seeing results this large. </a:t>
-            </a:r>
-          </a:p>
-          <a:p>
-            <a:pPr lvl="1"/>
-            <a:r>
-              <a:rPr lang="en-US" dirty="0"/>
-              <a:t>Be aware, there can be odd swings when </a:t>
+            <a:off x="1451579" y="1945758"/>
+            <a:ext cx="10254868" cy="4107723"/>
+          </a:xfrm>
+        </p:spPr>
+        <p:txBody>
+          <a:bodyPr>
+            <a:normAutofit/>
+          </a:bodyPr>
+          <a:lstStyle/>
+          <a:p>
+            <a:r>
+              <a:rPr lang="en-US" dirty="0"/>
+              <a:t>Having some </a:t>
             </a:r>
             <a:r>
               <a:rPr lang="en-US" dirty="0" err="1"/>
@@ -7074,92 +7020,76 @@
             </a:r>
             <a:r>
               <a:rPr lang="en-US" dirty="0"/>
-              <a:t> is there – model can’t weight properly. </a:t>
-            </a:r>
-          </a:p>
-        </p:txBody>
-      </p:sp>
-      <p:pic>
-        <p:nvPicPr>
-          <p:cNvPr id="11266" name="Picture 2" descr="Variance Inflation Factor (VIF). We have always heard about… | by Saurabh  Gupta | Analytics Vidhya | Medium">
-            <a:extLst>
-              <a:ext uri="{FF2B5EF4-FFF2-40B4-BE49-F238E27FC236}">
-                <a16:creationId xmlns:a16="http://schemas.microsoft.com/office/drawing/2014/main" id="{5A08ABD7-9778-8F5C-69F3-0F2BE4220957}"/>
-              </a:ext>
-            </a:extLst>
-          </p:cNvPr>
-          <p:cNvPicPr>
-            <a:picLocks noChangeAspect="1" noChangeArrowheads="1"/>
-          </p:cNvPicPr>
-          <p:nvPr/>
-        </p:nvPicPr>
-        <p:blipFill>
-          <a:blip r:embed="rId2">
-            <a:extLst>
-              <a:ext uri="{28A0092B-C50C-407E-A947-70E740481C1C}">
-                <a14:useLocalDpi xmlns:a14="http://schemas.microsoft.com/office/drawing/2010/main" val="0"/>
-              </a:ext>
-            </a:extLst>
-          </a:blip>
-          <a:srcRect/>
-          <a:stretch>
-            <a:fillRect/>
-          </a:stretch>
-        </p:blipFill>
-        <p:spPr bwMode="auto">
-          <a:xfrm>
-            <a:off x="8591106" y="2961900"/>
-            <a:ext cx="3600893" cy="1870594"/>
-          </a:xfrm>
-          <a:prstGeom prst="rect">
-            <a:avLst/>
-          </a:prstGeom>
-          <a:noFill/>
-          <a:extLst>
-            <a:ext uri="{909E8E84-426E-40DD-AFC4-6F175D3DCCD1}">
-              <a14:hiddenFill xmlns:a14="http://schemas.microsoft.com/office/drawing/2010/main">
-                <a:solidFill>
-                  <a:srgbClr val="FFFFFF"/>
-                </a:solidFill>
-              </a14:hiddenFill>
-            </a:ext>
-          </a:extLst>
-        </p:spPr>
-      </p:pic>
-      <p:pic>
-        <p:nvPicPr>
-          <p:cNvPr id="4" name="Picture 3">
-            <a:extLst>
-              <a:ext uri="{FF2B5EF4-FFF2-40B4-BE49-F238E27FC236}">
-                <a16:creationId xmlns:a16="http://schemas.microsoft.com/office/drawing/2014/main" id="{C5897E0E-5BAD-7D17-1E79-0C36FB87B252}"/>
-              </a:ext>
-            </a:extLst>
-          </p:cNvPr>
-          <p:cNvPicPr>
-            <a:picLocks noChangeAspect="1"/>
-          </p:cNvPicPr>
-          <p:nvPr/>
-        </p:nvPicPr>
-        <p:blipFill>
-          <a:blip r:embed="rId3"/>
-          <a:stretch>
-            <a:fillRect/>
-          </a:stretch>
-        </p:blipFill>
-        <p:spPr>
-          <a:xfrm>
-            <a:off x="6943060" y="-8357"/>
-            <a:ext cx="5248939" cy="1836678"/>
-          </a:xfrm>
-          <a:prstGeom prst="rect">
-            <a:avLst/>
-          </a:prstGeom>
-        </p:spPr>
-      </p:pic>
+              <a:t> won’t break things on its own. </a:t>
+            </a:r>
+          </a:p>
+          <a:p>
+            <a:r>
+              <a:rPr lang="en-US" dirty="0"/>
+              <a:t>In high-dimensional (many X) models, training may be slow or not converge. </a:t>
+            </a:r>
+          </a:p>
+          <a:p>
+            <a:r>
+              <a:rPr lang="en-US" dirty="0"/>
+              <a:t>In cases like our linear regression, we can’t know which inputs matter. </a:t>
+            </a:r>
+          </a:p>
+          <a:p>
+            <a:pPr lvl="1"/>
+            <a:r>
+              <a:rPr lang="en-US" dirty="0"/>
+              <a:t>Our first tuning step can be to remove, so model can fit accurately. </a:t>
+            </a:r>
+          </a:p>
+          <a:p>
+            <a:pPr lvl="1"/>
+            <a:r>
+              <a:rPr lang="en-US" dirty="0"/>
+              <a:t>The model is trying to weight importance, if the same thing comes from many sources, that’s hard. </a:t>
+            </a:r>
+          </a:p>
+          <a:p>
+            <a:r>
+              <a:rPr lang="en-US" dirty="0"/>
+              <a:t>Generally, the simpler the model, the better. </a:t>
+            </a:r>
+          </a:p>
+          <a:p>
+            <a:pPr lvl="1"/>
+            <a:r>
+              <a:rPr lang="en-US" dirty="0"/>
+              <a:t>Similar performance with fewer inputs is cheaper. </a:t>
+            </a:r>
+          </a:p>
+          <a:p>
+            <a:pPr lvl="1"/>
+            <a:r>
+              <a:rPr lang="en-US" dirty="0"/>
+              <a:t>In the bf% example, we literally need less work and tools. </a:t>
+            </a:r>
+          </a:p>
+          <a:p>
+            <a:pPr lvl="1"/>
+            <a:r>
+              <a:rPr lang="en-US" dirty="0"/>
+              <a:t>Other whys and </a:t>
+            </a:r>
+            <a:r>
+              <a:rPr lang="en-US" dirty="0" err="1"/>
+              <a:t>hows</a:t>
+            </a:r>
+            <a:r>
+              <a:rPr lang="en-US" dirty="0"/>
+              <a:t> to come later. </a:t>
+            </a:r>
+          </a:p>
+        </p:txBody>
+      </p:sp>
     </p:spTree>
     <p:extLst>
       <p:ext uri="{BB962C8B-B14F-4D97-AF65-F5344CB8AC3E}">
-        <p14:creationId xmlns:p14="http://schemas.microsoft.com/office/powerpoint/2010/main" val="1177527087"/>
+        <p14:creationId xmlns:p14="http://schemas.microsoft.com/office/powerpoint/2010/main" val="2220712716"/>
       </p:ext>
     </p:extLst>
   </p:cSld>
@@ -7191,7 +7121,7 @@
           <p:cNvPr id="2" name="Title 1">
             <a:extLst>
               <a:ext uri="{FF2B5EF4-FFF2-40B4-BE49-F238E27FC236}">
-                <a16:creationId xmlns:a16="http://schemas.microsoft.com/office/drawing/2014/main" id="{DBAB7B93-741F-751B-B5F9-E27762CAD4C7}"/>
+                <a16:creationId xmlns:a16="http://schemas.microsoft.com/office/drawing/2014/main" id="{D54CD3E1-85EC-DFC3-D236-AE8FBAA7F9F6}"/>
               </a:ext>
             </a:extLst>
           </p:cNvPr>
@@ -7209,8 +7139,13 @@
           <a:p>
             <a:r>
               <a:rPr lang="en-US" dirty="0"/>
-              <a:t>Multicollinearity Process</a:t>
-            </a:r>
+              <a:t>Detecting </a:t>
+            </a:r>
+            <a:r>
+              <a:rPr lang="en-US" dirty="0" err="1"/>
+              <a:t>M.c.</a:t>
+            </a:r>
+            <a:endParaRPr lang="en-US" dirty="0"/>
           </a:p>
         </p:txBody>
       </p:sp>
@@ -7219,7 +7154,7 @@
           <p:cNvPr id="3" name="Content Placeholder 2">
             <a:extLst>
               <a:ext uri="{FF2B5EF4-FFF2-40B4-BE49-F238E27FC236}">
-                <a16:creationId xmlns:a16="http://schemas.microsoft.com/office/drawing/2014/main" id="{D5F24B8C-3C93-10B9-E249-DA76197B69D8}"/>
+                <a16:creationId xmlns:a16="http://schemas.microsoft.com/office/drawing/2014/main" id="{2B8D077B-E87A-1B58-2E36-FE87921AC61D}"/>
               </a:ext>
             </a:extLst>
           </p:cNvPr>
@@ -7232,43 +7167,21 @@
         </p:nvSpPr>
         <p:spPr>
           <a:xfrm>
-            <a:off x="1451579" y="2015732"/>
-            <a:ext cx="9603275" cy="4037749"/>
-          </a:xfrm>
-        </p:spPr>
-        <p:txBody>
-          <a:bodyPr/>
-          <a:lstStyle/>
-          <a:p>
-            <a:r>
-              <a:rPr lang="en-US" dirty="0"/>
-              <a:t>We can do an iterative process to deal with </a:t>
+            <a:off x="574158" y="2015732"/>
+            <a:ext cx="4742380" cy="3450613"/>
+          </a:xfrm>
+        </p:spPr>
+        <p:txBody>
+          <a:bodyPr/>
+          <a:lstStyle/>
+          <a:p>
+            <a:r>
+              <a:rPr lang="en-US" dirty="0"/>
+              <a:t>We can usually spot it in a </a:t>
             </a:r>
             <a:r>
               <a:rPr lang="en-US" dirty="0" err="1"/>
-              <a:t>m.c.</a:t>
-            </a:r>
-            <a:r>
-              <a:rPr lang="en-US" dirty="0"/>
-              <a:t>:</a:t>
-            </a:r>
-          </a:p>
-          <a:p>
-            <a:pPr lvl="1"/>
-            <a:r>
-              <a:rPr lang="en-US" dirty="0"/>
-              <a:t>Run the VIF values. </a:t>
-            </a:r>
-          </a:p>
-          <a:p>
-            <a:pPr lvl="1"/>
-            <a:r>
-              <a:rPr lang="en-US" dirty="0"/>
-              <a:t>Run a model via </a:t>
-            </a:r>
-            <a:r>
-              <a:rPr lang="en-US" dirty="0" err="1"/>
-              <a:t>statsmodels</a:t>
+              <a:t>pairplot</a:t>
             </a:r>
             <a:r>
               <a:rPr lang="en-US" dirty="0"/>
@@ -7276,38 +7189,64 @@
             </a:r>
           </a:p>
           <a:p>
-            <a:pPr lvl="1"/>
-            <a:r>
-              <a:rPr lang="en-US" dirty="0"/>
-              <a:t>Remove some variables based on VIF, p-value, and domain knowledge (i.e. which measures actually overlap in real life.)</a:t>
-            </a:r>
-          </a:p>
-          <a:p>
-            <a:pPr lvl="1"/>
-            <a:r>
-              <a:rPr lang="en-US" dirty="0"/>
-              <a:t>Repeat as needed. </a:t>
-            </a:r>
-          </a:p>
-          <a:p>
-            <a:r>
-              <a:rPr lang="en-US" dirty="0"/>
-              <a:t>Tuning a model is largely a judgment call, don’t obsess over where to draw line now. </a:t>
-            </a:r>
-          </a:p>
-          <a:p>
-            <a:pPr lvl="1"/>
-            <a:r>
-              <a:rPr lang="en-US" dirty="0"/>
-              <a:t>No high p-values is a good rule of thumb for now. </a:t>
-            </a:r>
-          </a:p>
-        </p:txBody>
-      </p:sp>
+            <a:r>
+              <a:rPr lang="en-US" dirty="0"/>
+              <a:t>Pairs of variables that appear highly correlated. </a:t>
+            </a:r>
+          </a:p>
+        </p:txBody>
+      </p:sp>
+      <p:pic>
+        <p:nvPicPr>
+          <p:cNvPr id="10242" name="Picture 2" descr="3 Ways To Detect Multicollinearity &amp; Reasons Why To Expect It | by M.  Hammad Hassan | Medium">
+            <a:extLst>
+              <a:ext uri="{FF2B5EF4-FFF2-40B4-BE49-F238E27FC236}">
+                <a16:creationId xmlns:a16="http://schemas.microsoft.com/office/drawing/2014/main" id="{5C097F58-9604-5F4C-187F-B53F3D156ED5}"/>
+              </a:ext>
+            </a:extLst>
+          </p:cNvPr>
+          <p:cNvPicPr>
+            <a:picLocks noChangeAspect="1" noChangeArrowheads="1"/>
+          </p:cNvPicPr>
+          <p:nvPr/>
+        </p:nvPicPr>
+        <p:blipFill>
+          <a:blip r:embed="rId2">
+            <a:extLst>
+              <a:ext uri="{28A0092B-C50C-407E-A947-70E740481C1C}">
+                <a14:useLocalDpi xmlns:a14="http://schemas.microsoft.com/office/drawing/2010/main" val="0"/>
+              </a:ext>
+            </a:extLst>
+          </a:blip>
+          <a:srcRect/>
+          <a:stretch>
+            <a:fillRect/>
+          </a:stretch>
+        </p:blipFill>
+        <p:spPr bwMode="auto">
+          <a:xfrm>
+            <a:off x="5316537" y="0"/>
+            <a:ext cx="6875463" cy="6858000"/>
+          </a:xfrm>
+          <a:prstGeom prst="rect">
+            <a:avLst/>
+          </a:prstGeom>
+          <a:noFill/>
+          <a:extLst>
+            <a:ext uri="{909E8E84-426E-40DD-AFC4-6F175D3DCCD1}">
+              <a14:hiddenFill xmlns:a14="http://schemas.microsoft.com/office/drawing/2010/main">
+                <a:solidFill>
+                  <a:srgbClr val="FFFFFF"/>
+                </a:solidFill>
+              </a14:hiddenFill>
+            </a:ext>
+          </a:extLst>
+        </p:spPr>
+      </p:pic>
     </p:spTree>
     <p:extLst>
       <p:ext uri="{BB962C8B-B14F-4D97-AF65-F5344CB8AC3E}">
-        <p14:creationId xmlns:p14="http://schemas.microsoft.com/office/powerpoint/2010/main" val="3320482818"/>
+        <p14:creationId xmlns:p14="http://schemas.microsoft.com/office/powerpoint/2010/main" val="2772730483"/>
       </p:ext>
     </p:extLst>
   </p:cSld>
@@ -7517,7 +7456,7 @@
           <p:cNvPr id="2" name="Title 1">
             <a:extLst>
               <a:ext uri="{FF2B5EF4-FFF2-40B4-BE49-F238E27FC236}">
-                <a16:creationId xmlns:a16="http://schemas.microsoft.com/office/drawing/2014/main" id="{F00579DB-FA27-0B61-6BD7-E48DD2765F59}"/>
+                <a16:creationId xmlns:a16="http://schemas.microsoft.com/office/drawing/2014/main" id="{81F9C6C2-A154-8825-FDBB-D88C4FC13FE2}"/>
               </a:ext>
             </a:extLst>
           </p:cNvPr>
@@ -7535,7 +7474,7 @@
           <a:p>
             <a:r>
               <a:rPr lang="en-US" dirty="0"/>
-              <a:t>R2 and Multiple Regression</a:t>
+              <a:t>Measuring M.C. </a:t>
             </a:r>
           </a:p>
         </p:txBody>
@@ -7545,7 +7484,7 @@
           <p:cNvPr id="3" name="Content Placeholder 2">
             <a:extLst>
               <a:ext uri="{FF2B5EF4-FFF2-40B4-BE49-F238E27FC236}">
-                <a16:creationId xmlns:a16="http://schemas.microsoft.com/office/drawing/2014/main" id="{7D80E5D9-4ECB-3A34-3356-7F1C8EA976A8}"/>
+                <a16:creationId xmlns:a16="http://schemas.microsoft.com/office/drawing/2014/main" id="{1A27369B-0495-86E7-C547-0997A874E96A}"/>
               </a:ext>
             </a:extLst>
           </p:cNvPr>
@@ -7558,59 +7497,168 @@
         </p:nvSpPr>
         <p:spPr>
           <a:xfrm>
-            <a:off x="1451579" y="2015732"/>
-            <a:ext cx="9603275" cy="4037749"/>
-          </a:xfrm>
-        </p:spPr>
-        <p:txBody>
-          <a:bodyPr/>
-          <a:lstStyle/>
-          <a:p>
-            <a:r>
-              <a:rPr lang="en-US" dirty="0"/>
-              <a:t>We can measure the ‘completeness’ of our model with R2. </a:t>
-            </a:r>
-          </a:p>
-          <a:p>
-            <a:pPr lvl="1"/>
-            <a:r>
-              <a:rPr lang="en-US" dirty="0"/>
-              <a:t>How much of the variance of Y do we capture, and how much do we miss? </a:t>
-            </a:r>
-          </a:p>
-          <a:p>
-            <a:pPr lvl="1"/>
-            <a:r>
-              <a:rPr lang="en-US" dirty="0"/>
-              <a:t>Default score is easy to use and compare to others. </a:t>
-            </a:r>
-          </a:p>
-          <a:p>
-            <a:r>
-              <a:rPr lang="en-US" dirty="0"/>
-              <a:t>We can build a more complete model by adding inputs to X. </a:t>
-            </a:r>
-          </a:p>
-          <a:p>
-            <a:pPr lvl="1"/>
-            <a:r>
-              <a:rPr lang="en-US" dirty="0"/>
-              <a:t>Most things are determined by many factors. </a:t>
-            </a:r>
-          </a:p>
-          <a:p>
-            <a:pPr lvl="1"/>
-            <a:r>
-              <a:rPr lang="en-US" dirty="0"/>
-              <a:t>Little changes, other than it becomes harder to visualize and do by hand. </a:t>
-            </a:r>
-          </a:p>
-        </p:txBody>
-      </p:sp>
+            <a:off x="1451579" y="1853754"/>
+            <a:ext cx="9603275" cy="4199727"/>
+          </a:xfrm>
+        </p:spPr>
+        <p:txBody>
+          <a:bodyPr/>
+          <a:lstStyle/>
+          <a:p>
+            <a:r>
+              <a:rPr lang="en-US" dirty="0"/>
+              <a:t>We can also calculate a metric called the VIF – variable inflation factor. </a:t>
+            </a:r>
+          </a:p>
+          <a:p>
+            <a:r>
+              <a:rPr lang="en-US" dirty="0"/>
+              <a:t>VIF measures how much of this variable’s info is explained by others. </a:t>
+            </a:r>
+          </a:p>
+          <a:p>
+            <a:pPr lvl="1"/>
+            <a:r>
+              <a:rPr lang="en-US" dirty="0"/>
+              <a:t>We get a value for each input variable. </a:t>
+            </a:r>
+          </a:p>
+          <a:p>
+            <a:pPr lvl="1"/>
+            <a:r>
+              <a:rPr lang="en-US" dirty="0"/>
+              <a:t>1 means there is no multicollinearity. </a:t>
+            </a:r>
+          </a:p>
+          <a:p>
+            <a:pPr lvl="1"/>
+            <a:r>
+              <a:rPr lang="en-US" dirty="0"/>
+              <a:t>Over about 10 are ones that require real investigation. </a:t>
+            </a:r>
+          </a:p>
+          <a:p>
+            <a:r>
+              <a:rPr lang="en-US" dirty="0"/>
+              <a:t>We can remove redundant ones with the help of the p values. </a:t>
+            </a:r>
+          </a:p>
+          <a:p>
+            <a:pPr lvl="1"/>
+            <a:r>
+              <a:rPr lang="en-US" dirty="0" err="1"/>
+              <a:t>Statsmodels</a:t>
+            </a:r>
+            <a:r>
+              <a:rPr lang="en-US" dirty="0"/>
+              <a:t> will give us per variable p-values. </a:t>
+            </a:r>
+          </a:p>
+          <a:p>
+            <a:pPr lvl="1"/>
+            <a:r>
+              <a:rPr lang="en-US" dirty="0"/>
+              <a:t>NH – this feature does not matter (m=0), what is the prob of seeing results this large. </a:t>
+            </a:r>
+          </a:p>
+          <a:p>
+            <a:pPr lvl="1"/>
+            <a:r>
+              <a:rPr lang="en-US" dirty="0"/>
+              <a:t>Be aware, there can be odd swings when </a:t>
+            </a:r>
+            <a:r>
+              <a:rPr lang="en-US" dirty="0" err="1"/>
+              <a:t>m.c.</a:t>
+            </a:r>
+            <a:r>
+              <a:rPr lang="en-US" dirty="0"/>
+              <a:t> is there – model can’t weight properly. </a:t>
+            </a:r>
+          </a:p>
+        </p:txBody>
+      </p:sp>
+      <p:pic>
+        <p:nvPicPr>
+          <p:cNvPr id="11266" name="Picture 2" descr="Variance Inflation Factor (VIF). We have always heard about… | by Saurabh  Gupta | Analytics Vidhya | Medium">
+            <a:extLst>
+              <a:ext uri="{FF2B5EF4-FFF2-40B4-BE49-F238E27FC236}">
+                <a16:creationId xmlns:a16="http://schemas.microsoft.com/office/drawing/2014/main" id="{5A08ABD7-9778-8F5C-69F3-0F2BE4220957}"/>
+              </a:ext>
+            </a:extLst>
+          </p:cNvPr>
+          <p:cNvPicPr>
+            <a:picLocks noChangeAspect="1" noChangeArrowheads="1"/>
+          </p:cNvPicPr>
+          <p:nvPr/>
+        </p:nvPicPr>
+        <p:blipFill>
+          <a:blip r:embed="rId2">
+            <a:extLst>
+              <a:ext uri="{28A0092B-C50C-407E-A947-70E740481C1C}">
+                <a14:useLocalDpi xmlns:a14="http://schemas.microsoft.com/office/drawing/2010/main" val="0"/>
+              </a:ext>
+            </a:extLst>
+          </a:blip>
+          <a:srcRect/>
+          <a:stretch>
+            <a:fillRect/>
+          </a:stretch>
+        </p:blipFill>
+        <p:spPr bwMode="auto">
+          <a:xfrm>
+            <a:off x="8591106" y="2961900"/>
+            <a:ext cx="3600893" cy="1870594"/>
+          </a:xfrm>
+          <a:prstGeom prst="rect">
+            <a:avLst/>
+          </a:prstGeom>
+          <a:noFill/>
+          <a:extLst>
+            <a:ext uri="{909E8E84-426E-40DD-AFC4-6F175D3DCCD1}">
+              <a14:hiddenFill xmlns:a14="http://schemas.microsoft.com/office/drawing/2010/main">
+                <a:solidFill>
+                  <a:srgbClr val="FFFFFF"/>
+                </a:solidFill>
+              </a14:hiddenFill>
+            </a:ext>
+          </a:extLst>
+        </p:spPr>
+      </p:pic>
+      <p:pic>
+        <p:nvPicPr>
+          <p:cNvPr id="4" name="Picture 3">
+            <a:extLst>
+              <a:ext uri="{FF2B5EF4-FFF2-40B4-BE49-F238E27FC236}">
+                <a16:creationId xmlns:a16="http://schemas.microsoft.com/office/drawing/2014/main" id="{C5897E0E-5BAD-7D17-1E79-0C36FB87B252}"/>
+              </a:ext>
+            </a:extLst>
+          </p:cNvPr>
+          <p:cNvPicPr>
+            <a:picLocks noChangeAspect="1"/>
+          </p:cNvPicPr>
+          <p:nvPr/>
+        </p:nvPicPr>
+        <p:blipFill>
+          <a:blip r:embed="rId3"/>
+          <a:stretch>
+            <a:fillRect/>
+          </a:stretch>
+        </p:blipFill>
+        <p:spPr>
+          <a:xfrm>
+            <a:off x="6943060" y="-8357"/>
+            <a:ext cx="5248939" cy="1836678"/>
+          </a:xfrm>
+          <a:prstGeom prst="rect">
+            <a:avLst/>
+          </a:prstGeom>
+        </p:spPr>
+      </p:pic>
     </p:spTree>
     <p:extLst>
       <p:ext uri="{BB962C8B-B14F-4D97-AF65-F5344CB8AC3E}">
-        <p14:creationId xmlns:p14="http://schemas.microsoft.com/office/powerpoint/2010/main" val="2254303245"/>
+        <p14:creationId xmlns:p14="http://schemas.microsoft.com/office/powerpoint/2010/main" val="1177527087"/>
       </p:ext>
     </p:extLst>
   </p:cSld>
@@ -7642,7 +7690,7 @@
           <p:cNvPr id="2" name="Title 1">
             <a:extLst>
               <a:ext uri="{FF2B5EF4-FFF2-40B4-BE49-F238E27FC236}">
-                <a16:creationId xmlns:a16="http://schemas.microsoft.com/office/drawing/2014/main" id="{87976A0E-3B86-BD5A-B164-A9353F4D9A40}"/>
+                <a16:creationId xmlns:a16="http://schemas.microsoft.com/office/drawing/2014/main" id="{DBAB7B93-741F-751B-B5F9-E27762CAD4C7}"/>
               </a:ext>
             </a:extLst>
           </p:cNvPr>
@@ -7660,7 +7708,7 @@
           <a:p>
             <a:r>
               <a:rPr lang="en-US" dirty="0"/>
-              <a:t>Applying the Stats Stuff</a:t>
+              <a:t>Multicollinearity Process</a:t>
             </a:r>
           </a:p>
         </p:txBody>
@@ -7670,7 +7718,7 @@
           <p:cNvPr id="3" name="Content Placeholder 2">
             <a:extLst>
               <a:ext uri="{FF2B5EF4-FFF2-40B4-BE49-F238E27FC236}">
-                <a16:creationId xmlns:a16="http://schemas.microsoft.com/office/drawing/2014/main" id="{C88534AB-87B6-8BCB-5980-B03E4DBA1ED0}"/>
+                <a16:creationId xmlns:a16="http://schemas.microsoft.com/office/drawing/2014/main" id="{D5F24B8C-3C93-10B9-E249-DA76197B69D8}"/>
               </a:ext>
             </a:extLst>
           </p:cNvPr>
@@ -7683,78 +7731,88 @@
         </p:nvSpPr>
         <p:spPr>
           <a:xfrm>
-            <a:off x="1137147" y="1853754"/>
-            <a:ext cx="10229058" cy="4199727"/>
-          </a:xfrm>
-        </p:spPr>
-        <p:txBody>
-          <a:bodyPr/>
-          <a:lstStyle/>
-          <a:p>
-            <a:r>
-              <a:rPr lang="en-US" dirty="0"/>
-              <a:t>The first way that we’ll directly use the stats in ML is EDA – exploratory data analysis. </a:t>
-            </a:r>
-          </a:p>
-          <a:p>
-            <a:r>
-              <a:rPr lang="en-US" dirty="0"/>
-              <a:t>This is both art and science, there isn’t a specific set of steps. </a:t>
-            </a:r>
-          </a:p>
-          <a:p>
-            <a:r>
-              <a:rPr lang="en-US" dirty="0"/>
-              <a:t>We do EDA up front to basically look for stuff in our data that may matter. </a:t>
-            </a:r>
-          </a:p>
-          <a:p>
-            <a:pPr lvl="1"/>
-            <a:r>
-              <a:rPr lang="en-US" dirty="0"/>
-              <a:t>Missing values. </a:t>
-            </a:r>
-          </a:p>
-          <a:p>
-            <a:pPr lvl="1"/>
-            <a:r>
-              <a:rPr lang="en-US" dirty="0"/>
-              <a:t>Outliers. </a:t>
-            </a:r>
-          </a:p>
-          <a:p>
-            <a:pPr lvl="1"/>
-            <a:r>
-              <a:rPr lang="en-US" dirty="0"/>
-              <a:t>Errors. </a:t>
-            </a:r>
-          </a:p>
-          <a:p>
-            <a:pPr lvl="1"/>
-            <a:r>
-              <a:rPr lang="en-US" dirty="0"/>
-              <a:t>Patterns in data – numeric that is categorical, odd distributions, correlation, </a:t>
+            <a:off x="1451579" y="1853754"/>
+            <a:ext cx="9603275" cy="4199727"/>
+          </a:xfrm>
+        </p:spPr>
+        <p:txBody>
+          <a:bodyPr/>
+          <a:lstStyle/>
+          <a:p>
+            <a:r>
+              <a:rPr lang="en-US" dirty="0"/>
+              <a:t>We can do an iterative process to deal with </a:t>
             </a:r>
             <a:r>
               <a:rPr lang="en-US" dirty="0" err="1"/>
-              <a:t>etc</a:t>
-            </a:r>
-            <a:r>
-              <a:rPr lang="en-US" dirty="0"/>
-              <a:t>…</a:t>
-            </a:r>
-          </a:p>
-          <a:p>
-            <a:pPr lvl="1"/>
-            <a:r>
-              <a:rPr lang="en-US" dirty="0"/>
-              <a:t>Things that don’t vary. </a:t>
-            </a:r>
-          </a:p>
-          <a:p>
-            <a:r>
-              <a:rPr lang="en-US" dirty="0"/>
-              <a:t>Exactly what we are looking for varies, generally anything that may impact model accuracy. </a:t>
+              <a:t>m.c.</a:t>
+            </a:r>
+            <a:r>
+              <a:rPr lang="en-US" dirty="0"/>
+              <a:t>:</a:t>
+            </a:r>
+          </a:p>
+          <a:p>
+            <a:pPr lvl="1"/>
+            <a:r>
+              <a:rPr lang="en-US" dirty="0"/>
+              <a:t>Run the VIF values. </a:t>
+            </a:r>
+          </a:p>
+          <a:p>
+            <a:pPr lvl="1"/>
+            <a:r>
+              <a:rPr lang="en-US" dirty="0"/>
+              <a:t>Run a model via </a:t>
+            </a:r>
+            <a:r>
+              <a:rPr lang="en-US" dirty="0" err="1"/>
+              <a:t>statsmodels</a:t>
+            </a:r>
+            <a:r>
+              <a:rPr lang="en-US" dirty="0"/>
+              <a:t>. </a:t>
+            </a:r>
+          </a:p>
+          <a:p>
+            <a:pPr lvl="1"/>
+            <a:r>
+              <a:rPr lang="en-US" dirty="0"/>
+              <a:t>Remove some variables based on VIF, p-value, and domain knowledge (i.e. which measures actually overlap in real life.)</a:t>
+            </a:r>
+          </a:p>
+          <a:p>
+            <a:pPr lvl="1"/>
+            <a:r>
+              <a:rPr lang="en-US" dirty="0"/>
+              <a:t>Repeat as needed. </a:t>
+            </a:r>
+          </a:p>
+          <a:p>
+            <a:r>
+              <a:rPr lang="en-US" dirty="0"/>
+              <a:t>Tuning a model is largely a judgment call, don’t obsess over where to draw line now. </a:t>
+            </a:r>
+          </a:p>
+          <a:p>
+            <a:pPr lvl="1"/>
+            <a:r>
+              <a:rPr lang="en-US" dirty="0"/>
+              <a:t>No high p-values is a good rule of thumb for now. </a:t>
+            </a:r>
+          </a:p>
+          <a:p>
+            <a:r>
+              <a:rPr lang="en-US" dirty="0"/>
+              <a:t>We don’t need to know everything from </a:t>
+            </a:r>
+            <a:r>
+              <a:rPr lang="en-US" dirty="0" err="1"/>
+              <a:t>statsmodels</a:t>
+            </a:r>
+            <a:r>
+              <a:rPr lang="en-US" dirty="0"/>
+              <a:t>, there is a guide in the repo. </a:t>
             </a:r>
           </a:p>
         </p:txBody>
@@ -7762,7 +7820,7 @@
     </p:spTree>
     <p:extLst>
       <p:ext uri="{BB962C8B-B14F-4D97-AF65-F5344CB8AC3E}">
-        <p14:creationId xmlns:p14="http://schemas.microsoft.com/office/powerpoint/2010/main" val="681943827"/>
+        <p14:creationId xmlns:p14="http://schemas.microsoft.com/office/powerpoint/2010/main" val="3320482818"/>
       </p:ext>
     </p:extLst>
   </p:cSld>
@@ -7794,7 +7852,7 @@
           <p:cNvPr id="2" name="Title 1">
             <a:extLst>
               <a:ext uri="{FF2B5EF4-FFF2-40B4-BE49-F238E27FC236}">
-                <a16:creationId xmlns:a16="http://schemas.microsoft.com/office/drawing/2014/main" id="{4A4C0882-D407-8B64-8F0A-A2FCB1DD5132}"/>
+                <a16:creationId xmlns:a16="http://schemas.microsoft.com/office/drawing/2014/main" id="{F00579DB-FA27-0B61-6BD7-E48DD2765F59}"/>
               </a:ext>
             </a:extLst>
           </p:cNvPr>
@@ -7812,7 +7870,7 @@
           <a:p>
             <a:r>
               <a:rPr lang="en-US" dirty="0"/>
-              <a:t>EDA Process</a:t>
+              <a:t>R2 and Multiple Regression</a:t>
             </a:r>
           </a:p>
         </p:txBody>
@@ -7822,7 +7880,7 @@
           <p:cNvPr id="3" name="Content Placeholder 2">
             <a:extLst>
               <a:ext uri="{FF2B5EF4-FFF2-40B4-BE49-F238E27FC236}">
-                <a16:creationId xmlns:a16="http://schemas.microsoft.com/office/drawing/2014/main" id="{780F816F-240E-8E75-9E3E-BE8153876DC1}"/>
+                <a16:creationId xmlns:a16="http://schemas.microsoft.com/office/drawing/2014/main" id="{7D80E5D9-4ECB-3A34-3356-7F1C8EA976A8}"/>
               </a:ext>
             </a:extLst>
           </p:cNvPr>
@@ -7835,61 +7893,51 @@
         </p:nvSpPr>
         <p:spPr>
           <a:xfrm>
-            <a:off x="1451579" y="1935126"/>
-            <a:ext cx="9603275" cy="4118355"/>
-          </a:xfrm>
-        </p:spPr>
-        <p:txBody>
-          <a:bodyPr/>
-          <a:lstStyle/>
-          <a:p>
-            <a:r>
-              <a:rPr lang="en-US" dirty="0"/>
-              <a:t>Doing EDA is something that will feel more natural with time. </a:t>
-            </a:r>
-          </a:p>
-          <a:p>
-            <a:r>
-              <a:rPr lang="en-US" dirty="0"/>
-              <a:t>We generally want to look graphically and arithmetically. </a:t>
-            </a:r>
-          </a:p>
-          <a:p>
-            <a:pPr lvl="1"/>
-            <a:r>
-              <a:rPr lang="en-US" dirty="0"/>
-              <a:t>Info, describe, and head/sample can give us a look at the stats. </a:t>
-            </a:r>
-          </a:p>
-          <a:p>
-            <a:pPr lvl="1"/>
-            <a:r>
-              <a:rPr lang="en-US" dirty="0" err="1"/>
-              <a:t>Pairplot</a:t>
-            </a:r>
-            <a:r>
-              <a:rPr lang="en-US" dirty="0"/>
-              <a:t>, box plot, count plot can give us a visual look. </a:t>
-            </a:r>
-          </a:p>
-          <a:p>
-            <a:r>
-              <a:rPr lang="en-US" dirty="0"/>
-              <a:t>Usually need to do some iteration. </a:t>
-            </a:r>
-          </a:p>
-          <a:p>
-            <a:pPr lvl="1"/>
-            <a:r>
-              <a:rPr lang="en-US" dirty="0"/>
-              <a:t>Clean something you notice, e.g. outliers. </a:t>
-            </a:r>
-          </a:p>
-          <a:p>
-            <a:pPr lvl="1"/>
-            <a:r>
-              <a:rPr lang="en-US" dirty="0"/>
-              <a:t>Check again to see how the data looks. </a:t>
+            <a:off x="1451579" y="2015732"/>
+            <a:ext cx="9603275" cy="4037749"/>
+          </a:xfrm>
+        </p:spPr>
+        <p:txBody>
+          <a:bodyPr/>
+          <a:lstStyle/>
+          <a:p>
+            <a:r>
+              <a:rPr lang="en-US" dirty="0"/>
+              <a:t>We can measure the ‘completeness’ of our model with R2. </a:t>
+            </a:r>
+          </a:p>
+          <a:p>
+            <a:pPr lvl="1"/>
+            <a:r>
+              <a:rPr lang="en-US" dirty="0"/>
+              <a:t>How much of the variance of Y do we capture, and how much do we miss? </a:t>
+            </a:r>
+          </a:p>
+          <a:p>
+            <a:pPr lvl="1"/>
+            <a:r>
+              <a:rPr lang="en-US" dirty="0"/>
+              <a:t>Default score is easy to use and compare to others. </a:t>
+            </a:r>
+          </a:p>
+          <a:p>
+            <a:r>
+              <a:rPr lang="en-US" dirty="0"/>
+              <a:t>We can build a more complete model by adding inputs to X. </a:t>
+            </a:r>
+          </a:p>
+          <a:p>
+            <a:pPr lvl="1"/>
+            <a:r>
+              <a:rPr lang="en-US" dirty="0"/>
+              <a:t>Most things are determined by many factors. </a:t>
+            </a:r>
+          </a:p>
+          <a:p>
+            <a:pPr lvl="1"/>
+            <a:r>
+              <a:rPr lang="en-US" dirty="0"/>
+              <a:t>Little changes, other than it becomes harder to visualize and do by hand. </a:t>
             </a:r>
           </a:p>
         </p:txBody>
@@ -7897,7 +7945,7 @@
     </p:spTree>
     <p:extLst>
       <p:ext uri="{BB962C8B-B14F-4D97-AF65-F5344CB8AC3E}">
-        <p14:creationId xmlns:p14="http://schemas.microsoft.com/office/powerpoint/2010/main" val="3257656829"/>
+        <p14:creationId xmlns:p14="http://schemas.microsoft.com/office/powerpoint/2010/main" val="2254303245"/>
       </p:ext>
     </p:extLst>
   </p:cSld>
@@ -7929,7 +7977,7 @@
           <p:cNvPr id="2" name="Title 1">
             <a:extLst>
               <a:ext uri="{FF2B5EF4-FFF2-40B4-BE49-F238E27FC236}">
-                <a16:creationId xmlns:a16="http://schemas.microsoft.com/office/drawing/2014/main" id="{D5817EF8-E39C-2C99-C847-C9C851B0D810}"/>
+                <a16:creationId xmlns:a16="http://schemas.microsoft.com/office/drawing/2014/main" id="{87976A0E-3B86-BD5A-B164-A9353F4D9A40}"/>
               </a:ext>
             </a:extLst>
           </p:cNvPr>
@@ -7947,7 +7995,7 @@
           <a:p>
             <a:r>
               <a:rPr lang="en-US" dirty="0"/>
-              <a:t>Example – Nothing of interest</a:t>
+              <a:t>Applying the Stats Stuff</a:t>
             </a:r>
           </a:p>
         </p:txBody>
@@ -7957,7 +8005,7 @@
           <p:cNvPr id="3" name="Content Placeholder 2">
             <a:extLst>
               <a:ext uri="{FF2B5EF4-FFF2-40B4-BE49-F238E27FC236}">
-                <a16:creationId xmlns:a16="http://schemas.microsoft.com/office/drawing/2014/main" id="{0007CA20-2F49-6A82-8DAB-B37C4A40A4D8}"/>
+                <a16:creationId xmlns:a16="http://schemas.microsoft.com/office/drawing/2014/main" id="{C88534AB-87B6-8BCB-5980-B03E4DBA1ED0}"/>
               </a:ext>
             </a:extLst>
           </p:cNvPr>
@@ -7970,99 +8018,86 @@
         </p:nvSpPr>
         <p:spPr>
           <a:xfrm>
-            <a:off x="423001" y="2015732"/>
-            <a:ext cx="5830216" cy="3450613"/>
-          </a:xfrm>
-        </p:spPr>
-        <p:txBody>
-          <a:bodyPr/>
-          <a:lstStyle/>
-          <a:p>
-            <a:r>
-              <a:rPr lang="en-US" dirty="0"/>
-              <a:t>This is some data with nothing obvious to address.</a:t>
-            </a:r>
-          </a:p>
-          <a:p>
-            <a:pPr lvl="1"/>
-            <a:r>
-              <a:rPr lang="en-US" dirty="0"/>
-              <a:t>No odd patterns. </a:t>
-            </a:r>
-          </a:p>
-          <a:p>
-            <a:pPr lvl="1"/>
-            <a:r>
-              <a:rPr lang="en-US" dirty="0"/>
-              <a:t>No clear outliers.  </a:t>
-            </a:r>
-          </a:p>
-          <a:p>
-            <a:pPr lvl="1"/>
-            <a:r>
-              <a:rPr lang="en-US" dirty="0"/>
-              <a:t>Variables seem to have a ‘normal’ amount of variance. </a:t>
-            </a:r>
-          </a:p>
-          <a:p>
-            <a:r>
-              <a:rPr lang="en-US" dirty="0"/>
-              <a:t>This data is ready to be used by a model. </a:t>
-            </a:r>
-          </a:p>
-        </p:txBody>
-      </p:sp>
-      <p:pic>
-        <p:nvPicPr>
-          <p:cNvPr id="2050" name="Picture 2" descr="Dramatically Improve Your Exploratory Data Analysis (EDA) | Towards Data  Science">
-            <a:extLst>
-              <a:ext uri="{FF2B5EF4-FFF2-40B4-BE49-F238E27FC236}">
-                <a16:creationId xmlns:a16="http://schemas.microsoft.com/office/drawing/2014/main" id="{62C6B302-3011-29D1-D3F3-EDB4D3F80499}"/>
-              </a:ext>
-            </a:extLst>
-          </p:cNvPr>
-          <p:cNvPicPr>
-            <a:picLocks noChangeAspect="1" noChangeArrowheads="1"/>
-          </p:cNvPicPr>
-          <p:nvPr/>
-        </p:nvPicPr>
-        <p:blipFill>
-          <a:blip r:embed="rId2">
-            <a:extLst>
-              <a:ext uri="{28A0092B-C50C-407E-A947-70E740481C1C}">
-                <a14:useLocalDpi xmlns:a14="http://schemas.microsoft.com/office/drawing/2010/main" val="0"/>
-              </a:ext>
-            </a:extLst>
-          </a:blip>
-          <a:srcRect/>
-          <a:stretch>
-            <a:fillRect/>
-          </a:stretch>
-        </p:blipFill>
-        <p:spPr bwMode="auto">
-          <a:xfrm>
-            <a:off x="6253216" y="1532238"/>
-            <a:ext cx="5830217" cy="4707924"/>
-          </a:xfrm>
-          <a:prstGeom prst="rect">
-            <a:avLst/>
-          </a:prstGeom>
-          <a:noFill/>
-          <a:extLst>
-            <a:ext uri="{909E8E84-426E-40DD-AFC4-6F175D3DCCD1}">
-              <a14:hiddenFill xmlns:a14="http://schemas.microsoft.com/office/drawing/2010/main">
-                <a:solidFill>
-                  <a:srgbClr val="FFFFFF"/>
-                </a:solidFill>
-              </a14:hiddenFill>
-            </a:ext>
-          </a:extLst>
-        </p:spPr>
-      </p:pic>
+            <a:off x="1137147" y="1853754"/>
+            <a:ext cx="10229058" cy="4199727"/>
+          </a:xfrm>
+        </p:spPr>
+        <p:txBody>
+          <a:bodyPr/>
+          <a:lstStyle/>
+          <a:p>
+            <a:r>
+              <a:rPr lang="en-US" dirty="0"/>
+              <a:t>The first way that we’ll directly use the stats in ML is EDA – exploratory data analysis. </a:t>
+            </a:r>
+          </a:p>
+          <a:p>
+            <a:r>
+              <a:rPr lang="en-US" dirty="0"/>
+              <a:t>This is both art and science, there isn’t a specific set of steps. </a:t>
+            </a:r>
+          </a:p>
+          <a:p>
+            <a:r>
+              <a:rPr lang="en-US" dirty="0"/>
+              <a:t>We do EDA up front to basically look for stuff in our data that may matter. </a:t>
+            </a:r>
+          </a:p>
+          <a:p>
+            <a:pPr lvl="1"/>
+            <a:r>
+              <a:rPr lang="en-US" dirty="0"/>
+              <a:t>Missing values. </a:t>
+            </a:r>
+          </a:p>
+          <a:p>
+            <a:pPr lvl="1"/>
+            <a:r>
+              <a:rPr lang="en-US" dirty="0"/>
+              <a:t>Outliers. </a:t>
+            </a:r>
+          </a:p>
+          <a:p>
+            <a:pPr lvl="1"/>
+            <a:r>
+              <a:rPr lang="en-US" dirty="0"/>
+              <a:t>Errors. </a:t>
+            </a:r>
+          </a:p>
+          <a:p>
+            <a:pPr lvl="1"/>
+            <a:r>
+              <a:rPr lang="en-US" dirty="0"/>
+              <a:t>Patterns in data – numeric that is categorical, odd distributions, correlation, </a:t>
+            </a:r>
+            <a:r>
+              <a:rPr lang="en-US" dirty="0" err="1"/>
+              <a:t>etc</a:t>
+            </a:r>
+            <a:r>
+              <a:rPr lang="en-US" dirty="0"/>
+              <a:t>…</a:t>
+            </a:r>
+          </a:p>
+          <a:p>
+            <a:pPr lvl="1"/>
+            <a:r>
+              <a:rPr lang="en-US" dirty="0"/>
+              <a:t>Things that don’t vary. </a:t>
+            </a:r>
+          </a:p>
+          <a:p>
+            <a:r>
+              <a:rPr lang="en-US" dirty="0"/>
+              <a:t>Exactly what we are looking for varies, generally anything that may impact model accuracy. </a:t>
+            </a:r>
+          </a:p>
+        </p:txBody>
+      </p:sp>
     </p:spTree>
     <p:extLst>
       <p:ext uri="{BB962C8B-B14F-4D97-AF65-F5344CB8AC3E}">
-        <p14:creationId xmlns:p14="http://schemas.microsoft.com/office/powerpoint/2010/main" val="4244201324"/>
+        <p14:creationId xmlns:p14="http://schemas.microsoft.com/office/powerpoint/2010/main" val="681943827"/>
       </p:ext>
     </p:extLst>
   </p:cSld>
@@ -8094,7 +8129,7 @@
           <p:cNvPr id="2" name="Title 1">
             <a:extLst>
               <a:ext uri="{FF2B5EF4-FFF2-40B4-BE49-F238E27FC236}">
-                <a16:creationId xmlns:a16="http://schemas.microsoft.com/office/drawing/2014/main" id="{F646F2B0-E9E8-6ECD-010A-951DCE13AF15}"/>
+                <a16:creationId xmlns:a16="http://schemas.microsoft.com/office/drawing/2014/main" id="{4A4C0882-D407-8B64-8F0A-A2FCB1DD5132}"/>
               </a:ext>
             </a:extLst>
           </p:cNvPr>
@@ -8112,7 +8147,7 @@
           <a:p>
             <a:r>
               <a:rPr lang="en-US" dirty="0"/>
-              <a:t>Something Weird!</a:t>
+              <a:t>EDA Process</a:t>
             </a:r>
           </a:p>
         </p:txBody>
@@ -8122,7 +8157,7 @@
           <p:cNvPr id="3" name="Content Placeholder 2">
             <a:extLst>
               <a:ext uri="{FF2B5EF4-FFF2-40B4-BE49-F238E27FC236}">
-                <a16:creationId xmlns:a16="http://schemas.microsoft.com/office/drawing/2014/main" id="{E3E974AF-233E-0DB4-053E-917DB605B8F3}"/>
+                <a16:creationId xmlns:a16="http://schemas.microsoft.com/office/drawing/2014/main" id="{780F816F-240E-8E75-9E3E-BE8153876DC1}"/>
               </a:ext>
             </a:extLst>
           </p:cNvPr>
@@ -8135,92 +8170,69 @@
         </p:nvSpPr>
         <p:spPr>
           <a:xfrm>
-            <a:off x="8669278" y="2015732"/>
-            <a:ext cx="3522721" cy="4119254"/>
-          </a:xfrm>
-        </p:spPr>
-        <p:txBody>
-          <a:bodyPr/>
-          <a:lstStyle/>
-          <a:p>
-            <a:r>
-              <a:rPr lang="en-US" dirty="0"/>
-              <a:t>This dataset shows a clear separation of one class from the other two. </a:t>
-            </a:r>
-          </a:p>
-          <a:p>
-            <a:r>
-              <a:rPr lang="en-US" dirty="0"/>
-              <a:t>This may guide us…</a:t>
-            </a:r>
-          </a:p>
-          <a:p>
-            <a:pPr lvl="1"/>
-            <a:r>
-              <a:rPr lang="en-US" dirty="0"/>
-              <a:t>If we want to classify, that division helps. </a:t>
-            </a:r>
-          </a:p>
-          <a:p>
-            <a:pPr lvl="1"/>
-            <a:r>
-              <a:rPr lang="en-US" dirty="0"/>
-              <a:t>If that value is a feature, maybe it is better categorical. (??)</a:t>
-            </a:r>
-          </a:p>
-        </p:txBody>
-      </p:sp>
-      <p:pic>
-        <p:nvPicPr>
-          <p:cNvPr id="1026" name="Picture 2" descr="Fundamentals of Exploratory Data Analysis with Python Implementation">
-            <a:extLst>
-              <a:ext uri="{FF2B5EF4-FFF2-40B4-BE49-F238E27FC236}">
-                <a16:creationId xmlns:a16="http://schemas.microsoft.com/office/drawing/2014/main" id="{BC0AE3D8-EB56-C1D7-273C-DF74389A7933}"/>
-              </a:ext>
-            </a:extLst>
-          </p:cNvPr>
-          <p:cNvPicPr>
-            <a:picLocks noChangeAspect="1" noChangeArrowheads="1"/>
-          </p:cNvPicPr>
-          <p:nvPr/>
-        </p:nvPicPr>
-        <p:blipFill>
-          <a:blip r:embed="rId2">
-            <a:extLst>
-              <a:ext uri="{28A0092B-C50C-407E-A947-70E740481C1C}">
-                <a14:useLocalDpi xmlns:a14="http://schemas.microsoft.com/office/drawing/2010/main" val="0"/>
-              </a:ext>
-            </a:extLst>
-          </a:blip>
-          <a:srcRect/>
-          <a:stretch>
-            <a:fillRect/>
-          </a:stretch>
-        </p:blipFill>
-        <p:spPr bwMode="auto">
-          <a:xfrm>
-            <a:off x="180753" y="1853754"/>
-            <a:ext cx="8488526" cy="4203368"/>
-          </a:xfrm>
-          <a:prstGeom prst="rect">
-            <a:avLst/>
-          </a:prstGeom>
-          <a:noFill/>
-          <a:extLst>
-            <a:ext uri="{909E8E84-426E-40DD-AFC4-6F175D3DCCD1}">
-              <a14:hiddenFill xmlns:a14="http://schemas.microsoft.com/office/drawing/2010/main">
-                <a:solidFill>
-                  <a:srgbClr val="FFFFFF"/>
-                </a:solidFill>
-              </a14:hiddenFill>
-            </a:ext>
-          </a:extLst>
-        </p:spPr>
-      </p:pic>
+            <a:off x="1451579" y="1935126"/>
+            <a:ext cx="9603275" cy="4118355"/>
+          </a:xfrm>
+        </p:spPr>
+        <p:txBody>
+          <a:bodyPr/>
+          <a:lstStyle/>
+          <a:p>
+            <a:r>
+              <a:rPr lang="en-US" dirty="0"/>
+              <a:t>Doing EDA is something that will feel more natural with time. </a:t>
+            </a:r>
+          </a:p>
+          <a:p>
+            <a:r>
+              <a:rPr lang="en-US" dirty="0"/>
+              <a:t>We generally want to look graphically and arithmetically. </a:t>
+            </a:r>
+          </a:p>
+          <a:p>
+            <a:pPr lvl="1"/>
+            <a:r>
+              <a:rPr lang="en-US" dirty="0"/>
+              <a:t>Info, describe, and head/sample can give us a look at the stats. </a:t>
+            </a:r>
+          </a:p>
+          <a:p>
+            <a:pPr lvl="1"/>
+            <a:r>
+              <a:rPr lang="en-US" dirty="0" err="1"/>
+              <a:t>Pairplot</a:t>
+            </a:r>
+            <a:r>
+              <a:rPr lang="en-US" dirty="0"/>
+              <a:t>, box plot, count plot can give us a visual look. </a:t>
+            </a:r>
+          </a:p>
+          <a:p>
+            <a:r>
+              <a:rPr lang="en-US" dirty="0"/>
+              <a:t>Usually need to do some iteration. </a:t>
+            </a:r>
+          </a:p>
+          <a:p>
+            <a:pPr lvl="1"/>
+            <a:r>
+              <a:rPr lang="en-US" dirty="0"/>
+              <a:t>Clean something you notice, e.g. outliers. </a:t>
+            </a:r>
+          </a:p>
+          <a:p>
+            <a:pPr lvl="1"/>
+            <a:r>
+              <a:rPr lang="en-US" dirty="0"/>
+              <a:t>Check again to see how the data looks. </a:t>
+            </a:r>
+          </a:p>
+        </p:txBody>
+      </p:sp>
     </p:spTree>
     <p:extLst>
       <p:ext uri="{BB962C8B-B14F-4D97-AF65-F5344CB8AC3E}">
-        <p14:creationId xmlns:p14="http://schemas.microsoft.com/office/powerpoint/2010/main" val="1405714686"/>
+        <p14:creationId xmlns:p14="http://schemas.microsoft.com/office/powerpoint/2010/main" val="3257656829"/>
       </p:ext>
     </p:extLst>
   </p:cSld>
@@ -8252,6 +8264,329 @@
           <p:cNvPr id="2" name="Title 1">
             <a:extLst>
               <a:ext uri="{FF2B5EF4-FFF2-40B4-BE49-F238E27FC236}">
+                <a16:creationId xmlns:a16="http://schemas.microsoft.com/office/drawing/2014/main" id="{D5817EF8-E39C-2C99-C847-C9C851B0D810}"/>
+              </a:ext>
+            </a:extLst>
+          </p:cNvPr>
+          <p:cNvSpPr>
+            <a:spLocks noGrp="1"/>
+          </p:cNvSpPr>
+          <p:nvPr>
+            <p:ph type="title"/>
+          </p:nvPr>
+        </p:nvSpPr>
+        <p:spPr/>
+        <p:txBody>
+          <a:bodyPr/>
+          <a:lstStyle/>
+          <a:p>
+            <a:r>
+              <a:rPr lang="en-US" dirty="0"/>
+              <a:t>Example – Nothing of interest</a:t>
+            </a:r>
+          </a:p>
+        </p:txBody>
+      </p:sp>
+      <p:sp>
+        <p:nvSpPr>
+          <p:cNvPr id="3" name="Content Placeholder 2">
+            <a:extLst>
+              <a:ext uri="{FF2B5EF4-FFF2-40B4-BE49-F238E27FC236}">
+                <a16:creationId xmlns:a16="http://schemas.microsoft.com/office/drawing/2014/main" id="{0007CA20-2F49-6A82-8DAB-B37C4A40A4D8}"/>
+              </a:ext>
+            </a:extLst>
+          </p:cNvPr>
+          <p:cNvSpPr>
+            <a:spLocks noGrp="1"/>
+          </p:cNvSpPr>
+          <p:nvPr>
+            <p:ph idx="1"/>
+          </p:nvPr>
+        </p:nvSpPr>
+        <p:spPr>
+          <a:xfrm>
+            <a:off x="423001" y="2015732"/>
+            <a:ext cx="5830216" cy="3450613"/>
+          </a:xfrm>
+        </p:spPr>
+        <p:txBody>
+          <a:bodyPr/>
+          <a:lstStyle/>
+          <a:p>
+            <a:r>
+              <a:rPr lang="en-US" dirty="0"/>
+              <a:t>This is some data with nothing obvious to address.</a:t>
+            </a:r>
+          </a:p>
+          <a:p>
+            <a:pPr lvl="1"/>
+            <a:r>
+              <a:rPr lang="en-US" dirty="0"/>
+              <a:t>No odd patterns. </a:t>
+            </a:r>
+          </a:p>
+          <a:p>
+            <a:pPr lvl="1"/>
+            <a:r>
+              <a:rPr lang="en-US" dirty="0"/>
+              <a:t>No clear outliers.  </a:t>
+            </a:r>
+          </a:p>
+          <a:p>
+            <a:pPr lvl="1"/>
+            <a:r>
+              <a:rPr lang="en-US" dirty="0"/>
+              <a:t>Variables seem to have a ‘normal’ amount of variance. </a:t>
+            </a:r>
+          </a:p>
+          <a:p>
+            <a:r>
+              <a:rPr lang="en-US" dirty="0"/>
+              <a:t>This data is ready to be used by a model. </a:t>
+            </a:r>
+          </a:p>
+        </p:txBody>
+      </p:sp>
+      <p:pic>
+        <p:nvPicPr>
+          <p:cNvPr id="2050" name="Picture 2" descr="Dramatically Improve Your Exploratory Data Analysis (EDA) | Towards Data  Science">
+            <a:extLst>
+              <a:ext uri="{FF2B5EF4-FFF2-40B4-BE49-F238E27FC236}">
+                <a16:creationId xmlns:a16="http://schemas.microsoft.com/office/drawing/2014/main" id="{62C6B302-3011-29D1-D3F3-EDB4D3F80499}"/>
+              </a:ext>
+            </a:extLst>
+          </p:cNvPr>
+          <p:cNvPicPr>
+            <a:picLocks noChangeAspect="1" noChangeArrowheads="1"/>
+          </p:cNvPicPr>
+          <p:nvPr/>
+        </p:nvPicPr>
+        <p:blipFill>
+          <a:blip r:embed="rId2">
+            <a:extLst>
+              <a:ext uri="{28A0092B-C50C-407E-A947-70E740481C1C}">
+                <a14:useLocalDpi xmlns:a14="http://schemas.microsoft.com/office/drawing/2010/main" val="0"/>
+              </a:ext>
+            </a:extLst>
+          </a:blip>
+          <a:srcRect/>
+          <a:stretch>
+            <a:fillRect/>
+          </a:stretch>
+        </p:blipFill>
+        <p:spPr bwMode="auto">
+          <a:xfrm>
+            <a:off x="6253216" y="1532238"/>
+            <a:ext cx="5830217" cy="4707924"/>
+          </a:xfrm>
+          <a:prstGeom prst="rect">
+            <a:avLst/>
+          </a:prstGeom>
+          <a:noFill/>
+          <a:extLst>
+            <a:ext uri="{909E8E84-426E-40DD-AFC4-6F175D3DCCD1}">
+              <a14:hiddenFill xmlns:a14="http://schemas.microsoft.com/office/drawing/2010/main">
+                <a:solidFill>
+                  <a:srgbClr val="FFFFFF"/>
+                </a:solidFill>
+              </a14:hiddenFill>
+            </a:ext>
+          </a:extLst>
+        </p:spPr>
+      </p:pic>
+    </p:spTree>
+    <p:extLst>
+      <p:ext uri="{BB962C8B-B14F-4D97-AF65-F5344CB8AC3E}">
+        <p14:creationId xmlns:p14="http://schemas.microsoft.com/office/powerpoint/2010/main" val="4244201324"/>
+      </p:ext>
+    </p:extLst>
+  </p:cSld>
+  <p:clrMapOvr>
+    <a:masterClrMapping/>
+  </p:clrMapOvr>
+</p:sld>
+</file>
+
+<file path=ppt/slides/slide36.xml><?xml version="1.0" encoding="utf-8"?>
+<p:sld xmlns:a="http://schemas.openxmlformats.org/drawingml/2006/main" xmlns:r="http://schemas.openxmlformats.org/officeDocument/2006/relationships" xmlns:p="http://schemas.openxmlformats.org/presentationml/2006/main">
+  <p:cSld>
+    <p:spTree>
+      <p:nvGrpSpPr>
+        <p:cNvPr id="1" name=""/>
+        <p:cNvGrpSpPr/>
+        <p:nvPr/>
+      </p:nvGrpSpPr>
+      <p:grpSpPr>
+        <a:xfrm>
+          <a:off x="0" y="0"/>
+          <a:ext cx="0" cy="0"/>
+          <a:chOff x="0" y="0"/>
+          <a:chExt cx="0" cy="0"/>
+        </a:xfrm>
+      </p:grpSpPr>
+      <p:sp>
+        <p:nvSpPr>
+          <p:cNvPr id="2" name="Title 1">
+            <a:extLst>
+              <a:ext uri="{FF2B5EF4-FFF2-40B4-BE49-F238E27FC236}">
+                <a16:creationId xmlns:a16="http://schemas.microsoft.com/office/drawing/2014/main" id="{F646F2B0-E9E8-6ECD-010A-951DCE13AF15}"/>
+              </a:ext>
+            </a:extLst>
+          </p:cNvPr>
+          <p:cNvSpPr>
+            <a:spLocks noGrp="1"/>
+          </p:cNvSpPr>
+          <p:nvPr>
+            <p:ph type="title"/>
+          </p:nvPr>
+        </p:nvSpPr>
+        <p:spPr/>
+        <p:txBody>
+          <a:bodyPr/>
+          <a:lstStyle/>
+          <a:p>
+            <a:r>
+              <a:rPr lang="en-US" dirty="0"/>
+              <a:t>Something Weird!</a:t>
+            </a:r>
+          </a:p>
+        </p:txBody>
+      </p:sp>
+      <p:sp>
+        <p:nvSpPr>
+          <p:cNvPr id="3" name="Content Placeholder 2">
+            <a:extLst>
+              <a:ext uri="{FF2B5EF4-FFF2-40B4-BE49-F238E27FC236}">
+                <a16:creationId xmlns:a16="http://schemas.microsoft.com/office/drawing/2014/main" id="{E3E974AF-233E-0DB4-053E-917DB605B8F3}"/>
+              </a:ext>
+            </a:extLst>
+          </p:cNvPr>
+          <p:cNvSpPr>
+            <a:spLocks noGrp="1"/>
+          </p:cNvSpPr>
+          <p:nvPr>
+            <p:ph idx="1"/>
+          </p:nvPr>
+        </p:nvSpPr>
+        <p:spPr>
+          <a:xfrm>
+            <a:off x="8669278" y="2015732"/>
+            <a:ext cx="3522721" cy="4119254"/>
+          </a:xfrm>
+        </p:spPr>
+        <p:txBody>
+          <a:bodyPr/>
+          <a:lstStyle/>
+          <a:p>
+            <a:r>
+              <a:rPr lang="en-US" dirty="0"/>
+              <a:t>This dataset shows a clear separation of one class from the other two. </a:t>
+            </a:r>
+          </a:p>
+          <a:p>
+            <a:r>
+              <a:rPr lang="en-US" dirty="0"/>
+              <a:t>This may guide us…</a:t>
+            </a:r>
+          </a:p>
+          <a:p>
+            <a:pPr lvl="1"/>
+            <a:r>
+              <a:rPr lang="en-US" dirty="0"/>
+              <a:t>If we want to classify, that division helps. </a:t>
+            </a:r>
+          </a:p>
+          <a:p>
+            <a:pPr lvl="1"/>
+            <a:r>
+              <a:rPr lang="en-US" dirty="0"/>
+              <a:t>If that value is a feature, maybe it is better categorical. (??)</a:t>
+            </a:r>
+          </a:p>
+        </p:txBody>
+      </p:sp>
+      <p:pic>
+        <p:nvPicPr>
+          <p:cNvPr id="1026" name="Picture 2" descr="Fundamentals of Exploratory Data Analysis with Python Implementation">
+            <a:extLst>
+              <a:ext uri="{FF2B5EF4-FFF2-40B4-BE49-F238E27FC236}">
+                <a16:creationId xmlns:a16="http://schemas.microsoft.com/office/drawing/2014/main" id="{BC0AE3D8-EB56-C1D7-273C-DF74389A7933}"/>
+              </a:ext>
+            </a:extLst>
+          </p:cNvPr>
+          <p:cNvPicPr>
+            <a:picLocks noChangeAspect="1" noChangeArrowheads="1"/>
+          </p:cNvPicPr>
+          <p:nvPr/>
+        </p:nvPicPr>
+        <p:blipFill>
+          <a:blip r:embed="rId2">
+            <a:extLst>
+              <a:ext uri="{28A0092B-C50C-407E-A947-70E740481C1C}">
+                <a14:useLocalDpi xmlns:a14="http://schemas.microsoft.com/office/drawing/2010/main" val="0"/>
+              </a:ext>
+            </a:extLst>
+          </a:blip>
+          <a:srcRect/>
+          <a:stretch>
+            <a:fillRect/>
+          </a:stretch>
+        </p:blipFill>
+        <p:spPr bwMode="auto">
+          <a:xfrm>
+            <a:off x="180753" y="1853754"/>
+            <a:ext cx="8488526" cy="4203368"/>
+          </a:xfrm>
+          <a:prstGeom prst="rect">
+            <a:avLst/>
+          </a:prstGeom>
+          <a:noFill/>
+          <a:extLst>
+            <a:ext uri="{909E8E84-426E-40DD-AFC4-6F175D3DCCD1}">
+              <a14:hiddenFill xmlns:a14="http://schemas.microsoft.com/office/drawing/2010/main">
+                <a:solidFill>
+                  <a:srgbClr val="FFFFFF"/>
+                </a:solidFill>
+              </a14:hiddenFill>
+            </a:ext>
+          </a:extLst>
+        </p:spPr>
+      </p:pic>
+    </p:spTree>
+    <p:extLst>
+      <p:ext uri="{BB962C8B-B14F-4D97-AF65-F5344CB8AC3E}">
+        <p14:creationId xmlns:p14="http://schemas.microsoft.com/office/powerpoint/2010/main" val="1405714686"/>
+      </p:ext>
+    </p:extLst>
+  </p:cSld>
+  <p:clrMapOvr>
+    <a:masterClrMapping/>
+  </p:clrMapOvr>
+</p:sld>
+</file>
+
+<file path=ppt/slides/slide37.xml><?xml version="1.0" encoding="utf-8"?>
+<p:sld xmlns:a="http://schemas.openxmlformats.org/drawingml/2006/main" xmlns:r="http://schemas.openxmlformats.org/officeDocument/2006/relationships" xmlns:p="http://schemas.openxmlformats.org/presentationml/2006/main">
+  <p:cSld>
+    <p:spTree>
+      <p:nvGrpSpPr>
+        <p:cNvPr id="1" name=""/>
+        <p:cNvGrpSpPr/>
+        <p:nvPr/>
+      </p:nvGrpSpPr>
+      <p:grpSpPr>
+        <a:xfrm>
+          <a:off x="0" y="0"/>
+          <a:ext cx="0" cy="0"/>
+          <a:chOff x="0" y="0"/>
+          <a:chExt cx="0" cy="0"/>
+        </a:xfrm>
+      </p:grpSpPr>
+      <p:sp>
+        <p:nvSpPr>
+          <p:cNvPr id="2" name="Title 1">
+            <a:extLst>
+              <a:ext uri="{FF2B5EF4-FFF2-40B4-BE49-F238E27FC236}">
                 <a16:creationId xmlns:a16="http://schemas.microsoft.com/office/drawing/2014/main" id="{43CC361B-31A2-BBC7-8128-D8B8C25AD75B}"/>
               </a:ext>
             </a:extLst>
@@ -8385,7 +8720,7 @@
 </p:sld>
 </file>
 
-<file path=ppt/slides/slide36.xml><?xml version="1.0" encoding="utf-8"?>
+<file path=ppt/slides/slide38.xml><?xml version="1.0" encoding="utf-8"?>
 <p:sld xmlns:a="http://schemas.openxmlformats.org/drawingml/2006/main" xmlns:r="http://schemas.openxmlformats.org/officeDocument/2006/relationships" xmlns:p="http://schemas.openxmlformats.org/presentationml/2006/main">
   <p:cSld>
     <p:spTree>
